--- a/KMG_HR_AI_Presentation.pptx
+++ b/KMG_HR_AI_Presentation.pptx
@@ -35,6 +35,7 @@
     <p:sldId id="273" r:id="rId30"/>
     <p:sldId id="274" r:id="rId31"/>
     <p:sldId id="275" r:id="rId32"/>
+    <p:sldId id="276" r:id="rId33"/>
   </p:sldIdLst>
   <p:sldSz cx="12188825" cy="6858000"/>
   <p:notesSz cx="7559675" cy="10691813"/>
@@ -172,7 +173,7 @@
         <p:txBody>
           <a:bodyPr/>
           <a:p>
-            <a:fld id="{60335914-CA49-4CB8-95E8-974E2084ECCB}" type="slidenum">
+            <a:fld id="{7EB4410C-A1D4-4AE5-AC0C-3B165A53350F}" type="slidenum">
               <a:t>&lt;#&gt;</a:t>
             </a:fld>
           </a:p>
@@ -255,7 +256,7 @@
         <p:txBody>
           <a:bodyPr/>
           <a:p>
-            <a:fld id="{B6C45EAF-3F24-476C-AD26-47BDF0C43757}" type="slidenum">
+            <a:fld id="{C6476016-0599-4ECB-AF71-3EA19216835D}" type="slidenum">
               <a:t>&lt;#&gt;</a:t>
             </a:fld>
           </a:p>
@@ -338,7 +339,7 @@
         <p:txBody>
           <a:bodyPr/>
           <a:p>
-            <a:fld id="{305BCA4C-BB20-4586-BB2C-5FFD2E7EC325}" type="slidenum">
+            <a:fld id="{3464F71B-DF94-4ED9-A56B-2FD9E8C74140}" type="slidenum">
               <a:t>&lt;#&gt;</a:t>
             </a:fld>
           </a:p>
@@ -421,7 +422,7 @@
         <p:txBody>
           <a:bodyPr/>
           <a:p>
-            <a:fld id="{87A80C1E-A076-4DF1-B319-AE221942E47B}" type="slidenum">
+            <a:fld id="{D645B2AF-AC1B-443E-A5B8-59EBE4BDC2D3}" type="slidenum">
               <a:t>&lt;#&gt;</a:t>
             </a:fld>
           </a:p>
@@ -504,7 +505,7 @@
         <p:txBody>
           <a:bodyPr/>
           <a:p>
-            <a:fld id="{6E78837E-BC78-4FC3-A1AB-2DDA51BC0689}" type="slidenum">
+            <a:fld id="{05DC4CFD-FE87-4FCF-A46C-DEEF2C2690B3}" type="slidenum">
               <a:t>&lt;#&gt;</a:t>
             </a:fld>
           </a:p>
@@ -670,7 +671,7 @@
         <p:txBody>
           <a:bodyPr/>
           <a:p>
-            <a:fld id="{D0DA220A-0D1C-412D-B5FA-27D1C60B4FDE}" type="slidenum">
+            <a:fld id="{61BC701A-7172-46FB-AD7B-BF83EA650216}" type="slidenum">
               <a:t>&lt;#&gt;</a:t>
             </a:fld>
           </a:p>
@@ -753,7 +754,7 @@
         <p:txBody>
           <a:bodyPr/>
           <a:p>
-            <a:fld id="{6E81C418-34FD-4C54-8C8B-54639FFE75ED}" type="slidenum">
+            <a:fld id="{E1F5C319-8C9C-4BAC-BE46-7F8B0CBEAF58}" type="slidenum">
               <a:t>&lt;#&gt;</a:t>
             </a:fld>
           </a:p>
@@ -962,7 +963,7 @@
         <p:txBody>
           <a:bodyPr/>
           <a:p>
-            <a:fld id="{3246BD39-DB61-4A4B-B0DF-CE882646E5D0}" type="slidenum">
+            <a:fld id="{3F636BAB-B28F-43B4-AFA0-E2475585C6B1}" type="slidenum">
               <a:t>&lt;#&gt;</a:t>
             </a:fld>
           </a:p>
@@ -1045,7 +1046,7 @@
         <p:txBody>
           <a:bodyPr/>
           <a:p>
-            <a:fld id="{DE6408C5-EB7E-4478-91A2-8900D3C51955}" type="slidenum">
+            <a:fld id="{CF454358-C7FA-4954-B43E-556FE6C94724}" type="slidenum">
               <a:t>&lt;#&gt;</a:t>
             </a:fld>
           </a:p>
@@ -1168,7 +1169,7 @@
         <p:txBody>
           <a:bodyPr/>
           <a:p>
-            <a:fld id="{185A48DB-E9F6-46D1-9ABD-A0687ED5F8F5}" type="slidenum">
+            <a:fld id="{E69E5165-FDBC-47FE-86FB-9CEF92150EBF}" type="slidenum">
               <a:t>&lt;#&gt;</a:t>
             </a:fld>
           </a:p>
@@ -1251,7 +1252,7 @@
         <p:txBody>
           <a:bodyPr/>
           <a:p>
-            <a:fld id="{E32CF00D-65EE-4529-AC53-43676DA5EC0A}" type="slidenum">
+            <a:fld id="{5038905A-E606-485A-B02E-577F51702D7D}" type="slidenum">
               <a:t>&lt;#&gt;</a:t>
             </a:fld>
           </a:p>
@@ -1348,7 +1349,232 @@
                 </a:solidFill>
                 <a:latin typeface="Calibri"/>
               </a:rPr>
-              <a:t>Click to edit Master title style</a:t>
+              <a:t>C</a:t>
+            </a:r>
+            <a:r>
+              <a:rPr b="0" lang="en-US" sz="4400" spc="-1" strike="noStrike">
+                <a:solidFill>
+                  <a:schemeClr val="dk1"/>
+                </a:solidFill>
+                <a:latin typeface="Calibri"/>
+              </a:rPr>
+              <a:t>li</a:t>
+            </a:r>
+            <a:r>
+              <a:rPr b="0" lang="en-US" sz="4400" spc="-1" strike="noStrike">
+                <a:solidFill>
+                  <a:schemeClr val="dk1"/>
+                </a:solidFill>
+                <a:latin typeface="Calibri"/>
+              </a:rPr>
+              <a:t>c</a:t>
+            </a:r>
+            <a:r>
+              <a:rPr b="0" lang="en-US" sz="4400" spc="-1" strike="noStrike">
+                <a:solidFill>
+                  <a:schemeClr val="dk1"/>
+                </a:solidFill>
+                <a:latin typeface="Calibri"/>
+              </a:rPr>
+              <a:t>k </a:t>
+            </a:r>
+            <a:r>
+              <a:rPr b="0" lang="en-US" sz="4400" spc="-1" strike="noStrike">
+                <a:solidFill>
+                  <a:schemeClr val="dk1"/>
+                </a:solidFill>
+                <a:latin typeface="Calibri"/>
+              </a:rPr>
+              <a:t>t</a:t>
+            </a:r>
+            <a:r>
+              <a:rPr b="0" lang="en-US" sz="4400" spc="-1" strike="noStrike">
+                <a:solidFill>
+                  <a:schemeClr val="dk1"/>
+                </a:solidFill>
+                <a:latin typeface="Calibri"/>
+              </a:rPr>
+              <a:t>o </a:t>
+            </a:r>
+            <a:r>
+              <a:rPr b="0" lang="en-US" sz="4400" spc="-1" strike="noStrike">
+                <a:solidFill>
+                  <a:schemeClr val="dk1"/>
+                </a:solidFill>
+                <a:latin typeface="Calibri"/>
+              </a:rPr>
+              <a:t>e</a:t>
+            </a:r>
+            <a:r>
+              <a:rPr b="0" lang="en-US" sz="4400" spc="-1" strike="noStrike">
+                <a:solidFill>
+                  <a:schemeClr val="dk1"/>
+                </a:solidFill>
+                <a:latin typeface="Calibri"/>
+              </a:rPr>
+              <a:t>d</a:t>
+            </a:r>
+            <a:r>
+              <a:rPr b="0" lang="en-US" sz="4400" spc="-1" strike="noStrike">
+                <a:solidFill>
+                  <a:schemeClr val="dk1"/>
+                </a:solidFill>
+                <a:latin typeface="Calibri"/>
+              </a:rPr>
+              <a:t>i</a:t>
+            </a:r>
+            <a:r>
+              <a:rPr b="0" lang="en-US" sz="4400" spc="-1" strike="noStrike">
+                <a:solidFill>
+                  <a:schemeClr val="dk1"/>
+                </a:solidFill>
+                <a:latin typeface="Calibri"/>
+              </a:rPr>
+              <a:t>t </a:t>
+            </a:r>
+            <a:r>
+              <a:rPr b="0" lang="en-US" sz="4400" spc="-1" strike="noStrike">
+                <a:solidFill>
+                  <a:schemeClr val="dk1"/>
+                </a:solidFill>
+                <a:latin typeface="Calibri"/>
+              </a:rPr>
+              <a:t>M</a:t>
+            </a:r>
+            <a:r>
+              <a:rPr b="0" lang="en-US" sz="4400" spc="-1" strike="noStrike">
+                <a:solidFill>
+                  <a:schemeClr val="dk1"/>
+                </a:solidFill>
+                <a:latin typeface="Calibri"/>
+              </a:rPr>
+              <a:t>a</a:t>
+            </a:r>
+            <a:r>
+              <a:rPr b="0" lang="en-US" sz="4400" spc="-1" strike="noStrike">
+                <a:solidFill>
+                  <a:schemeClr val="dk1"/>
+                </a:solidFill>
+                <a:latin typeface="Calibri"/>
+              </a:rPr>
+              <a:t>s</a:t>
+            </a:r>
+            <a:r>
+              <a:rPr b="0" lang="en-US" sz="4400" spc="-1" strike="noStrike">
+                <a:solidFill>
+                  <a:schemeClr val="dk1"/>
+                </a:solidFill>
+                <a:latin typeface="Calibri"/>
+              </a:rPr>
+              <a:t>t</a:t>
+            </a:r>
+            <a:r>
+              <a:rPr b="0" lang="en-US" sz="4400" spc="-1" strike="noStrike">
+                <a:solidFill>
+                  <a:schemeClr val="dk1"/>
+                </a:solidFill>
+                <a:latin typeface="Calibri"/>
+              </a:rPr>
+              <a:t>e</a:t>
+            </a:r>
+            <a:r>
+              <a:rPr b="0" lang="en-US" sz="4400" spc="-1" strike="noStrike">
+                <a:solidFill>
+                  <a:schemeClr val="dk1"/>
+                </a:solidFill>
+                <a:latin typeface="Calibri"/>
+              </a:rPr>
+              <a:t>r </a:t>
+            </a:r>
+            <a:r>
+              <a:rPr b="0" lang="en-US" sz="4400" spc="-1" strike="noStrike">
+                <a:solidFill>
+                  <a:schemeClr val="dk1"/>
+                </a:solidFill>
+                <a:latin typeface="Calibri"/>
+              </a:rPr>
+              <a:t>t</a:t>
+            </a:r>
+            <a:r>
+              <a:rPr b="0" lang="en-US" sz="4400" spc="-1" strike="noStrike">
+                <a:solidFill>
+                  <a:schemeClr val="dk1"/>
+                </a:solidFill>
+                <a:latin typeface="Calibri"/>
+              </a:rPr>
+              <a:t>i</a:t>
+            </a:r>
+            <a:r>
+              <a:rPr b="0" lang="en-US" sz="4400" spc="-1" strike="noStrike">
+                <a:solidFill>
+                  <a:schemeClr val="dk1"/>
+                </a:solidFill>
+                <a:latin typeface="Calibri"/>
+              </a:rPr>
+              <a:t>t</a:t>
+            </a:r>
+            <a:r>
+              <a:rPr b="0" lang="en-US" sz="4400" spc="-1" strike="noStrike">
+                <a:solidFill>
+                  <a:schemeClr val="dk1"/>
+                </a:solidFill>
+                <a:latin typeface="Calibri"/>
+              </a:rPr>
+              <a:t>l</a:t>
+            </a:r>
+            <a:r>
+              <a:rPr b="0" lang="en-US" sz="4400" spc="-1" strike="noStrike">
+                <a:solidFill>
+                  <a:schemeClr val="dk1"/>
+                </a:solidFill>
+                <a:latin typeface="Calibri"/>
+              </a:rPr>
+              <a:t>e </a:t>
+            </a:r>
+            <a:r>
+              <a:rPr b="0" lang="en-US" sz="4400" spc="-1" strike="noStrike">
+                <a:solidFill>
+                  <a:schemeClr val="dk1"/>
+                </a:solidFill>
+                <a:latin typeface="Calibri"/>
+              </a:rPr>
+              <a:t>s</a:t>
+            </a:r>
+            <a:r>
+              <a:rPr b="0" lang="en-US" sz="4400" spc="-1" strike="noStrike">
+                <a:solidFill>
+                  <a:schemeClr val="dk1"/>
+                </a:solidFill>
+                <a:latin typeface="Calibri"/>
+              </a:rPr>
+              <a:t>t</a:t>
+            </a:r>
+            <a:r>
+              <a:rPr b="0" lang="en-US" sz="4400" spc="-1" strike="noStrike">
+                <a:solidFill>
+                  <a:schemeClr val="dk1"/>
+                </a:solidFill>
+                <a:latin typeface="Calibri"/>
+              </a:rPr>
+              <a:t>y</a:t>
+            </a:r>
+            <a:r>
+              <a:rPr b="0" lang="en-US" sz="4400" spc="-1" strike="noStrike">
+                <a:solidFill>
+                  <a:schemeClr val="dk1"/>
+                </a:solidFill>
+                <a:latin typeface="Calibri"/>
+              </a:rPr>
+              <a:t>l</a:t>
+            </a:r>
+            <a:r>
+              <a:rPr b="0" lang="en-US" sz="4400" spc="-1" strike="noStrike">
+                <a:solidFill>
+                  <a:schemeClr val="dk1"/>
+                </a:solidFill>
+                <a:latin typeface="Calibri"/>
+              </a:rPr>
+              <a:t>e</a:t>
             </a:r>
             <a:endParaRPr b="0" lang="en-US" sz="4400" spc="-1" strike="noStrike">
               <a:solidFill>
@@ -1539,7 +1765,7 @@
               </a:lnSpc>
               <a:buNone/>
             </a:pPr>
-            <a:fld id="{D071CE9F-4635-4AB8-8DD5-99C58741A528}" type="slidenum">
+            <a:fld id="{8541B2D9-E45C-4DC4-8EA3-77EE141FAFC7}" type="slidenum">
               <a:rPr b="0" lang="en-US" sz="1200" spc="-1" strike="noStrike">
                 <a:solidFill>
                   <a:schemeClr val="dk1">
@@ -2061,7 +2287,7 @@
               </a:lnSpc>
               <a:buNone/>
             </a:pPr>
-            <a:fld id="{82301C37-503C-45BD-BBBD-D8F26DA8CB84}" type="slidenum">
+            <a:fld id="{5DF72B5A-7D58-4719-B851-7BF84A9ED76D}" type="slidenum">
               <a:rPr b="0" lang="en-US" sz="1200" spc="-1" strike="noStrike">
                 <a:solidFill>
                   <a:schemeClr val="dk1">
@@ -2629,7 +2855,7 @@
               </a:lnSpc>
               <a:buNone/>
             </a:pPr>
-            <a:fld id="{19DD0D1F-BEAE-4A2B-BAE4-7D03F7F930B9}" type="slidenum">
+            <a:fld id="{B62BED88-68B4-42A9-9999-DC3BD0B206BD}" type="slidenum">
               <a:rPr b="0" lang="en-US" sz="1200" spc="-1" strike="noStrike">
                 <a:solidFill>
                   <a:schemeClr val="dk1">
@@ -2723,7 +2949,52 @@
                 </a:solidFill>
                 <a:latin typeface="Calibri"/>
               </a:rPr>
-              <a:t>Click to edit Master title style</a:t>
+              <a:t>Click </a:t>
+            </a:r>
+            <a:r>
+              <a:rPr b="0" lang="en-US" sz="4400" spc="-1" strike="noStrike">
+                <a:solidFill>
+                  <a:schemeClr val="dk1"/>
+                </a:solidFill>
+                <a:latin typeface="Calibri"/>
+              </a:rPr>
+              <a:t>to </a:t>
+            </a:r>
+            <a:r>
+              <a:rPr b="0" lang="en-US" sz="4400" spc="-1" strike="noStrike">
+                <a:solidFill>
+                  <a:schemeClr val="dk1"/>
+                </a:solidFill>
+                <a:latin typeface="Calibri"/>
+              </a:rPr>
+              <a:t>edit </a:t>
+            </a:r>
+            <a:r>
+              <a:rPr b="0" lang="en-US" sz="4400" spc="-1" strike="noStrike">
+                <a:solidFill>
+                  <a:schemeClr val="dk1"/>
+                </a:solidFill>
+                <a:latin typeface="Calibri"/>
+              </a:rPr>
+              <a:t>Maste</a:t>
+            </a:r>
+            <a:r>
+              <a:rPr b="0" lang="en-US" sz="4400" spc="-1" strike="noStrike">
+                <a:solidFill>
+                  <a:schemeClr val="dk1"/>
+                </a:solidFill>
+                <a:latin typeface="Calibri"/>
+              </a:rPr>
+              <a:t>r title </a:t>
+            </a:r>
+            <a:r>
+              <a:rPr b="0" lang="en-US" sz="4400" spc="-1" strike="noStrike">
+                <a:solidFill>
+                  <a:schemeClr val="dk1"/>
+                </a:solidFill>
+                <a:latin typeface="Calibri"/>
+              </a:rPr>
+              <a:t>style</a:t>
             </a:r>
             <a:endParaRPr b="0" lang="en-US" sz="4400" spc="-1" strike="noStrike">
               <a:solidFill>
@@ -3093,7 +3364,7 @@
               </a:lnSpc>
               <a:buNone/>
             </a:pPr>
-            <a:fld id="{A61333BD-E8C2-41F3-8D68-E14EA5327AA3}" type="slidenum">
+            <a:fld id="{B295A1F9-3396-4520-929E-8BE0E763F2AA}" type="slidenum">
               <a:rPr b="0" lang="en-US" sz="1200" spc="-1" strike="noStrike">
                 <a:solidFill>
                   <a:schemeClr val="dk1">
@@ -3187,7 +3458,7 @@
                 </a:solidFill>
                 <a:latin typeface="Calibri"/>
               </a:rPr>
-              <a:t>C</a:t>
+              <a:t>Cl</a:t>
             </a:r>
             <a:r>
               <a:rPr b="0" lang="en-US" sz="4400" spc="-1" strike="noStrike">
@@ -3196,7 +3467,7 @@
                 </a:solidFill>
                 <a:latin typeface="Calibri"/>
               </a:rPr>
-              <a:t>l</a:t>
+              <a:t>ic</a:t>
             </a:r>
             <a:r>
               <a:rPr b="0" lang="en-US" sz="4400" spc="-1" strike="noStrike">
@@ -3205,7 +3476,7 @@
                 </a:solidFill>
                 <a:latin typeface="Calibri"/>
               </a:rPr>
-              <a:t>i</a:t>
+              <a:t>k </a:t>
             </a:r>
             <a:r>
               <a:rPr b="0" lang="en-US" sz="4400" spc="-1" strike="noStrike">
@@ -3214,7 +3485,7 @@
                 </a:solidFill>
                 <a:latin typeface="Calibri"/>
               </a:rPr>
-              <a:t>c</a:t>
+              <a:t>t</a:t>
             </a:r>
             <a:r>
               <a:rPr b="0" lang="en-US" sz="4400" spc="-1" strike="noStrike">
@@ -3223,7 +3494,7 @@
                 </a:solidFill>
                 <a:latin typeface="Calibri"/>
               </a:rPr>
-              <a:t>k</a:t>
+              <a:t>o </a:t>
             </a:r>
             <a:r>
               <a:rPr b="0" lang="en-US" sz="4400" spc="-1" strike="noStrike">
@@ -3232,7 +3503,7 @@
                 </a:solidFill>
                 <a:latin typeface="Calibri"/>
               </a:rPr>
-              <a:t> </a:t>
+              <a:t>e</a:t>
             </a:r>
             <a:r>
               <a:rPr b="0" lang="en-US" sz="4400" spc="-1" strike="noStrike">
@@ -3241,7 +3512,7 @@
                 </a:solidFill>
                 <a:latin typeface="Calibri"/>
               </a:rPr>
-              <a:t>t</a:t>
+              <a:t>di</a:t>
             </a:r>
             <a:r>
               <a:rPr b="0" lang="en-US" sz="4400" spc="-1" strike="noStrike">
@@ -3250,7 +3521,7 @@
                 </a:solidFill>
                 <a:latin typeface="Calibri"/>
               </a:rPr>
-              <a:t>o</a:t>
+              <a:t>t </a:t>
             </a:r>
             <a:r>
               <a:rPr b="0" lang="en-US" sz="4400" spc="-1" strike="noStrike">
@@ -3259,7 +3530,7 @@
                 </a:solidFill>
                 <a:latin typeface="Calibri"/>
               </a:rPr>
-              <a:t> </a:t>
+              <a:t>M</a:t>
             </a:r>
             <a:r>
               <a:rPr b="0" lang="en-US" sz="4400" spc="-1" strike="noStrike">
@@ -3268,6 +3539,24 @@
                 </a:solidFill>
                 <a:latin typeface="Calibri"/>
               </a:rPr>
+              <a:t>a</a:t>
+            </a:r>
+            <a:r>
+              <a:rPr b="0" lang="en-US" sz="4400" spc="-1" strike="noStrike">
+                <a:solidFill>
+                  <a:schemeClr val="dk1"/>
+                </a:solidFill>
+                <a:latin typeface="Calibri"/>
+              </a:rPr>
+              <a:t>st</a:t>
+            </a:r>
+            <a:r>
+              <a:rPr b="0" lang="en-US" sz="4400" spc="-1" strike="noStrike">
+                <a:solidFill>
+                  <a:schemeClr val="dk1"/>
+                </a:solidFill>
+                <a:latin typeface="Calibri"/>
+              </a:rPr>
               <a:t>e</a:t>
             </a:r>
             <a:r>
@@ -3277,7 +3566,7 @@
                 </a:solidFill>
                 <a:latin typeface="Calibri"/>
               </a:rPr>
-              <a:t>d</a:t>
+              <a:t>r </a:t>
             </a:r>
             <a:r>
               <a:rPr b="0" lang="en-US" sz="4400" spc="-1" strike="noStrike">
@@ -3286,7 +3575,7 @@
                 </a:solidFill>
                 <a:latin typeface="Calibri"/>
               </a:rPr>
-              <a:t>i</a:t>
+              <a:t>ti</a:t>
             </a:r>
             <a:r>
               <a:rPr b="0" lang="en-US" sz="4400" spc="-1" strike="noStrike">
@@ -3295,7 +3584,7 @@
                 </a:solidFill>
                 <a:latin typeface="Calibri"/>
               </a:rPr>
-              <a:t>t </a:t>
+              <a:t>tl</a:t>
             </a:r>
             <a:r>
               <a:rPr b="0" lang="en-US" sz="4400" spc="-1" strike="noStrike">
@@ -3304,7 +3593,7 @@
                 </a:solidFill>
                 <a:latin typeface="Calibri"/>
               </a:rPr>
-              <a:t>M</a:t>
+              <a:t>e </a:t>
             </a:r>
             <a:r>
               <a:rPr b="0" lang="en-US" sz="4400" spc="-1" strike="noStrike">
@@ -3313,7 +3602,7 @@
                 </a:solidFill>
                 <a:latin typeface="Calibri"/>
               </a:rPr>
-              <a:t>a</a:t>
+              <a:t>st</a:t>
             </a:r>
             <a:r>
               <a:rPr b="0" lang="en-US" sz="4400" spc="-1" strike="noStrike">
@@ -3322,124 +3611,7 @@
                 </a:solidFill>
                 <a:latin typeface="Calibri"/>
               </a:rPr>
-              <a:t>s</a:t>
-            </a:r>
-            <a:r>
-              <a:rPr b="0" lang="en-US" sz="4400" spc="-1" strike="noStrike">
-                <a:solidFill>
-                  <a:schemeClr val="dk1"/>
-                </a:solidFill>
-                <a:latin typeface="Calibri"/>
-              </a:rPr>
-              <a:t>t</a:t>
-            </a:r>
-            <a:r>
-              <a:rPr b="0" lang="en-US" sz="4400" spc="-1" strike="noStrike">
-                <a:solidFill>
-                  <a:schemeClr val="dk1"/>
-                </a:solidFill>
-                <a:latin typeface="Calibri"/>
-              </a:rPr>
-              <a:t>e</a:t>
-            </a:r>
-            <a:r>
-              <a:rPr b="0" lang="en-US" sz="4400" spc="-1" strike="noStrike">
-                <a:solidFill>
-                  <a:schemeClr val="dk1"/>
-                </a:solidFill>
-                <a:latin typeface="Calibri"/>
-              </a:rPr>
-              <a:t>r </a:t>
-            </a:r>
-            <a:r>
-              <a:rPr b="0" lang="en-US" sz="4400" spc="-1" strike="noStrike">
-                <a:solidFill>
-                  <a:schemeClr val="dk1"/>
-                </a:solidFill>
-                <a:latin typeface="Calibri"/>
-              </a:rPr>
-              <a:t>t</a:t>
-            </a:r>
-            <a:r>
-              <a:rPr b="0" lang="en-US" sz="4400" spc="-1" strike="noStrike">
-                <a:solidFill>
-                  <a:schemeClr val="dk1"/>
-                </a:solidFill>
-                <a:latin typeface="Calibri"/>
-              </a:rPr>
-              <a:t>i</a:t>
-            </a:r>
-            <a:r>
-              <a:rPr b="0" lang="en-US" sz="4400" spc="-1" strike="noStrike">
-                <a:solidFill>
-                  <a:schemeClr val="dk1"/>
-                </a:solidFill>
-                <a:latin typeface="Calibri"/>
-              </a:rPr>
-              <a:t>t</a:t>
-            </a:r>
-            <a:r>
-              <a:rPr b="0" lang="en-US" sz="4400" spc="-1" strike="noStrike">
-                <a:solidFill>
-                  <a:schemeClr val="dk1"/>
-                </a:solidFill>
-                <a:latin typeface="Calibri"/>
-              </a:rPr>
-              <a:t>l</a:t>
-            </a:r>
-            <a:r>
-              <a:rPr b="0" lang="en-US" sz="4400" spc="-1" strike="noStrike">
-                <a:solidFill>
-                  <a:schemeClr val="dk1"/>
-                </a:solidFill>
-                <a:latin typeface="Calibri"/>
-              </a:rPr>
-              <a:t>e</a:t>
-            </a:r>
-            <a:r>
-              <a:rPr b="0" lang="en-US" sz="4400" spc="-1" strike="noStrike">
-                <a:solidFill>
-                  <a:schemeClr val="dk1"/>
-                </a:solidFill>
-                <a:latin typeface="Calibri"/>
-              </a:rPr>
-              <a:t> </a:t>
-            </a:r>
-            <a:r>
-              <a:rPr b="0" lang="en-US" sz="4400" spc="-1" strike="noStrike">
-                <a:solidFill>
-                  <a:schemeClr val="dk1"/>
-                </a:solidFill>
-                <a:latin typeface="Calibri"/>
-              </a:rPr>
-              <a:t>s</a:t>
-            </a:r>
-            <a:r>
-              <a:rPr b="0" lang="en-US" sz="4400" spc="-1" strike="noStrike">
-                <a:solidFill>
-                  <a:schemeClr val="dk1"/>
-                </a:solidFill>
-                <a:latin typeface="Calibri"/>
-              </a:rPr>
-              <a:t>t</a:t>
-            </a:r>
-            <a:r>
-              <a:rPr b="0" lang="en-US" sz="4400" spc="-1" strike="noStrike">
-                <a:solidFill>
-                  <a:schemeClr val="dk1"/>
-                </a:solidFill>
-                <a:latin typeface="Calibri"/>
-              </a:rPr>
-              <a:t>y</a:t>
-            </a:r>
-            <a:r>
-              <a:rPr b="0" lang="en-US" sz="4400" spc="-1" strike="noStrike">
-                <a:solidFill>
-                  <a:schemeClr val="dk1"/>
-                </a:solidFill>
-                <a:latin typeface="Calibri"/>
-              </a:rPr>
-              <a:t>l</a:t>
+              <a:t>yl</a:t>
             </a:r>
             <a:r>
               <a:rPr b="0" lang="en-US" sz="4400" spc="-1" strike="noStrike">
@@ -3818,7 +3990,7 @@
               </a:lnSpc>
               <a:buNone/>
             </a:pPr>
-            <a:fld id="{49D477C6-AEBB-4775-BC7E-033BE1A31FF2}" type="slidenum">
+            <a:fld id="{B28C77E5-7A9B-4A73-A961-5785328808ED}" type="slidenum">
               <a:rPr b="0" lang="en-US" sz="1200" spc="-1" strike="noStrike">
                 <a:solidFill>
                   <a:schemeClr val="dk1">
@@ -3912,7 +4084,52 @@
                 </a:solidFill>
                 <a:latin typeface="Calibri"/>
               </a:rPr>
-              <a:t>Click to edit Master title style</a:t>
+              <a:t>Click </a:t>
+            </a:r>
+            <a:r>
+              <a:rPr b="0" lang="en-US" sz="4400" spc="-1" strike="noStrike">
+                <a:solidFill>
+                  <a:schemeClr val="dk1"/>
+                </a:solidFill>
+                <a:latin typeface="Calibri"/>
+              </a:rPr>
+              <a:t>to </a:t>
+            </a:r>
+            <a:r>
+              <a:rPr b="0" lang="en-US" sz="4400" spc="-1" strike="noStrike">
+                <a:solidFill>
+                  <a:schemeClr val="dk1"/>
+                </a:solidFill>
+                <a:latin typeface="Calibri"/>
+              </a:rPr>
+              <a:t>edit </a:t>
+            </a:r>
+            <a:r>
+              <a:rPr b="0" lang="en-US" sz="4400" spc="-1" strike="noStrike">
+                <a:solidFill>
+                  <a:schemeClr val="dk1"/>
+                </a:solidFill>
+                <a:latin typeface="Calibri"/>
+              </a:rPr>
+              <a:t>Maste</a:t>
+            </a:r>
+            <a:r>
+              <a:rPr b="0" lang="en-US" sz="4400" spc="-1" strike="noStrike">
+                <a:solidFill>
+                  <a:schemeClr val="dk1"/>
+                </a:solidFill>
+                <a:latin typeface="Calibri"/>
+              </a:rPr>
+              <a:t>r title </a:t>
+            </a:r>
+            <a:r>
+              <a:rPr b="0" lang="en-US" sz="4400" spc="-1" strike="noStrike">
+                <a:solidFill>
+                  <a:schemeClr val="dk1"/>
+                </a:solidFill>
+                <a:latin typeface="Calibri"/>
+              </a:rPr>
+              <a:t>style</a:t>
             </a:r>
             <a:endParaRPr b="0" lang="en-US" sz="4400" spc="-1" strike="noStrike">
               <a:solidFill>
@@ -4282,7 +4499,7 @@
               </a:lnSpc>
               <a:buNone/>
             </a:pPr>
-            <a:fld id="{EACBC8BD-5EDB-4067-A221-67E84A2C6E3E}" type="slidenum">
+            <a:fld id="{23DBB6DE-2BC9-429E-8E93-02141BD98BA1}" type="slidenum">
               <a:rPr b="0" lang="en-US" sz="1200" spc="-1" strike="noStrike">
                 <a:solidFill>
                   <a:schemeClr val="dk1">
@@ -4376,7 +4593,7 @@
                 </a:solidFill>
                 <a:latin typeface="Calibri"/>
               </a:rPr>
-              <a:t>Click </a:t>
+              <a:t>C</a:t>
             </a:r>
             <a:r>
               <a:rPr b="1" lang="en-US" sz="4000" spc="-1" strike="noStrike" cap="all">
@@ -4385,7 +4602,7 @@
                 </a:solidFill>
                 <a:latin typeface="Calibri"/>
               </a:rPr>
-              <a:t>to </a:t>
+              <a:t>l</a:t>
             </a:r>
             <a:r>
               <a:rPr b="1" lang="en-US" sz="4000" spc="-1" strike="noStrike" cap="all">
@@ -4394,7 +4611,7 @@
                 </a:solidFill>
                 <a:latin typeface="Calibri"/>
               </a:rPr>
-              <a:t>edit </a:t>
+              <a:t>i</a:t>
             </a:r>
             <a:r>
               <a:rPr b="1" lang="en-US" sz="4000" spc="-1" strike="noStrike" cap="all">
@@ -4403,7 +4620,7 @@
                 </a:solidFill>
                 <a:latin typeface="Calibri"/>
               </a:rPr>
-              <a:t>Mast</a:t>
+              <a:t>c</a:t>
             </a:r>
             <a:r>
               <a:rPr b="1" lang="en-US" sz="4000" spc="-1" strike="noStrike" cap="all">
@@ -4412,7 +4629,7 @@
                 </a:solidFill>
                 <a:latin typeface="Calibri"/>
               </a:rPr>
-              <a:t>er </a:t>
+              <a:t>k</a:t>
             </a:r>
             <a:r>
               <a:rPr b="1" lang="en-US" sz="4000" spc="-1" strike="noStrike" cap="all">
@@ -4421,7 +4638,7 @@
                 </a:solidFill>
                 <a:latin typeface="Calibri"/>
               </a:rPr>
-              <a:t>title </a:t>
+              <a:t> </a:t>
             </a:r>
             <a:r>
               <a:rPr b="1" lang="en-US" sz="4000" spc="-1" strike="noStrike" cap="all">
@@ -4430,7 +4647,232 @@
                 </a:solidFill>
                 <a:latin typeface="Calibri"/>
               </a:rPr>
-              <a:t>style</a:t>
+              <a:t>t</a:t>
+            </a:r>
+            <a:r>
+              <a:rPr b="1" lang="en-US" sz="4000" spc="-1" strike="noStrike" cap="all">
+                <a:solidFill>
+                  <a:schemeClr val="dk1"/>
+                </a:solidFill>
+                <a:latin typeface="Calibri"/>
+              </a:rPr>
+              <a:t>o</a:t>
+            </a:r>
+            <a:r>
+              <a:rPr b="1" lang="en-US" sz="4000" spc="-1" strike="noStrike" cap="all">
+                <a:solidFill>
+                  <a:schemeClr val="dk1"/>
+                </a:solidFill>
+                <a:latin typeface="Calibri"/>
+              </a:rPr>
+              <a:t> </a:t>
+            </a:r>
+            <a:r>
+              <a:rPr b="1" lang="en-US" sz="4000" spc="-1" strike="noStrike" cap="all">
+                <a:solidFill>
+                  <a:schemeClr val="dk1"/>
+                </a:solidFill>
+                <a:latin typeface="Calibri"/>
+              </a:rPr>
+              <a:t>e</a:t>
+            </a:r>
+            <a:r>
+              <a:rPr b="1" lang="en-US" sz="4000" spc="-1" strike="noStrike" cap="all">
+                <a:solidFill>
+                  <a:schemeClr val="dk1"/>
+                </a:solidFill>
+                <a:latin typeface="Calibri"/>
+              </a:rPr>
+              <a:t>d</a:t>
+            </a:r>
+            <a:r>
+              <a:rPr b="1" lang="en-US" sz="4000" spc="-1" strike="noStrike" cap="all">
+                <a:solidFill>
+                  <a:schemeClr val="dk1"/>
+                </a:solidFill>
+                <a:latin typeface="Calibri"/>
+              </a:rPr>
+              <a:t>i</a:t>
+            </a:r>
+            <a:r>
+              <a:rPr b="1" lang="en-US" sz="4000" spc="-1" strike="noStrike" cap="all">
+                <a:solidFill>
+                  <a:schemeClr val="dk1"/>
+                </a:solidFill>
+                <a:latin typeface="Calibri"/>
+              </a:rPr>
+              <a:t>t</a:t>
+            </a:r>
+            <a:r>
+              <a:rPr b="1" lang="en-US" sz="4000" spc="-1" strike="noStrike" cap="all">
+                <a:solidFill>
+                  <a:schemeClr val="dk1"/>
+                </a:solidFill>
+                <a:latin typeface="Calibri"/>
+              </a:rPr>
+              <a:t> </a:t>
+            </a:r>
+            <a:r>
+              <a:rPr b="1" lang="en-US" sz="4000" spc="-1" strike="noStrike" cap="all">
+                <a:solidFill>
+                  <a:schemeClr val="dk1"/>
+                </a:solidFill>
+                <a:latin typeface="Calibri"/>
+              </a:rPr>
+              <a:t>M</a:t>
+            </a:r>
+            <a:r>
+              <a:rPr b="1" lang="en-US" sz="4000" spc="-1" strike="noStrike" cap="all">
+                <a:solidFill>
+                  <a:schemeClr val="dk1"/>
+                </a:solidFill>
+                <a:latin typeface="Calibri"/>
+              </a:rPr>
+              <a:t>a</a:t>
+            </a:r>
+            <a:r>
+              <a:rPr b="1" lang="en-US" sz="4000" spc="-1" strike="noStrike" cap="all">
+                <a:solidFill>
+                  <a:schemeClr val="dk1"/>
+                </a:solidFill>
+                <a:latin typeface="Calibri"/>
+              </a:rPr>
+              <a:t>s</a:t>
+            </a:r>
+            <a:r>
+              <a:rPr b="1" lang="en-US" sz="4000" spc="-1" strike="noStrike" cap="all">
+                <a:solidFill>
+                  <a:schemeClr val="dk1"/>
+                </a:solidFill>
+                <a:latin typeface="Calibri"/>
+              </a:rPr>
+              <a:t>t</a:t>
+            </a:r>
+            <a:r>
+              <a:rPr b="1" lang="en-US" sz="4000" spc="-1" strike="noStrike" cap="all">
+                <a:solidFill>
+                  <a:schemeClr val="dk1"/>
+                </a:solidFill>
+                <a:latin typeface="Calibri"/>
+              </a:rPr>
+              <a:t>e</a:t>
+            </a:r>
+            <a:r>
+              <a:rPr b="1" lang="en-US" sz="4000" spc="-1" strike="noStrike" cap="all">
+                <a:solidFill>
+                  <a:schemeClr val="dk1"/>
+                </a:solidFill>
+                <a:latin typeface="Calibri"/>
+              </a:rPr>
+              <a:t>r</a:t>
+            </a:r>
+            <a:r>
+              <a:rPr b="1" lang="en-US" sz="4000" spc="-1" strike="noStrike" cap="all">
+                <a:solidFill>
+                  <a:schemeClr val="dk1"/>
+                </a:solidFill>
+                <a:latin typeface="Calibri"/>
+              </a:rPr>
+              <a:t> </a:t>
+            </a:r>
+            <a:r>
+              <a:rPr b="1" lang="en-US" sz="4000" spc="-1" strike="noStrike" cap="all">
+                <a:solidFill>
+                  <a:schemeClr val="dk1"/>
+                </a:solidFill>
+                <a:latin typeface="Calibri"/>
+              </a:rPr>
+              <a:t>t</a:t>
+            </a:r>
+            <a:r>
+              <a:rPr b="1" lang="en-US" sz="4000" spc="-1" strike="noStrike" cap="all">
+                <a:solidFill>
+                  <a:schemeClr val="dk1"/>
+                </a:solidFill>
+                <a:latin typeface="Calibri"/>
+              </a:rPr>
+              <a:t>i</a:t>
+            </a:r>
+            <a:r>
+              <a:rPr b="1" lang="en-US" sz="4000" spc="-1" strike="noStrike" cap="all">
+                <a:solidFill>
+                  <a:schemeClr val="dk1"/>
+                </a:solidFill>
+                <a:latin typeface="Calibri"/>
+              </a:rPr>
+              <a:t>t</a:t>
+            </a:r>
+            <a:r>
+              <a:rPr b="1" lang="en-US" sz="4000" spc="-1" strike="noStrike" cap="all">
+                <a:solidFill>
+                  <a:schemeClr val="dk1"/>
+                </a:solidFill>
+                <a:latin typeface="Calibri"/>
+              </a:rPr>
+              <a:t>l</a:t>
+            </a:r>
+            <a:r>
+              <a:rPr b="1" lang="en-US" sz="4000" spc="-1" strike="noStrike" cap="all">
+                <a:solidFill>
+                  <a:schemeClr val="dk1"/>
+                </a:solidFill>
+                <a:latin typeface="Calibri"/>
+              </a:rPr>
+              <a:t>e</a:t>
+            </a:r>
+            <a:r>
+              <a:rPr b="1" lang="en-US" sz="4000" spc="-1" strike="noStrike" cap="all">
+                <a:solidFill>
+                  <a:schemeClr val="dk1"/>
+                </a:solidFill>
+                <a:latin typeface="Calibri"/>
+              </a:rPr>
+              <a:t> </a:t>
+            </a:r>
+            <a:r>
+              <a:rPr b="1" lang="en-US" sz="4000" spc="-1" strike="noStrike" cap="all">
+                <a:solidFill>
+                  <a:schemeClr val="dk1"/>
+                </a:solidFill>
+                <a:latin typeface="Calibri"/>
+              </a:rPr>
+              <a:t>s</a:t>
+            </a:r>
+            <a:r>
+              <a:rPr b="1" lang="en-US" sz="4000" spc="-1" strike="noStrike" cap="all">
+                <a:solidFill>
+                  <a:schemeClr val="dk1"/>
+                </a:solidFill>
+                <a:latin typeface="Calibri"/>
+              </a:rPr>
+              <a:t>t</a:t>
+            </a:r>
+            <a:r>
+              <a:rPr b="1" lang="en-US" sz="4000" spc="-1" strike="noStrike" cap="all">
+                <a:solidFill>
+                  <a:schemeClr val="dk1"/>
+                </a:solidFill>
+                <a:latin typeface="Calibri"/>
+              </a:rPr>
+              <a:t>y</a:t>
+            </a:r>
+            <a:r>
+              <a:rPr b="1" lang="en-US" sz="4000" spc="-1" strike="noStrike" cap="all">
+                <a:solidFill>
+                  <a:schemeClr val="dk1"/>
+                </a:solidFill>
+                <a:latin typeface="Calibri"/>
+              </a:rPr>
+              <a:t>l</a:t>
+            </a:r>
+            <a:r>
+              <a:rPr b="1" lang="en-US" sz="4000" spc="-1" strike="noStrike" cap="all">
+                <a:solidFill>
+                  <a:schemeClr val="dk1"/>
+                </a:solidFill>
+                <a:latin typeface="Calibri"/>
+              </a:rPr>
+              <a:t>e</a:t>
             </a:r>
             <a:endParaRPr b="0" lang="en-US" sz="4000" spc="-1" strike="noStrike">
               <a:solidFill>
@@ -4681,7 +5123,7 @@
               </a:lnSpc>
               <a:buNone/>
             </a:pPr>
-            <a:fld id="{BA96776B-1E27-44FA-9B4D-E825CADA61C3}" type="slidenum">
+            <a:fld id="{0143DE4A-C56A-476E-AAF1-8E9BE5948FAA}" type="slidenum">
               <a:rPr b="0" lang="en-US" sz="1200" spc="-1" strike="noStrike">
                 <a:solidFill>
                   <a:schemeClr val="dk1">
@@ -5324,7 +5766,7 @@
               </a:lnSpc>
               <a:buNone/>
             </a:pPr>
-            <a:fld id="{D0CA6252-88E9-45DD-92C4-0E2CD5780E96}" type="slidenum">
+            <a:fld id="{BEAB7832-DD4A-4193-A5B7-83B36E2F3E9C}" type="slidenum">
               <a:rPr b="0" lang="en-US" sz="1200" spc="-1" strike="noStrike">
                 <a:solidFill>
                   <a:schemeClr val="dk1">
@@ -5418,34 +5860,7 @@
                 </a:solidFill>
                 <a:latin typeface="Calibri"/>
               </a:rPr>
-              <a:t>Click to </a:t>
-            </a:r>
-            <a:r>
-              <a:rPr b="0" lang="en-US" sz="4400" spc="-1" strike="noStrike">
-                <a:solidFill>
-                  <a:schemeClr val="dk1"/>
-                </a:solidFill>
-                <a:latin typeface="Calibri"/>
-              </a:rPr>
-              <a:t>edit </a:t>
-            </a:r>
-            <a:r>
-              <a:rPr b="0" lang="en-US" sz="4400" spc="-1" strike="noStrike">
-                <a:solidFill>
-                  <a:schemeClr val="dk1"/>
-                </a:solidFill>
-                <a:latin typeface="Calibri"/>
-              </a:rPr>
-              <a:t>Master </a:t>
-            </a:r>
-            <a:r>
-              <a:rPr b="0" lang="en-US" sz="4400" spc="-1" strike="noStrike">
-                <a:solidFill>
-                  <a:schemeClr val="dk1"/>
-                </a:solidFill>
-                <a:latin typeface="Calibri"/>
-              </a:rPr>
-              <a:t>title style</a:t>
+              <a:t>Click to edit Master title style</a:t>
             </a:r>
             <a:endParaRPr b="0" lang="en-US" sz="4400" spc="-1" strike="noStrike">
               <a:solidFill>
@@ -6110,7 +6525,7 @@
               </a:lnSpc>
               <a:buNone/>
             </a:pPr>
-            <a:fld id="{373514E4-73BC-4CD8-A7AF-CA426EEE23DA}" type="slidenum">
+            <a:fld id="{1F1C6915-48E8-4DCE-AB2F-5020B5288E72}" type="slidenum">
               <a:rPr b="0" lang="en-US" sz="1200" spc="-1" strike="noStrike">
                 <a:solidFill>
                   <a:schemeClr val="dk1">
@@ -6395,7 +6810,7 @@
               </a:lnSpc>
               <a:buNone/>
             </a:pPr>
-            <a:fld id="{84F56EEE-1707-41BB-B362-3B1583A189E2}" type="slidenum">
+            <a:fld id="{72DAA768-1E49-4540-BD1A-22C9B30C9547}" type="slidenum">
               <a:rPr b="0" lang="en-US" sz="1200" spc="-1" strike="noStrike">
                 <a:solidFill>
                   <a:schemeClr val="dk1">
@@ -6628,7 +7043,7 @@
               </a:lnSpc>
               <a:buNone/>
             </a:pPr>
-            <a:fld id="{FF65B1D3-9B7D-4437-A87B-FD84B4D70387}" type="slidenum">
+            <a:fld id="{B4B2787D-EEB3-42DF-976D-6478D44BB6D9}" type="slidenum">
               <a:rPr b="0" lang="en-US" sz="1200" spc="-1" strike="noStrike">
                 <a:solidFill>
                   <a:schemeClr val="dk1">
@@ -7379,7 +7794,7 @@
                 </a:solidFill>
                 <a:latin typeface="Calibri"/>
               </a:rPr>
-              <a:t>1 / 20</a:t>
+              <a:t>1 / 21</a:t>
             </a:r>
             <a:endParaRPr b="0" lang="en-US" sz="1000" spc="-1" strike="noStrike">
               <a:solidFill>
@@ -9022,7 +9437,7 @@
                 </a:solidFill>
                 <a:latin typeface="Calibri"/>
               </a:rPr>
-              <a:t>10 / 20</a:t>
+              <a:t>10 / 21</a:t>
             </a:r>
             <a:endParaRPr b="0" lang="en-US" sz="1000" spc="-1" strike="noStrike">
               <a:solidFill>
@@ -11361,7 +11776,7 @@
                 </a:solidFill>
                 <a:latin typeface="Calibri"/>
               </a:rPr>
-              <a:t>11 / 20</a:t>
+              <a:t>11 / 21</a:t>
             </a:r>
             <a:endParaRPr b="0" lang="en-US" sz="1000" spc="-1" strike="noStrike">
               <a:solidFill>
@@ -13197,7 +13612,7 @@
                 </a:solidFill>
                 <a:latin typeface="Calibri"/>
               </a:rPr>
-              <a:t>12 / 20</a:t>
+              <a:t>12 / 21</a:t>
             </a:r>
             <a:endParaRPr b="0" lang="en-US" sz="1000" spc="-1" strike="noStrike">
               <a:solidFill>
@@ -15159,7 +15574,7 @@
                 </a:solidFill>
                 <a:latin typeface="Calibri"/>
               </a:rPr>
-              <a:t>13 / 20</a:t>
+              <a:t>13 / 21</a:t>
             </a:r>
             <a:endParaRPr b="0" lang="en-US" sz="1000" spc="-1" strike="noStrike">
               <a:solidFill>
@@ -17995,7 +18410,7 @@
                 </a:solidFill>
                 <a:latin typeface="Calibri"/>
               </a:rPr>
-              <a:t>14 / 20</a:t>
+              <a:t>14 / 21</a:t>
             </a:r>
             <a:endParaRPr b="0" lang="en-US" sz="1000" spc="-1" strike="noStrike">
               <a:solidFill>
@@ -21081,7 +21496,7 @@
                 </a:solidFill>
                 <a:latin typeface="Calibri"/>
               </a:rPr>
-              <a:t>15 / 20</a:t>
+              <a:t>15 / 21</a:t>
             </a:r>
             <a:endParaRPr b="0" lang="en-US" sz="1000" spc="-1" strike="noStrike">
               <a:solidFill>
@@ -24458,7 +24873,7 @@
                 </a:solidFill>
                 <a:latin typeface="Calibri"/>
               </a:rPr>
-              <a:t>16 / 20</a:t>
+              <a:t>16 / 21</a:t>
             </a:r>
             <a:endParaRPr b="0" lang="en-US" sz="1000" spc="-1" strike="noStrike">
               <a:solidFill>
@@ -27201,7 +27616,7 @@
                 </a:solidFill>
                 <a:latin typeface="Calibri"/>
               </a:rPr>
-              <a:t>17 / 20</a:t>
+              <a:t>17 / 21</a:t>
             </a:r>
             <a:endParaRPr b="0" lang="en-US" sz="1000" spc="-1" strike="noStrike">
               <a:solidFill>
@@ -30470,7 +30885,7 @@
                 </a:solidFill>
                 <a:latin typeface="Calibri"/>
               </a:rPr>
-              <a:t>18 / 20</a:t>
+              <a:t>18 / 21</a:t>
             </a:r>
             <a:endParaRPr b="0" lang="en-US" sz="1000" spc="-1" strike="noStrike">
               <a:solidFill>
@@ -30578,7 +30993,7 @@
         </p:nvSpPr>
         <p:spPr>
           <a:xfrm>
-            <a:off x="360" y="6218280"/>
+            <a:off x="0" y="6218280"/>
             <a:ext cx="12188520" cy="182520"/>
           </a:xfrm>
           <a:prstGeom prst="rect">
@@ -32180,7 +32595,7 @@
                 </a:solidFill>
                 <a:latin typeface="Calibri"/>
               </a:rPr>
-              <a:t>19 / 20</a:t>
+              <a:t>19 / 21</a:t>
             </a:r>
             <a:endParaRPr b="0" lang="en-US" sz="1000" spc="-1" strike="noStrike">
               <a:solidFill>
@@ -33478,7 +33893,7 @@
                 </a:solidFill>
                 <a:latin typeface="Calibri"/>
               </a:rPr>
-              <a:t>2 / 20</a:t>
+              <a:t>2 / 21</a:t>
             </a:r>
             <a:endParaRPr b="0" lang="en-US" sz="1000" spc="-1" strike="noStrike">
               <a:solidFill>
@@ -33534,7 +33949,7 @@
             <a:avLst/>
           </a:prstGeom>
           <a:solidFill>
-            <a:srgbClr val="1a3264"/>
+            <a:srgbClr val="f0f4ff"/>
           </a:solidFill>
           <a:ln>
             <a:noFill/>
@@ -33586,14 +34001,14 @@
         </p:nvSpPr>
         <p:spPr>
           <a:xfrm>
-            <a:off x="-72720" y="5605560"/>
-            <a:ext cx="12188520" cy="109440"/>
+            <a:off x="0" y="0"/>
+            <a:ext cx="12188520" cy="1234080"/>
           </a:xfrm>
           <a:prstGeom prst="rect">
             <a:avLst/>
           </a:prstGeom>
           <a:solidFill>
-            <a:srgbClr val="e8a838"/>
+            <a:srgbClr val="1a3264"/>
           </a:solidFill>
           <a:ln>
             <a:noFill/>
@@ -33639,14 +34054,120 @@
       </p:sp>
       <p:sp>
         <p:nvSpPr>
-          <p:cNvPr id="736" name="Rectangle 3"/>
-          <p:cNvSpPr/>
-          <p:nvPr/>
-        </p:nvSpPr>
-        <p:spPr>
-          <a:xfrm>
-            <a:off x="0" y="0"/>
-            <a:ext cx="164160" cy="6857640"/>
+          <p:cNvPr id="736" name="TextBox 3"/>
+          <p:cNvSpPr/>
+          <p:nvPr/>
+        </p:nvSpPr>
+        <p:spPr>
+          <a:xfrm>
+            <a:off x="365760" y="91440"/>
+            <a:ext cx="9143640" cy="516600"/>
+          </a:xfrm>
+          <a:prstGeom prst="rect">
+            <a:avLst/>
+          </a:prstGeom>
+          <a:noFill/>
+          <a:ln w="0">
+            <a:noFill/>
+          </a:ln>
+        </p:spPr>
+        <p:style>
+          <a:lnRef idx="0"/>
+          <a:fillRef idx="0"/>
+          <a:effectRef idx="0"/>
+          <a:fontRef idx="minor"/>
+        </p:style>
+        <p:txBody>
+          <a:bodyPr lIns="90000" rIns="90000" tIns="45000" bIns="45000" anchor="t">
+            <a:spAutoFit/>
+          </a:bodyPr>
+          <a:p>
+            <a:pPr defTabSz="457200">
+              <a:lnSpc>
+                <a:spcPct val="100000"/>
+              </a:lnSpc>
+            </a:pPr>
+            <a:r>
+              <a:rPr b="1" lang="en-US" sz="2800" spc="-1" strike="noStrike">
+                <a:solidFill>
+                  <a:srgbClr val="ffffff"/>
+                </a:solidFill>
+                <a:latin typeface="Calibri"/>
+              </a:rPr>
+              <a:t>Roadmap — рекомендации по развитию</a:t>
+            </a:r>
+            <a:endParaRPr b="0" lang="en-US" sz="2800" spc="-1" strike="noStrike">
+              <a:solidFill>
+                <a:srgbClr val="000000"/>
+              </a:solidFill>
+              <a:latin typeface="Arial"/>
+            </a:endParaRPr>
+          </a:p>
+        </p:txBody>
+      </p:sp>
+      <p:sp>
+        <p:nvSpPr>
+          <p:cNvPr id="737" name="TextBox 4"/>
+          <p:cNvSpPr/>
+          <p:nvPr/>
+        </p:nvSpPr>
+        <p:spPr>
+          <a:xfrm>
+            <a:off x="365760" y="694800"/>
+            <a:ext cx="10058040" cy="288000"/>
+          </a:xfrm>
+          <a:prstGeom prst="rect">
+            <a:avLst/>
+          </a:prstGeom>
+          <a:noFill/>
+          <a:ln w="0">
+            <a:noFill/>
+          </a:ln>
+        </p:spPr>
+        <p:style>
+          <a:lnRef idx="0"/>
+          <a:fillRef idx="0"/>
+          <a:effectRef idx="0"/>
+          <a:fontRef idx="minor"/>
+        </p:style>
+        <p:txBody>
+          <a:bodyPr lIns="90000" rIns="90000" tIns="45000" bIns="45000" anchor="t">
+            <a:spAutoFit/>
+          </a:bodyPr>
+          <a:p>
+            <a:pPr defTabSz="457200">
+              <a:lnSpc>
+                <a:spcPct val="100000"/>
+              </a:lnSpc>
+            </a:pPr>
+            <a:r>
+              <a:rPr b="0" i="1" lang="en-US" sz="1300" spc="-1" strike="noStrike">
+                <a:solidFill>
+                  <a:srgbClr val="e8a838"/>
+                </a:solidFill>
+                <a:latin typeface="Calibri"/>
+              </a:rPr>
+              <a:t>От MVP к production-решению для 10 000+ сотрудников</a:t>
+            </a:r>
+            <a:endParaRPr b="0" lang="en-US" sz="1300" spc="-1" strike="noStrike">
+              <a:solidFill>
+                <a:srgbClr val="000000"/>
+              </a:solidFill>
+              <a:latin typeface="Arial"/>
+            </a:endParaRPr>
+          </a:p>
+        </p:txBody>
+      </p:sp>
+      <p:sp>
+        <p:nvSpPr>
+          <p:cNvPr id="738" name="Rectangle 5"/>
+          <p:cNvSpPr/>
+          <p:nvPr/>
+        </p:nvSpPr>
+        <p:spPr>
+          <a:xfrm>
+            <a:off x="0" y="1234440"/>
+            <a:ext cx="12188520" cy="54360"/>
           </a:xfrm>
           <a:prstGeom prst="rect">
             <a:avLst/>
@@ -33678,7 +34199,7 @@
           <a:fontRef idx="minor"/>
         </p:style>
         <p:txBody>
-          <a:bodyPr lIns="90000" rIns="90000" tIns="45000" bIns="45000" anchor="ctr">
+          <a:bodyPr lIns="90000" rIns="90000" tIns="9720" bIns="9720" anchor="ctr">
             <a:noAutofit/>
           </a:bodyPr>
           <a:p>
@@ -33698,73 +34219,20 @@
       </p:sp>
       <p:sp>
         <p:nvSpPr>
-          <p:cNvPr id="737" name="TextBox 4"/>
-          <p:cNvSpPr/>
-          <p:nvPr/>
-        </p:nvSpPr>
-        <p:spPr>
-          <a:xfrm>
-            <a:off x="457200" y="548640"/>
-            <a:ext cx="11274120" cy="699120"/>
-          </a:xfrm>
-          <a:prstGeom prst="rect">
-            <a:avLst/>
-          </a:prstGeom>
-          <a:noFill/>
-          <a:ln w="0">
-            <a:noFill/>
-          </a:ln>
-        </p:spPr>
-        <p:style>
-          <a:lnRef idx="0"/>
-          <a:fillRef idx="0"/>
-          <a:effectRef idx="0"/>
-          <a:fontRef idx="minor"/>
-        </p:style>
-        <p:txBody>
-          <a:bodyPr lIns="90000" rIns="90000" tIns="45000" bIns="45000" anchor="t">
-            <a:spAutoFit/>
-          </a:bodyPr>
-          <a:p>
-            <a:pPr algn="ctr" defTabSz="457200">
-              <a:lnSpc>
-                <a:spcPct val="100000"/>
-              </a:lnSpc>
-            </a:pPr>
-            <a:r>
-              <a:rPr b="1" lang="en-US" sz="4000" spc="-1" strike="noStrike">
-                <a:solidFill>
-                  <a:srgbClr val="ffffff"/>
-                </a:solidFill>
-                <a:latin typeface="Calibri"/>
-              </a:rPr>
-              <a:t>Спасибо за внимание</a:t>
-            </a:r>
-            <a:endParaRPr b="0" lang="en-US" sz="4000" spc="-1" strike="noStrike">
-              <a:solidFill>
-                <a:srgbClr val="000000"/>
-              </a:solidFill>
-              <a:latin typeface="Arial"/>
-            </a:endParaRPr>
-          </a:p>
-        </p:txBody>
-      </p:sp>
-      <p:sp>
-        <p:nvSpPr>
-          <p:cNvPr id="738" name="Rectangle 5"/>
-          <p:cNvSpPr/>
-          <p:nvPr/>
-        </p:nvSpPr>
-        <p:spPr>
-          <a:xfrm>
-            <a:off x="320040" y="1508760"/>
-            <a:ext cx="3565800" cy="1691280"/>
+          <p:cNvPr id="739" name="Rectangle 6"/>
+          <p:cNvSpPr/>
+          <p:nvPr/>
+        </p:nvSpPr>
+        <p:spPr>
+          <a:xfrm>
+            <a:off x="274320" y="1417320"/>
+            <a:ext cx="5687280" cy="2331360"/>
           </a:xfrm>
           <a:prstGeom prst="rect">
             <a:avLst/>
           </a:prstGeom>
           <a:solidFill>
-            <a:srgbClr val="0d1b3e"/>
+            <a:srgbClr val="ffffff"/>
           </a:solidFill>
           <a:ln>
             <a:noFill/>
@@ -33810,20 +34278,20 @@
       </p:sp>
       <p:sp>
         <p:nvSpPr>
-          <p:cNvPr id="739" name="Rectangle 6"/>
-          <p:cNvSpPr/>
-          <p:nvPr/>
-        </p:nvSpPr>
-        <p:spPr>
-          <a:xfrm>
-            <a:off x="320040" y="1508760"/>
-            <a:ext cx="3565800" cy="72720"/>
+          <p:cNvPr id="740" name="Rectangle 7"/>
+          <p:cNvSpPr/>
+          <p:nvPr/>
+        </p:nvSpPr>
+        <p:spPr>
+          <a:xfrm>
+            <a:off x="274320" y="1417320"/>
+            <a:ext cx="91080" cy="2331360"/>
           </a:xfrm>
           <a:prstGeom prst="rect">
             <a:avLst/>
           </a:prstGeom>
           <a:solidFill>
-            <a:srgbClr val="e8a838"/>
+            <a:srgbClr val="1a3264"/>
           </a:solidFill>
           <a:ln>
             <a:noFill/>
@@ -33849,7 +34317,7 @@
           <a:fontRef idx="minor"/>
         </p:style>
         <p:txBody>
-          <a:bodyPr lIns="90000" rIns="90000" tIns="28080" bIns="28080" anchor="ctr">
+          <a:bodyPr lIns="90000" rIns="90000" tIns="45000" bIns="45000" anchor="ctr">
             <a:noAutofit/>
           </a:bodyPr>
           <a:p>
@@ -33869,14 +34337,14 @@
       </p:sp>
       <p:sp>
         <p:nvSpPr>
-          <p:cNvPr id="740" name="TextBox 7"/>
-          <p:cNvSpPr/>
-          <p:nvPr/>
-        </p:nvSpPr>
-        <p:spPr>
-          <a:xfrm>
-            <a:off x="457200" y="1645920"/>
-            <a:ext cx="3291480" cy="288000"/>
+          <p:cNvPr id="741" name="TextBox 8"/>
+          <p:cNvSpPr/>
+          <p:nvPr/>
+        </p:nvSpPr>
+        <p:spPr>
+          <a:xfrm>
+            <a:off x="457200" y="1554480"/>
+            <a:ext cx="456840" cy="821160"/>
           </a:xfrm>
           <a:prstGeom prst="rect">
             <a:avLst/>
@@ -33903,42 +34371,33 @@
               </a:lnSpc>
             </a:pPr>
             <a:r>
-              <a:rPr b="1" lang="en-US" sz="1300" spc="-1" strike="noStrike">
-                <a:solidFill>
-                  <a:srgbClr val="e8a838"/>
-                </a:solidFill>
-                <a:latin typeface="Calibri"/>
-              </a:rPr>
-              <a:t>🎯  </a:t>
-            </a:r>
-            <a:r>
-              <a:rPr b="1" lang="en-US" sz="1300" spc="-1" strike="noStrike">
-                <a:solidFill>
-                  <a:srgbClr val="e8a838"/>
-                </a:solidFill>
-                <a:latin typeface="Calibri"/>
-              </a:rPr>
-              <a:t>25% + 25%</a:t>
-            </a:r>
-            <a:endParaRPr b="0" lang="en-US" sz="1300" spc="-1" strike="noStrike">
-              <a:solidFill>
-                <a:srgbClr val="000000"/>
-              </a:solidFill>
-              <a:latin typeface="Arial"/>
-            </a:endParaRPr>
-          </a:p>
-        </p:txBody>
-      </p:sp>
-      <p:sp>
-        <p:nvSpPr>
-          <p:cNvPr id="741" name="TextBox 8"/>
-          <p:cNvSpPr/>
-          <p:nvPr/>
-        </p:nvSpPr>
-        <p:spPr>
-          <a:xfrm>
-            <a:off x="457200" y="2020680"/>
-            <a:ext cx="3291480" cy="272520"/>
+              <a:rPr b="0" lang="en-US" sz="2400" spc="-1" strike="noStrike">
+                <a:solidFill>
+                  <a:srgbClr val="ffffff"/>
+                </a:solidFill>
+                <a:latin typeface="Calibri"/>
+              </a:rPr>
+              <a:t>🔐</a:t>
+            </a:r>
+            <a:endParaRPr b="0" lang="en-US" sz="2400" spc="-1" strike="noStrike">
+              <a:solidFill>
+                <a:srgbClr val="000000"/>
+              </a:solidFill>
+              <a:latin typeface="Arial"/>
+            </a:endParaRPr>
+          </a:p>
+        </p:txBody>
+      </p:sp>
+      <p:sp>
+        <p:nvSpPr>
+          <p:cNvPr id="742" name="TextBox 9"/>
+          <p:cNvSpPr/>
+          <p:nvPr/>
+        </p:nvSpPr>
+        <p:spPr>
+          <a:xfrm>
+            <a:off x="960120" y="1581840"/>
+            <a:ext cx="4754520" cy="303120"/>
           </a:xfrm>
           <a:prstGeom prst="rect">
             <a:avLst/>
@@ -33965,33 +34424,33 @@
               </a:lnSpc>
             </a:pPr>
             <a:r>
-              <a:rPr b="1" lang="en-US" sz="1200" spc="-1" strike="noStrike">
-                <a:solidFill>
-                  <a:srgbClr val="ffffff"/>
-                </a:solidFill>
-                <a:latin typeface="Calibri"/>
-              </a:rPr>
-              <a:t>SMART-оценка + AI-генерация</a:t>
-            </a:r>
-            <a:endParaRPr b="0" lang="en-US" sz="1200" spc="-1" strike="noStrike">
-              <a:solidFill>
-                <a:srgbClr val="000000"/>
-              </a:solidFill>
-              <a:latin typeface="Arial"/>
-            </a:endParaRPr>
-          </a:p>
-        </p:txBody>
-      </p:sp>
-      <p:sp>
-        <p:nvSpPr>
-          <p:cNvPr id="742" name="TextBox 9"/>
-          <p:cNvSpPr/>
-          <p:nvPr/>
-        </p:nvSpPr>
-        <p:spPr>
-          <a:xfrm>
-            <a:off x="457200" y="2386440"/>
-            <a:ext cx="3291480" cy="242280"/>
+              <a:rPr b="1" lang="en-US" sz="1400" spc="-1" strike="noStrike">
+                <a:solidFill>
+                  <a:srgbClr val="1a3264"/>
+                </a:solidFill>
+                <a:latin typeface="Calibri"/>
+              </a:rPr>
+              <a:t>Keycloak SSO + RBAC</a:t>
+            </a:r>
+            <a:endParaRPr b="0" lang="en-US" sz="1400" spc="-1" strike="noStrike">
+              <a:solidFill>
+                <a:srgbClr val="000000"/>
+              </a:solidFill>
+              <a:latin typeface="Arial"/>
+            </a:endParaRPr>
+          </a:p>
+        </p:txBody>
+      </p:sp>
+      <p:sp>
+        <p:nvSpPr>
+          <p:cNvPr id="743" name="TextBox 10"/>
+          <p:cNvSpPr/>
+          <p:nvPr/>
+        </p:nvSpPr>
+        <p:spPr>
+          <a:xfrm>
+            <a:off x="457200" y="2011680"/>
+            <a:ext cx="5303160" cy="592920"/>
           </a:xfrm>
           <a:prstGeom prst="rect">
             <a:avLst/>
@@ -34012,45 +34471,79 @@
             <a:spAutoFit/>
           </a:bodyPr>
           <a:p>
+            <a:r>
+              <a:rPr b="0" lang="en-US" sz="1100" spc="-1" strike="noStrike">
+                <a:solidFill>
+                  <a:srgbClr val="1a1a2e"/>
+                </a:solidFill>
+                <a:latin typeface="Calibri"/>
+              </a:rPr>
+              <a:t>SSO через Active Directory / Keycloak</a:t>
+            </a:r>
+            <a:endParaRPr b="0" lang="en-US" sz="1100" spc="-1" strike="noStrike">
+              <a:solidFill>
+                <a:srgbClr val="000000"/>
+              </a:solidFill>
+              <a:latin typeface="Arial"/>
+            </a:endParaRPr>
+          </a:p>
+          <a:p>
+            <a:r>
+              <a:rPr b="0" lang="en-US" sz="1100" spc="-1" strike="noStrike">
+                <a:solidFill>
+                  <a:srgbClr val="1a1a2e"/>
+                </a:solidFill>
+                <a:latin typeface="Calibri"/>
+              </a:rPr>
+              <a:t>JWT-токены, роли: сотрудник / руководитель / HR</a:t>
+            </a:r>
+            <a:endParaRPr b="0" lang="en-US" sz="1100" spc="-1" strike="noStrike">
+              <a:solidFill>
+                <a:srgbClr val="000000"/>
+              </a:solidFill>
+              <a:latin typeface="Arial"/>
+            </a:endParaRPr>
+          </a:p>
+          <a:p>
             <a:pPr defTabSz="457200">
               <a:lnSpc>
                 <a:spcPct val="100000"/>
               </a:lnSpc>
             </a:pPr>
             <a:r>
-              <a:rPr b="0" lang="en-US" sz="1000" spc="-1" strike="noStrike">
-                <a:solidFill>
-                  <a:srgbClr val="aaccff"/>
-                </a:solidFill>
-                <a:latin typeface="Calibri"/>
-              </a:rPr>
-              <a:t>Gemini Flash · 5 критериев · goal_type · strategic_alignment</a:t>
-            </a:r>
-            <a:endParaRPr b="0" lang="en-US" sz="1000" spc="-1" strike="noStrike">
-              <a:solidFill>
-                <a:srgbClr val="000000"/>
-              </a:solidFill>
-              <a:latin typeface="Arial"/>
-            </a:endParaRPr>
-          </a:p>
-        </p:txBody>
-      </p:sp>
-      <p:sp>
-        <p:nvSpPr>
-          <p:cNvPr id="743" name="Rectangle 10"/>
-          <p:cNvSpPr/>
-          <p:nvPr/>
-        </p:nvSpPr>
-        <p:spPr>
-          <a:xfrm>
-            <a:off x="4160520" y="1508760"/>
-            <a:ext cx="3565800" cy="1691280"/>
+              <a:rPr b="0" lang="en-US" sz="1100" spc="-1" strike="noStrike">
+                <a:solidFill>
+                  <a:srgbClr val="1a1a2e"/>
+                </a:solidFill>
+                <a:latin typeface="Calibri"/>
+              </a:rPr>
+              <a:t>Убрать выбор сотрудника — автоматически по логину</a:t>
+            </a:r>
+            <a:endParaRPr b="0" lang="en-US" sz="1100" spc="-1" strike="noStrike">
+              <a:solidFill>
+                <a:srgbClr val="000000"/>
+              </a:solidFill>
+              <a:latin typeface="Arial"/>
+            </a:endParaRPr>
+          </a:p>
+        </p:txBody>
+      </p:sp>
+      <p:sp>
+        <p:nvSpPr>
+          <p:cNvPr id="744" name="Rectangle 11"/>
+          <p:cNvSpPr/>
+          <p:nvPr/>
+        </p:nvSpPr>
+        <p:spPr>
+          <a:xfrm>
+            <a:off x="6236280" y="1417320"/>
+            <a:ext cx="5687280" cy="2331360"/>
           </a:xfrm>
           <a:prstGeom prst="rect">
             <a:avLst/>
           </a:prstGeom>
           <a:solidFill>
-            <a:srgbClr val="0d1b3e"/>
+            <a:srgbClr val="ffffff"/>
           </a:solidFill>
           <a:ln>
             <a:noFill/>
@@ -34096,20 +34589,20 @@
       </p:sp>
       <p:sp>
         <p:nvSpPr>
-          <p:cNvPr id="744" name="Rectangle 11"/>
-          <p:cNvSpPr/>
-          <p:nvPr/>
-        </p:nvSpPr>
-        <p:spPr>
-          <a:xfrm>
-            <a:off x="4160520" y="1508760"/>
-            <a:ext cx="3565800" cy="72720"/>
+          <p:cNvPr id="745" name="Rectangle 12"/>
+          <p:cNvSpPr/>
+          <p:nvPr/>
+        </p:nvSpPr>
+        <p:spPr>
+          <a:xfrm>
+            <a:off x="6236280" y="1417320"/>
+            <a:ext cx="91080" cy="2331360"/>
           </a:xfrm>
           <a:prstGeom prst="rect">
             <a:avLst/>
           </a:prstGeom>
           <a:solidFill>
-            <a:srgbClr val="e8a838"/>
+            <a:srgbClr val="6a1b9a"/>
           </a:solidFill>
           <a:ln>
             <a:noFill/>
@@ -34135,7 +34628,7 @@
           <a:fontRef idx="minor"/>
         </p:style>
         <p:txBody>
-          <a:bodyPr lIns="90000" rIns="90000" tIns="28080" bIns="28080" anchor="ctr">
+          <a:bodyPr lIns="90000" rIns="90000" tIns="45000" bIns="45000" anchor="ctr">
             <a:noAutofit/>
           </a:bodyPr>
           <a:p>
@@ -34155,14 +34648,14 @@
       </p:sp>
       <p:sp>
         <p:nvSpPr>
-          <p:cNvPr id="745" name="TextBox 12"/>
-          <p:cNvSpPr/>
-          <p:nvPr/>
-        </p:nvSpPr>
-        <p:spPr>
-          <a:xfrm>
-            <a:off x="4297680" y="1645920"/>
-            <a:ext cx="3291480" cy="288000"/>
+          <p:cNvPr id="746" name="TextBox 13"/>
+          <p:cNvSpPr/>
+          <p:nvPr/>
+        </p:nvSpPr>
+        <p:spPr>
+          <a:xfrm>
+            <a:off x="6419160" y="1554480"/>
+            <a:ext cx="456840" cy="821160"/>
           </a:xfrm>
           <a:prstGeom prst="rect">
             <a:avLst/>
@@ -34189,42 +34682,33 @@
               </a:lnSpc>
             </a:pPr>
             <a:r>
-              <a:rPr b="1" lang="en-US" sz="1300" spc="-1" strike="noStrike">
-                <a:solidFill>
-                  <a:srgbClr val="e8a838"/>
-                </a:solidFill>
-                <a:latin typeface="Calibri"/>
-              </a:rPr>
-              <a:t>🔍  </a:t>
-            </a:r>
-            <a:r>
-              <a:rPr b="1" lang="en-US" sz="1300" spc="-1" strike="noStrike">
-                <a:solidFill>
-                  <a:srgbClr val="e8a838"/>
-                </a:solidFill>
-                <a:latin typeface="Calibri"/>
-              </a:rPr>
-              <a:t>15%</a:t>
-            </a:r>
-            <a:endParaRPr b="0" lang="en-US" sz="1300" spc="-1" strike="noStrike">
-              <a:solidFill>
-                <a:srgbClr val="000000"/>
-              </a:solidFill>
-              <a:latin typeface="Arial"/>
-            </a:endParaRPr>
-          </a:p>
-        </p:txBody>
-      </p:sp>
-      <p:sp>
-        <p:nvSpPr>
-          <p:cNvPr id="746" name="TextBox 13"/>
-          <p:cNvSpPr/>
-          <p:nvPr/>
-        </p:nvSpPr>
-        <p:spPr>
-          <a:xfrm>
-            <a:off x="4297680" y="2020680"/>
-            <a:ext cx="3291480" cy="272520"/>
+              <a:rPr b="0" lang="en-US" sz="2400" spc="-1" strike="noStrike">
+                <a:solidFill>
+                  <a:srgbClr val="ffffff"/>
+                </a:solidFill>
+                <a:latin typeface="Calibri"/>
+              </a:rPr>
+              <a:t>📄</a:t>
+            </a:r>
+            <a:endParaRPr b="0" lang="en-US" sz="2400" spc="-1" strike="noStrike">
+              <a:solidFill>
+                <a:srgbClr val="000000"/>
+              </a:solidFill>
+              <a:latin typeface="Arial"/>
+            </a:endParaRPr>
+          </a:p>
+        </p:txBody>
+      </p:sp>
+      <p:sp>
+        <p:nvSpPr>
+          <p:cNvPr id="747" name="TextBox 14"/>
+          <p:cNvSpPr/>
+          <p:nvPr/>
+        </p:nvSpPr>
+        <p:spPr>
+          <a:xfrm>
+            <a:off x="6922080" y="1581840"/>
+            <a:ext cx="4754520" cy="303120"/>
           </a:xfrm>
           <a:prstGeom prst="rect">
             <a:avLst/>
@@ -34251,33 +34735,33 @@
               </a:lnSpc>
             </a:pPr>
             <a:r>
-              <a:rPr b="1" lang="en-US" sz="1200" spc="-1" strike="noStrike">
-                <a:solidFill>
-                  <a:srgbClr val="ffffff"/>
-                </a:solidFill>
-                <a:latin typeface="Calibri"/>
-              </a:rPr>
-              <a:t>RAG-пайплайн</a:t>
-            </a:r>
-            <a:endParaRPr b="0" lang="en-US" sz="1200" spc="-1" strike="noStrike">
-              <a:solidFill>
-                <a:srgbClr val="000000"/>
-              </a:solidFill>
-              <a:latin typeface="Arial"/>
-            </a:endParaRPr>
-          </a:p>
-        </p:txBody>
-      </p:sp>
-      <p:sp>
-        <p:nvSpPr>
-          <p:cNvPr id="747" name="TextBox 14"/>
-          <p:cNvSpPr/>
-          <p:nvPr/>
-        </p:nvSpPr>
-        <p:spPr>
-          <a:xfrm>
-            <a:off x="4297680" y="2386440"/>
-            <a:ext cx="3291480" cy="242280"/>
+              <a:rPr b="1" lang="en-US" sz="1400" spc="-1" strike="noStrike">
+                <a:solidFill>
+                  <a:srgbClr val="6a1b9a"/>
+                </a:solidFill>
+                <a:latin typeface="Calibri"/>
+              </a:rPr>
+              <a:t>Парсинг реальных ВНД</a:t>
+            </a:r>
+            <a:endParaRPr b="0" lang="en-US" sz="1400" spc="-1" strike="noStrike">
+              <a:solidFill>
+                <a:srgbClr val="000000"/>
+              </a:solidFill>
+              <a:latin typeface="Arial"/>
+            </a:endParaRPr>
+          </a:p>
+        </p:txBody>
+      </p:sp>
+      <p:sp>
+        <p:nvSpPr>
+          <p:cNvPr id="748" name="TextBox 15"/>
+          <p:cNvSpPr/>
+          <p:nvPr/>
+        </p:nvSpPr>
+        <p:spPr>
+          <a:xfrm>
+            <a:off x="6419160" y="2011680"/>
+            <a:ext cx="5303160" cy="592920"/>
           </a:xfrm>
           <a:prstGeom prst="rect">
             <a:avLst/>
@@ -34298,45 +34782,79 @@
             <a:spAutoFit/>
           </a:bodyPr>
           <a:p>
+            <a:r>
+              <a:rPr b="0" lang="en-US" sz="1100" spc="-1" strike="noStrike">
+                <a:solidFill>
+                  <a:srgbClr val="1a1a2e"/>
+                </a:solidFill>
+                <a:latin typeface="Calibri"/>
+              </a:rPr>
+              <a:t>Word (.docx) и PDF с таблицами, списками, OCR</a:t>
+            </a:r>
+            <a:endParaRPr b="0" lang="en-US" sz="1100" spc="-1" strike="noStrike">
+              <a:solidFill>
+                <a:srgbClr val="000000"/>
+              </a:solidFill>
+              <a:latin typeface="Arial"/>
+            </a:endParaRPr>
+          </a:p>
+          <a:p>
+            <a:r>
+              <a:rPr b="0" lang="en-US" sz="1100" spc="-1" strike="noStrike">
+                <a:solidFill>
+                  <a:srgbClr val="1a1a2e"/>
+                </a:solidFill>
+                <a:latin typeface="Calibri"/>
+              </a:rPr>
+              <a:t>Adaptive chunking по заголовкам</a:t>
+            </a:r>
+            <a:endParaRPr b="0" lang="en-US" sz="1100" spc="-1" strike="noStrike">
+              <a:solidFill>
+                <a:srgbClr val="000000"/>
+              </a:solidFill>
+              <a:latin typeface="Arial"/>
+            </a:endParaRPr>
+          </a:p>
+          <a:p>
             <a:pPr defTabSz="457200">
               <a:lnSpc>
                 <a:spcPct val="100000"/>
               </a:lnSpc>
             </a:pPr>
             <a:r>
-              <a:rPr b="0" lang="en-US" sz="1000" spc="-1" strike="noStrike">
-                <a:solidFill>
-                  <a:srgbClr val="aaccff"/>
-                </a:solidFill>
-                <a:latin typeface="Calibri"/>
-              </a:rPr>
-              <a:t>Qdrant · 160 ВНД · 412 чанков · cosine · source grounding</a:t>
-            </a:r>
-            <a:endParaRPr b="0" lang="en-US" sz="1000" spc="-1" strike="noStrike">
-              <a:solidFill>
-                <a:srgbClr val="000000"/>
-              </a:solidFill>
-              <a:latin typeface="Arial"/>
-            </a:endParaRPr>
-          </a:p>
-        </p:txBody>
-      </p:sp>
-      <p:sp>
-        <p:nvSpPr>
-          <p:cNvPr id="748" name="Rectangle 15"/>
-          <p:cNvSpPr/>
-          <p:nvPr/>
-        </p:nvSpPr>
-        <p:spPr>
-          <a:xfrm>
-            <a:off x="8001000" y="1508760"/>
-            <a:ext cx="3565800" cy="1691280"/>
+              <a:rPr b="0" lang="en-US" sz="1100" spc="-1" strike="noStrike">
+                <a:solidFill>
+                  <a:srgbClr val="1a1a2e"/>
+                </a:solidFill>
+                <a:latin typeface="Calibri"/>
+              </a:rPr>
+              <a:t>Версионирование: автообновление Qdrant при изменении</a:t>
+            </a:r>
+            <a:endParaRPr b="0" lang="en-US" sz="1100" spc="-1" strike="noStrike">
+              <a:solidFill>
+                <a:srgbClr val="000000"/>
+              </a:solidFill>
+              <a:latin typeface="Arial"/>
+            </a:endParaRPr>
+          </a:p>
+        </p:txBody>
+      </p:sp>
+      <p:sp>
+        <p:nvSpPr>
+          <p:cNvPr id="749" name="Rectangle 16"/>
+          <p:cNvSpPr/>
+          <p:nvPr/>
+        </p:nvSpPr>
+        <p:spPr>
+          <a:xfrm>
+            <a:off x="274320" y="3977640"/>
+            <a:ext cx="5687280" cy="2331360"/>
           </a:xfrm>
           <a:prstGeom prst="rect">
             <a:avLst/>
           </a:prstGeom>
           <a:solidFill>
-            <a:srgbClr val="0d1b3e"/>
+            <a:srgbClr val="ffffff"/>
           </a:solidFill>
           <a:ln>
             <a:noFill/>
@@ -34382,20 +34900,20 @@
       </p:sp>
       <p:sp>
         <p:nvSpPr>
-          <p:cNvPr id="749" name="Rectangle 16"/>
-          <p:cNvSpPr/>
-          <p:nvPr/>
-        </p:nvSpPr>
-        <p:spPr>
-          <a:xfrm>
-            <a:off x="8001000" y="1508760"/>
-            <a:ext cx="3565800" cy="72720"/>
+          <p:cNvPr id="750" name="Rectangle 17"/>
+          <p:cNvSpPr/>
+          <p:nvPr/>
+        </p:nvSpPr>
+        <p:spPr>
+          <a:xfrm>
+            <a:off x="274320" y="3977640"/>
+            <a:ext cx="91080" cy="2331360"/>
           </a:xfrm>
           <a:prstGeom prst="rect">
             <a:avLst/>
           </a:prstGeom>
           <a:solidFill>
-            <a:srgbClr val="e8a838"/>
+            <a:srgbClr val="f44336"/>
           </a:solidFill>
           <a:ln>
             <a:noFill/>
@@ -34421,7 +34939,7 @@
           <a:fontRef idx="minor"/>
         </p:style>
         <p:txBody>
-          <a:bodyPr lIns="90000" rIns="90000" tIns="28080" bIns="28080" anchor="ctr">
+          <a:bodyPr lIns="90000" rIns="90000" tIns="45000" bIns="45000" anchor="ctr">
             <a:noAutofit/>
           </a:bodyPr>
           <a:p>
@@ -34441,14 +34959,14 @@
       </p:sp>
       <p:sp>
         <p:nvSpPr>
-          <p:cNvPr id="750" name="TextBox 17"/>
-          <p:cNvSpPr/>
-          <p:nvPr/>
-        </p:nvSpPr>
-        <p:spPr>
-          <a:xfrm>
-            <a:off x="8138160" y="1645920"/>
-            <a:ext cx="3291480" cy="288000"/>
+          <p:cNvPr id="751" name="TextBox 18"/>
+          <p:cNvSpPr/>
+          <p:nvPr/>
+        </p:nvSpPr>
+        <p:spPr>
+          <a:xfrm>
+            <a:off x="457200" y="4114800"/>
+            <a:ext cx="456840" cy="1186920"/>
           </a:xfrm>
           <a:prstGeom prst="rect">
             <a:avLst/>
@@ -34475,42 +34993,33 @@
               </a:lnSpc>
             </a:pPr>
             <a:r>
-              <a:rPr b="1" lang="en-US" sz="1300" spc="-1" strike="noStrike">
-                <a:solidFill>
-                  <a:srgbClr val="e8a838"/>
-                </a:solidFill>
-                <a:latin typeface="Calibri"/>
-              </a:rPr>
-              <a:t>📊  </a:t>
-            </a:r>
-            <a:r>
-              <a:rPr b="1" lang="en-US" sz="1300" spc="-1" strike="noStrike">
-                <a:solidFill>
-                  <a:srgbClr val="e8a838"/>
-                </a:solidFill>
-                <a:latin typeface="Calibri"/>
-              </a:rPr>
-              <a:t>10%</a:t>
-            </a:r>
-            <a:endParaRPr b="0" lang="en-US" sz="1300" spc="-1" strike="noStrike">
-              <a:solidFill>
-                <a:srgbClr val="000000"/>
-              </a:solidFill>
-              <a:latin typeface="Arial"/>
-            </a:endParaRPr>
-          </a:p>
-        </p:txBody>
-      </p:sp>
-      <p:sp>
-        <p:nvSpPr>
-          <p:cNvPr id="751" name="TextBox 18"/>
-          <p:cNvSpPr/>
-          <p:nvPr/>
-        </p:nvSpPr>
-        <p:spPr>
-          <a:xfrm>
-            <a:off x="8138160" y="2020680"/>
-            <a:ext cx="3291480" cy="272520"/>
+              <a:rPr b="0" lang="en-US" sz="2400" spc="-1" strike="noStrike">
+                <a:solidFill>
+                  <a:srgbClr val="ffffff"/>
+                </a:solidFill>
+                <a:latin typeface="Calibri"/>
+              </a:rPr>
+              <a:t>🖥️</a:t>
+            </a:r>
+            <a:endParaRPr b="0" lang="en-US" sz="2400" spc="-1" strike="noStrike">
+              <a:solidFill>
+                <a:srgbClr val="000000"/>
+              </a:solidFill>
+              <a:latin typeface="Arial"/>
+            </a:endParaRPr>
+          </a:p>
+        </p:txBody>
+      </p:sp>
+      <p:sp>
+        <p:nvSpPr>
+          <p:cNvPr id="752" name="TextBox 19"/>
+          <p:cNvSpPr/>
+          <p:nvPr/>
+        </p:nvSpPr>
+        <p:spPr>
+          <a:xfrm>
+            <a:off x="960120" y="4142160"/>
+            <a:ext cx="4754520" cy="303120"/>
           </a:xfrm>
           <a:prstGeom prst="rect">
             <a:avLst/>
@@ -34537,33 +35046,33 @@
               </a:lnSpc>
             </a:pPr>
             <a:r>
-              <a:rPr b="1" lang="en-US" sz="1200" spc="-1" strike="noStrike">
-                <a:solidFill>
-                  <a:srgbClr val="ffffff"/>
-                </a:solidFill>
-                <a:latin typeface="Calibri"/>
-              </a:rPr>
-              <a:t>Аналитика и дашборд</a:t>
-            </a:r>
-            <a:endParaRPr b="0" lang="en-US" sz="1200" spc="-1" strike="noStrike">
-              <a:solidFill>
-                <a:srgbClr val="000000"/>
-              </a:solidFill>
-              <a:latin typeface="Arial"/>
-            </a:endParaRPr>
-          </a:p>
-        </p:txBody>
-      </p:sp>
-      <p:sp>
-        <p:nvSpPr>
-          <p:cNvPr id="752" name="TextBox 19"/>
-          <p:cNvSpPr/>
-          <p:nvPr/>
-        </p:nvSpPr>
-        <p:spPr>
-          <a:xfrm>
-            <a:off x="8138160" y="2386440"/>
-            <a:ext cx="3291480" cy="242280"/>
+              <a:rPr b="1" lang="en-US" sz="1400" spc="-1" strike="noStrike">
+                <a:solidFill>
+                  <a:srgbClr val="f44336"/>
+                </a:solidFill>
+                <a:latin typeface="Calibri"/>
+              </a:rPr>
+              <a:t>GPU-кластер / локальная LLM</a:t>
+            </a:r>
+            <a:endParaRPr b="0" lang="en-US" sz="1400" spc="-1" strike="noStrike">
+              <a:solidFill>
+                <a:srgbClr val="000000"/>
+              </a:solidFill>
+              <a:latin typeface="Arial"/>
+            </a:endParaRPr>
+          </a:p>
+        </p:txBody>
+      </p:sp>
+      <p:sp>
+        <p:nvSpPr>
+          <p:cNvPr id="753" name="TextBox 20"/>
+          <p:cNvSpPr/>
+          <p:nvPr/>
+        </p:nvSpPr>
+        <p:spPr>
+          <a:xfrm>
+            <a:off x="457200" y="4572000"/>
+            <a:ext cx="5303160" cy="592920"/>
           </a:xfrm>
           <a:prstGeom prst="rect">
             <a:avLst/>
@@ -34584,45 +35093,79 @@
             <a:spAutoFit/>
           </a:bodyPr>
           <a:p>
+            <a:r>
+              <a:rPr b="0" lang="en-US" sz="1100" spc="-1" strike="noStrike">
+                <a:solidFill>
+                  <a:srgbClr val="1a1a2e"/>
+                </a:solidFill>
+                <a:latin typeface="Calibri"/>
+              </a:rPr>
+              <a:t>ВНД = конфиденциальные данные, нельзя в облако</a:t>
+            </a:r>
+            <a:endParaRPr b="0" lang="en-US" sz="1100" spc="-1" strike="noStrike">
+              <a:solidFill>
+                <a:srgbClr val="000000"/>
+              </a:solidFill>
+              <a:latin typeface="Arial"/>
+            </a:endParaRPr>
+          </a:p>
+          <a:p>
+            <a:r>
+              <a:rPr b="0" lang="en-US" sz="1100" spc="-1" strike="noStrike">
+                <a:solidFill>
+                  <a:srgbClr val="1a1a2e"/>
+                </a:solidFill>
+                <a:latin typeface="Calibri"/>
+              </a:rPr>
+              <a:t>vLLM + Llama 3 / Mistral на NVIDIA A100</a:t>
+            </a:r>
+            <a:endParaRPr b="0" lang="en-US" sz="1100" spc="-1" strike="noStrike">
+              <a:solidFill>
+                <a:srgbClr val="000000"/>
+              </a:solidFill>
+              <a:latin typeface="Arial"/>
+            </a:endParaRPr>
+          </a:p>
+          <a:p>
             <a:pPr defTabSz="457200">
               <a:lnSpc>
                 <a:spcPct val="100000"/>
               </a:lnSpc>
             </a:pPr>
             <a:r>
-              <a:rPr b="0" lang="en-US" sz="1000" spc="-1" strike="noStrike">
-                <a:solidFill>
-                  <a:srgbClr val="aaccff"/>
-                </a:solidFill>
-                <a:latin typeface="Calibri"/>
-              </a:rPr>
-              <a:t>Dept quality · quarterly trend · maturity F-22 · radar chart</a:t>
-            </a:r>
-            <a:endParaRPr b="0" lang="en-US" sz="1000" spc="-1" strike="noStrike">
-              <a:solidFill>
-                <a:srgbClr val="000000"/>
-              </a:solidFill>
-              <a:latin typeface="Arial"/>
-            </a:endParaRPr>
-          </a:p>
-        </p:txBody>
-      </p:sp>
-      <p:sp>
-        <p:nvSpPr>
-          <p:cNvPr id="753" name="Rectangle 20"/>
-          <p:cNvSpPr/>
-          <p:nvPr/>
-        </p:nvSpPr>
-        <p:spPr>
-          <a:xfrm>
-            <a:off x="320040" y="3429000"/>
-            <a:ext cx="3565800" cy="1691280"/>
+              <a:rPr b="0" lang="en-US" sz="1100" spc="-1" strike="noStrike">
+                <a:solidFill>
+                  <a:srgbClr val="1a1a2e"/>
+                </a:solidFill>
+                <a:latin typeface="Calibri"/>
+              </a:rPr>
+              <a:t>Полная автономность, без rate limits</a:t>
+            </a:r>
+            <a:endParaRPr b="0" lang="en-US" sz="1100" spc="-1" strike="noStrike">
+              <a:solidFill>
+                <a:srgbClr val="000000"/>
+              </a:solidFill>
+              <a:latin typeface="Arial"/>
+            </a:endParaRPr>
+          </a:p>
+        </p:txBody>
+      </p:sp>
+      <p:sp>
+        <p:nvSpPr>
+          <p:cNvPr id="754" name="Rectangle 21"/>
+          <p:cNvSpPr/>
+          <p:nvPr/>
+        </p:nvSpPr>
+        <p:spPr>
+          <a:xfrm>
+            <a:off x="6236280" y="3977640"/>
+            <a:ext cx="5687280" cy="2331360"/>
           </a:xfrm>
           <a:prstGeom prst="rect">
             <a:avLst/>
           </a:prstGeom>
           <a:solidFill>
-            <a:srgbClr val="0d1b3e"/>
+            <a:srgbClr val="ffffff"/>
           </a:solidFill>
           <a:ln>
             <a:noFill/>
@@ -34668,20 +35211,20 @@
       </p:sp>
       <p:sp>
         <p:nvSpPr>
-          <p:cNvPr id="754" name="Rectangle 21"/>
-          <p:cNvSpPr/>
-          <p:nvPr/>
-        </p:nvSpPr>
-        <p:spPr>
-          <a:xfrm>
-            <a:off x="320040" y="3429000"/>
-            <a:ext cx="3565800" cy="72720"/>
+          <p:cNvPr id="755" name="Rectangle 22"/>
+          <p:cNvSpPr/>
+          <p:nvPr/>
+        </p:nvSpPr>
+        <p:spPr>
+          <a:xfrm>
+            <a:off x="6236280" y="3977640"/>
+            <a:ext cx="91080" cy="2331360"/>
           </a:xfrm>
           <a:prstGeom prst="rect">
             <a:avLst/>
           </a:prstGeom>
           <a:solidFill>
-            <a:srgbClr val="e8a838"/>
+            <a:srgbClr val="2e7d32"/>
           </a:solidFill>
           <a:ln>
             <a:noFill/>
@@ -34707,7 +35250,7 @@
           <a:fontRef idx="minor"/>
         </p:style>
         <p:txBody>
-          <a:bodyPr lIns="90000" rIns="90000" tIns="28080" bIns="28080" anchor="ctr">
+          <a:bodyPr lIns="90000" rIns="90000" tIns="45000" bIns="45000" anchor="ctr">
             <a:noAutofit/>
           </a:bodyPr>
           <a:p>
@@ -34727,14 +35270,14 @@
       </p:sp>
       <p:sp>
         <p:nvSpPr>
-          <p:cNvPr id="755" name="TextBox 22"/>
-          <p:cNvSpPr/>
-          <p:nvPr/>
-        </p:nvSpPr>
-        <p:spPr>
-          <a:xfrm>
-            <a:off x="457200" y="3566160"/>
-            <a:ext cx="3291480" cy="288000"/>
+          <p:cNvPr id="756" name="TextBox 23"/>
+          <p:cNvSpPr/>
+          <p:nvPr/>
+        </p:nvSpPr>
+        <p:spPr>
+          <a:xfrm>
+            <a:off x="6419160" y="4114800"/>
+            <a:ext cx="456840" cy="455400"/>
           </a:xfrm>
           <a:prstGeom prst="rect">
             <a:avLst/>
@@ -34761,42 +35304,33 @@
               </a:lnSpc>
             </a:pPr>
             <a:r>
-              <a:rPr b="1" lang="en-US" sz="1300" spc="-1" strike="noStrike">
-                <a:solidFill>
-                  <a:srgbClr val="e8a838"/>
-                </a:solidFill>
-                <a:latin typeface="Calibri"/>
-              </a:rPr>
-              <a:t>⚙️  </a:t>
-            </a:r>
-            <a:r>
-              <a:rPr b="1" lang="en-US" sz="1300" spc="-1" strike="noStrike">
-                <a:solidFill>
-                  <a:srgbClr val="e8a838"/>
-                </a:solidFill>
-                <a:latin typeface="Calibri"/>
-              </a:rPr>
-              <a:t>10%</a:t>
-            </a:r>
-            <a:endParaRPr b="0" lang="en-US" sz="1300" spc="-1" strike="noStrike">
-              <a:solidFill>
-                <a:srgbClr val="000000"/>
-              </a:solidFill>
-              <a:latin typeface="Arial"/>
-            </a:endParaRPr>
-          </a:p>
-        </p:txBody>
-      </p:sp>
-      <p:sp>
-        <p:nvSpPr>
-          <p:cNvPr id="756" name="TextBox 23"/>
-          <p:cNvSpPr/>
-          <p:nvPr/>
-        </p:nvSpPr>
-        <p:spPr>
-          <a:xfrm>
-            <a:off x="457200" y="3940920"/>
-            <a:ext cx="3291480" cy="272520"/>
+              <a:rPr b="0" lang="en-US" sz="2400" spc="-1" strike="noStrike">
+                <a:solidFill>
+                  <a:srgbClr val="ffffff"/>
+                </a:solidFill>
+                <a:latin typeface="Calibri"/>
+              </a:rPr>
+              <a:t>⚡</a:t>
+            </a:r>
+            <a:endParaRPr b="0" lang="en-US" sz="2400" spc="-1" strike="noStrike">
+              <a:solidFill>
+                <a:srgbClr val="000000"/>
+              </a:solidFill>
+              <a:latin typeface="Arial"/>
+            </a:endParaRPr>
+          </a:p>
+        </p:txBody>
+      </p:sp>
+      <p:sp>
+        <p:nvSpPr>
+          <p:cNvPr id="757" name="TextBox 24"/>
+          <p:cNvSpPr/>
+          <p:nvPr/>
+        </p:nvSpPr>
+        <p:spPr>
+          <a:xfrm>
+            <a:off x="6922080" y="4142160"/>
+            <a:ext cx="4754520" cy="303120"/>
           </a:xfrm>
           <a:prstGeom prst="rect">
             <a:avLst/>
@@ -34823,33 +35357,33 @@
               </a:lnSpc>
             </a:pPr>
             <a:r>
-              <a:rPr b="1" lang="en-US" sz="1200" spc="-1" strike="noStrike">
-                <a:solidFill>
-                  <a:srgbClr val="ffffff"/>
-                </a:solidFill>
-                <a:latin typeface="Calibri"/>
-              </a:rPr>
-              <a:t>Архитектура и API</a:t>
-            </a:r>
-            <a:endParaRPr b="0" lang="en-US" sz="1200" spc="-1" strike="noStrike">
-              <a:solidFill>
-                <a:srgbClr val="000000"/>
-              </a:solidFill>
-              <a:latin typeface="Arial"/>
-            </a:endParaRPr>
-          </a:p>
-        </p:txBody>
-      </p:sp>
-      <p:sp>
-        <p:nvSpPr>
-          <p:cNvPr id="757" name="TextBox 24"/>
-          <p:cNvSpPr/>
-          <p:nvPr/>
-        </p:nvSpPr>
-        <p:spPr>
-          <a:xfrm>
-            <a:off x="457200" y="4306680"/>
-            <a:ext cx="3291480" cy="394920"/>
+              <a:rPr b="1" lang="en-US" sz="1400" spc="-1" strike="noStrike">
+                <a:solidFill>
+                  <a:srgbClr val="2e7d32"/>
+                </a:solidFill>
+                <a:latin typeface="Calibri"/>
+              </a:rPr>
+              <a:t>Масштабирование</a:t>
+            </a:r>
+            <a:endParaRPr b="0" lang="en-US" sz="1400" spc="-1" strike="noStrike">
+              <a:solidFill>
+                <a:srgbClr val="000000"/>
+              </a:solidFill>
+              <a:latin typeface="Arial"/>
+            </a:endParaRPr>
+          </a:p>
+        </p:txBody>
+      </p:sp>
+      <p:sp>
+        <p:nvSpPr>
+          <p:cNvPr id="758" name="TextBox 25"/>
+          <p:cNvSpPr/>
+          <p:nvPr/>
+        </p:nvSpPr>
+        <p:spPr>
+          <a:xfrm>
+            <a:off x="6419160" y="4572000"/>
+            <a:ext cx="5303160" cy="592920"/>
           </a:xfrm>
           <a:prstGeom prst="rect">
             <a:avLst/>
@@ -34870,19 +35404,106 @@
             <a:spAutoFit/>
           </a:bodyPr>
           <a:p>
+            <a:r>
+              <a:rPr b="0" lang="en-US" sz="1100" spc="-1" strike="noStrike">
+                <a:solidFill>
+                  <a:srgbClr val="1a1a2e"/>
+                </a:solidFill>
+                <a:latin typeface="Calibri"/>
+              </a:rPr>
+              <a:t>Kubernetes HPA + 3 реплики API</a:t>
+            </a:r>
+            <a:endParaRPr b="0" lang="en-US" sz="1100" spc="-1" strike="noStrike">
+              <a:solidFill>
+                <a:srgbClr val="000000"/>
+              </a:solidFill>
+              <a:latin typeface="Arial"/>
+            </a:endParaRPr>
+          </a:p>
+          <a:p>
+            <a:r>
+              <a:rPr b="0" lang="en-US" sz="1100" spc="-1" strike="noStrike">
+                <a:solidFill>
+                  <a:srgbClr val="1a1a2e"/>
+                </a:solidFill>
+                <a:latin typeface="Calibri"/>
+              </a:rPr>
+              <a:t>Redis: rate limiting + кеш + Celery очередь</a:t>
+            </a:r>
+            <a:endParaRPr b="0" lang="en-US" sz="1100" spc="-1" strike="noStrike">
+              <a:solidFill>
+                <a:srgbClr val="000000"/>
+              </a:solidFill>
+              <a:latin typeface="Arial"/>
+            </a:endParaRPr>
+          </a:p>
+          <a:p>
             <a:pPr defTabSz="457200">
               <a:lnSpc>
                 <a:spcPct val="100000"/>
               </a:lnSpc>
             </a:pPr>
             <a:r>
+              <a:rPr b="0" lang="en-US" sz="1100" spc="-1" strike="noStrike">
+                <a:solidFill>
+                  <a:srgbClr val="1a1a2e"/>
+                </a:solidFill>
+                <a:latin typeface="Calibri"/>
+              </a:rPr>
+              <a:t>Gunicorn + N workers вместо 1 uvicorn</a:t>
+            </a:r>
+            <a:endParaRPr b="0" lang="en-US" sz="1100" spc="-1" strike="noStrike">
+              <a:solidFill>
+                <a:srgbClr val="000000"/>
+              </a:solidFill>
+              <a:latin typeface="Arial"/>
+            </a:endParaRPr>
+          </a:p>
+        </p:txBody>
+      </p:sp>
+      <p:sp>
+        <p:nvSpPr>
+          <p:cNvPr id="759" name="TextBox 26"/>
+          <p:cNvSpPr/>
+          <p:nvPr/>
+        </p:nvSpPr>
+        <p:spPr>
+          <a:xfrm>
+            <a:off x="11064240" y="6492240"/>
+            <a:ext cx="1005480" cy="242280"/>
+          </a:xfrm>
+          <a:prstGeom prst="rect">
+            <a:avLst/>
+          </a:prstGeom>
+          <a:noFill/>
+          <a:ln w="0">
+            <a:noFill/>
+          </a:ln>
+        </p:spPr>
+        <p:style>
+          <a:lnRef idx="0"/>
+          <a:fillRef idx="0"/>
+          <a:effectRef idx="0"/>
+          <a:fontRef idx="minor"/>
+        </p:style>
+        <p:txBody>
+          <a:bodyPr lIns="90000" rIns="90000" tIns="45000" bIns="45000" anchor="t">
+            <a:spAutoFit/>
+          </a:bodyPr>
+          <a:p>
+            <a:pPr algn="r" defTabSz="457200">
+              <a:lnSpc>
+                <a:spcPct val="100000"/>
+              </a:lnSpc>
+            </a:pPr>
+            <a:r>
               <a:rPr b="0" lang="en-US" sz="1000" spc="-1" strike="noStrike">
                 <a:solidFill>
-                  <a:srgbClr val="aaccff"/>
-                </a:solidFill>
-                <a:latin typeface="Calibri"/>
-              </a:rPr>
-              <a:t>FastAPI · OpenAPI /docs · Docker Compose · Alembic · Pydantic v2</a:t>
+                  <a:srgbClr val="aaaaaa"/>
+                </a:solidFill>
+                <a:latin typeface="Calibri"/>
+              </a:rPr>
+              <a:t>20 / 21</a:t>
             </a:r>
             <a:endParaRPr b="0" lang="en-US" sz="1000" spc="-1" strike="noStrike">
               <a:solidFill>
@@ -34893,22 +35514,52 @@
           </a:p>
         </p:txBody>
       </p:sp>
-      <p:sp>
-        <p:nvSpPr>
-          <p:cNvPr id="758" name="Rectangle 25"/>
-          <p:cNvSpPr/>
-          <p:nvPr/>
-        </p:nvSpPr>
-        <p:spPr>
-          <a:xfrm>
-            <a:off x="4160520" y="3429000"/>
-            <a:ext cx="3565800" cy="1691280"/>
+    </p:spTree>
+  </p:cSld>
+  <mc:AlternateContent>
+    <mc:Choice Requires="p14">
+      <p:transition spd="slow" p14:dur="2000"/>
+    </mc:Choice>
+    <mc:Fallback>
+      <p:transition spd="slow"/>
+    </mc:Fallback>
+  </mc:AlternateContent>
+</p:sld>
+</file>
+
+<file path=ppt/slides/slide21.xml><?xml version="1.0" encoding="utf-8"?>
+<p:sld xmlns:a="http://schemas.openxmlformats.org/drawingml/2006/main" xmlns:p="http://schemas.openxmlformats.org/presentationml/2006/main" xmlns:r="http://schemas.openxmlformats.org/officeDocument/2006/relationships" xmlns:p14="http://schemas.microsoft.com/office/powerpoint/2010/main" xmlns:p15="http://schemas.microsoft.com/office/powerpoint/2012/main" xmlns:mc="http://schemas.openxmlformats.org/markup-compatibility/2006">
+  <p:cSld>
+    <p:spTree>
+      <p:nvGrpSpPr>
+        <p:cNvPr id="1" name=""/>
+        <p:cNvGrpSpPr/>
+        <p:nvPr/>
+      </p:nvGrpSpPr>
+      <p:grpSpPr>
+        <a:xfrm>
+          <a:off x="0" y="0"/>
+          <a:ext cx="0" cy="0"/>
+          <a:chOff x="0" y="0"/>
+          <a:chExt cx="0" cy="0"/>
+        </a:xfrm>
+      </p:grpSpPr>
+      <p:sp>
+        <p:nvSpPr>
+          <p:cNvPr id="760" name="Rectangle 1"/>
+          <p:cNvSpPr/>
+          <p:nvPr/>
+        </p:nvSpPr>
+        <p:spPr>
+          <a:xfrm>
+            <a:off x="0" y="0"/>
+            <a:ext cx="12188520" cy="6857640"/>
           </a:xfrm>
           <a:prstGeom prst="rect">
             <a:avLst/>
           </a:prstGeom>
           <a:solidFill>
-            <a:srgbClr val="0d1b3e"/>
+            <a:srgbClr val="1a3264"/>
           </a:solidFill>
           <a:ln>
             <a:noFill/>
@@ -34954,14 +35605,14 @@
       </p:sp>
       <p:sp>
         <p:nvSpPr>
-          <p:cNvPr id="759" name="Rectangle 26"/>
-          <p:cNvSpPr/>
-          <p:nvPr/>
-        </p:nvSpPr>
-        <p:spPr>
-          <a:xfrm>
-            <a:off x="4160520" y="3429000"/>
-            <a:ext cx="3565800" cy="72720"/>
+          <p:cNvPr id="761" name="Rectangle 2"/>
+          <p:cNvSpPr/>
+          <p:nvPr/>
+        </p:nvSpPr>
+        <p:spPr>
+          <a:xfrm>
+            <a:off x="360" y="5486400"/>
+            <a:ext cx="12188520" cy="109440"/>
           </a:xfrm>
           <a:prstGeom prst="rect">
             <a:avLst/>
@@ -34993,7 +35644,7 @@
           <a:fontRef idx="minor"/>
         </p:style>
         <p:txBody>
-          <a:bodyPr lIns="90000" rIns="90000" tIns="28080" bIns="28080" anchor="ctr">
+          <a:bodyPr lIns="90000" rIns="90000" tIns="45000" bIns="45000" anchor="ctr">
             <a:noAutofit/>
           </a:bodyPr>
           <a:p>
@@ -35013,14 +35664,73 @@
       </p:sp>
       <p:sp>
         <p:nvSpPr>
-          <p:cNvPr id="760" name="TextBox 27"/>
-          <p:cNvSpPr/>
-          <p:nvPr/>
-        </p:nvSpPr>
-        <p:spPr>
-          <a:xfrm>
-            <a:off x="4297680" y="3566160"/>
-            <a:ext cx="3291480" cy="288000"/>
+          <p:cNvPr id="762" name="Rectangle 3"/>
+          <p:cNvSpPr/>
+          <p:nvPr/>
+        </p:nvSpPr>
+        <p:spPr>
+          <a:xfrm>
+            <a:off x="0" y="0"/>
+            <a:ext cx="164160" cy="6857640"/>
+          </a:xfrm>
+          <a:prstGeom prst="rect">
+            <a:avLst/>
+          </a:prstGeom>
+          <a:solidFill>
+            <a:srgbClr val="e8a838"/>
+          </a:solidFill>
+          <a:ln>
+            <a:noFill/>
+          </a:ln>
+          <a:effectLst>
+            <a:outerShdw blurRad="39960" dir="5400000" dist="23040" rotWithShape="0">
+              <a:srgbClr val="000000">
+                <a:alpha val="35000"/>
+              </a:srgbClr>
+            </a:outerShdw>
+          </a:effectLst>
+        </p:spPr>
+        <p:style>
+          <a:lnRef idx="1">
+            <a:schemeClr val="accent1"/>
+          </a:lnRef>
+          <a:fillRef idx="3">
+            <a:schemeClr val="accent1"/>
+          </a:fillRef>
+          <a:effectRef idx="2">
+            <a:schemeClr val="accent1"/>
+          </a:effectRef>
+          <a:fontRef idx="minor"/>
+        </p:style>
+        <p:txBody>
+          <a:bodyPr lIns="90000" rIns="90000" tIns="45000" bIns="45000" anchor="ctr">
+            <a:noAutofit/>
+          </a:bodyPr>
+          <a:p>
+            <a:pPr algn="ctr" defTabSz="457200">
+              <a:lnSpc>
+                <a:spcPct val="100000"/>
+              </a:lnSpc>
+            </a:pPr>
+            <a:endParaRPr b="0" lang="en-US" sz="1800" spc="-1" strike="noStrike">
+              <a:solidFill>
+                <a:schemeClr val="lt1"/>
+              </a:solidFill>
+              <a:latin typeface="Calibri"/>
+            </a:endParaRPr>
+          </a:p>
+        </p:txBody>
+      </p:sp>
+      <p:sp>
+        <p:nvSpPr>
+          <p:cNvPr id="763" name="TextBox 4"/>
+          <p:cNvSpPr/>
+          <p:nvPr/>
+        </p:nvSpPr>
+        <p:spPr>
+          <a:xfrm>
+            <a:off x="457200" y="548640"/>
+            <a:ext cx="11274120" cy="699120"/>
           </a:xfrm>
           <a:prstGeom prst="rect">
             <a:avLst/>
@@ -35041,48 +35751,157 @@
             <a:spAutoFit/>
           </a:bodyPr>
           <a:p>
-            <a:pPr defTabSz="457200">
-              <a:lnSpc>
-                <a:spcPct val="100000"/>
-              </a:lnSpc>
-            </a:pPr>
-            <a:r>
-              <a:rPr b="1" lang="en-US" sz="1300" spc="-1" strike="noStrike">
-                <a:solidFill>
-                  <a:srgbClr val="e8a838"/>
-                </a:solidFill>
-                <a:latin typeface="Calibri"/>
-              </a:rPr>
-              <a:t>💻  </a:t>
-            </a:r>
-            <a:r>
-              <a:rPr b="1" lang="en-US" sz="1300" spc="-1" strike="noStrike">
-                <a:solidFill>
-                  <a:srgbClr val="e8a838"/>
-                </a:solidFill>
-                <a:latin typeface="Calibri"/>
-              </a:rPr>
-              <a:t>15%</a:t>
-            </a:r>
-            <a:endParaRPr b="0" lang="en-US" sz="1300" spc="-1" strike="noStrike">
-              <a:solidFill>
-                <a:srgbClr val="000000"/>
-              </a:solidFill>
-              <a:latin typeface="Arial"/>
-            </a:endParaRPr>
-          </a:p>
-        </p:txBody>
-      </p:sp>
-      <p:sp>
-        <p:nvSpPr>
-          <p:cNvPr id="761" name="TextBox 28"/>
-          <p:cNvSpPr/>
-          <p:nvPr/>
-        </p:nvSpPr>
-        <p:spPr>
-          <a:xfrm>
-            <a:off x="4297680" y="3940920"/>
-            <a:ext cx="3291480" cy="272520"/>
+            <a:pPr algn="ctr" defTabSz="457200">
+              <a:lnSpc>
+                <a:spcPct val="100000"/>
+              </a:lnSpc>
+            </a:pPr>
+            <a:r>
+              <a:rPr b="1" lang="en-US" sz="4000" spc="-1" strike="noStrike">
+                <a:solidFill>
+                  <a:srgbClr val="ffffff"/>
+                </a:solidFill>
+                <a:latin typeface="Calibri"/>
+              </a:rPr>
+              <a:t>Спасибо за внимание</a:t>
+            </a:r>
+            <a:endParaRPr b="0" lang="en-US" sz="4000" spc="-1" strike="noStrike">
+              <a:solidFill>
+                <a:srgbClr val="000000"/>
+              </a:solidFill>
+              <a:latin typeface="Arial"/>
+            </a:endParaRPr>
+          </a:p>
+        </p:txBody>
+      </p:sp>
+      <p:sp>
+        <p:nvSpPr>
+          <p:cNvPr id="764" name="Rectangle 5"/>
+          <p:cNvSpPr/>
+          <p:nvPr/>
+        </p:nvSpPr>
+        <p:spPr>
+          <a:xfrm>
+            <a:off x="320040" y="1508760"/>
+            <a:ext cx="3565800" cy="1691280"/>
+          </a:xfrm>
+          <a:prstGeom prst="rect">
+            <a:avLst/>
+          </a:prstGeom>
+          <a:solidFill>
+            <a:srgbClr val="0d1b3e"/>
+          </a:solidFill>
+          <a:ln>
+            <a:noFill/>
+          </a:ln>
+          <a:effectLst>
+            <a:outerShdw blurRad="39960" dir="5400000" dist="23040" rotWithShape="0">
+              <a:srgbClr val="000000">
+                <a:alpha val="35000"/>
+              </a:srgbClr>
+            </a:outerShdw>
+          </a:effectLst>
+        </p:spPr>
+        <p:style>
+          <a:lnRef idx="1">
+            <a:schemeClr val="accent1"/>
+          </a:lnRef>
+          <a:fillRef idx="3">
+            <a:schemeClr val="accent1"/>
+          </a:fillRef>
+          <a:effectRef idx="2">
+            <a:schemeClr val="accent1"/>
+          </a:effectRef>
+          <a:fontRef idx="minor"/>
+        </p:style>
+        <p:txBody>
+          <a:bodyPr lIns="90000" rIns="90000" tIns="45000" bIns="45000" anchor="ctr">
+            <a:noAutofit/>
+          </a:bodyPr>
+          <a:p>
+            <a:pPr algn="ctr" defTabSz="457200">
+              <a:lnSpc>
+                <a:spcPct val="100000"/>
+              </a:lnSpc>
+            </a:pPr>
+            <a:endParaRPr b="0" lang="en-US" sz="1800" spc="-1" strike="noStrike">
+              <a:solidFill>
+                <a:schemeClr val="lt1"/>
+              </a:solidFill>
+              <a:latin typeface="Calibri"/>
+            </a:endParaRPr>
+          </a:p>
+        </p:txBody>
+      </p:sp>
+      <p:sp>
+        <p:nvSpPr>
+          <p:cNvPr id="765" name="Rectangle 6"/>
+          <p:cNvSpPr/>
+          <p:nvPr/>
+        </p:nvSpPr>
+        <p:spPr>
+          <a:xfrm>
+            <a:off x="320040" y="1508760"/>
+            <a:ext cx="3565800" cy="72720"/>
+          </a:xfrm>
+          <a:prstGeom prst="rect">
+            <a:avLst/>
+          </a:prstGeom>
+          <a:solidFill>
+            <a:srgbClr val="e8a838"/>
+          </a:solidFill>
+          <a:ln>
+            <a:noFill/>
+          </a:ln>
+          <a:effectLst>
+            <a:outerShdw blurRad="39960" dir="5400000" dist="23040" rotWithShape="0">
+              <a:srgbClr val="000000">
+                <a:alpha val="35000"/>
+              </a:srgbClr>
+            </a:outerShdw>
+          </a:effectLst>
+        </p:spPr>
+        <p:style>
+          <a:lnRef idx="1">
+            <a:schemeClr val="accent1"/>
+          </a:lnRef>
+          <a:fillRef idx="3">
+            <a:schemeClr val="accent1"/>
+          </a:fillRef>
+          <a:effectRef idx="2">
+            <a:schemeClr val="accent1"/>
+          </a:effectRef>
+          <a:fontRef idx="minor"/>
+        </p:style>
+        <p:txBody>
+          <a:bodyPr lIns="90000" rIns="90000" tIns="28080" bIns="28080" anchor="ctr">
+            <a:noAutofit/>
+          </a:bodyPr>
+          <a:p>
+            <a:pPr algn="ctr" defTabSz="457200">
+              <a:lnSpc>
+                <a:spcPct val="100000"/>
+              </a:lnSpc>
+            </a:pPr>
+            <a:endParaRPr b="0" lang="en-US" sz="1800" spc="-1" strike="noStrike">
+              <a:solidFill>
+                <a:schemeClr val="lt1"/>
+              </a:solidFill>
+              <a:latin typeface="Calibri"/>
+            </a:endParaRPr>
+          </a:p>
+        </p:txBody>
+      </p:sp>
+      <p:sp>
+        <p:nvSpPr>
+          <p:cNvPr id="766" name="TextBox 7"/>
+          <p:cNvSpPr/>
+          <p:nvPr/>
+        </p:nvSpPr>
+        <p:spPr>
+          <a:xfrm>
+            <a:off x="457200" y="1645920"/>
+            <a:ext cx="3291480" cy="288000"/>
           </a:xfrm>
           <a:prstGeom prst="rect">
             <a:avLst/>
@@ -35109,33 +35928,42 @@
               </a:lnSpc>
             </a:pPr>
             <a:r>
-              <a:rPr b="1" lang="en-US" sz="1200" spc="-1" strike="noStrike">
-                <a:solidFill>
-                  <a:srgbClr val="ffffff"/>
-                </a:solidFill>
-                <a:latin typeface="Calibri"/>
-              </a:rPr>
-              <a:t>UX интерфейса</a:t>
-            </a:r>
-            <a:endParaRPr b="0" lang="en-US" sz="1200" spc="-1" strike="noStrike">
-              <a:solidFill>
-                <a:srgbClr val="000000"/>
-              </a:solidFill>
-              <a:latin typeface="Arial"/>
-            </a:endParaRPr>
-          </a:p>
-        </p:txBody>
-      </p:sp>
-      <p:sp>
-        <p:nvSpPr>
-          <p:cNvPr id="762" name="TextBox 29"/>
-          <p:cNvSpPr/>
-          <p:nvPr/>
-        </p:nvSpPr>
-        <p:spPr>
-          <a:xfrm>
-            <a:off x="4297680" y="4306680"/>
-            <a:ext cx="3291480" cy="242280"/>
+              <a:rPr b="1" lang="en-US" sz="1300" spc="-1" strike="noStrike">
+                <a:solidFill>
+                  <a:srgbClr val="e8a838"/>
+                </a:solidFill>
+                <a:latin typeface="Calibri"/>
+              </a:rPr>
+              <a:t>🎯  </a:t>
+            </a:r>
+            <a:r>
+              <a:rPr b="1" lang="en-US" sz="1300" spc="-1" strike="noStrike">
+                <a:solidFill>
+                  <a:srgbClr val="e8a838"/>
+                </a:solidFill>
+                <a:latin typeface="Calibri"/>
+              </a:rPr>
+              <a:t>25% + 25%</a:t>
+            </a:r>
+            <a:endParaRPr b="0" lang="en-US" sz="1300" spc="-1" strike="noStrike">
+              <a:solidFill>
+                <a:srgbClr val="000000"/>
+              </a:solidFill>
+              <a:latin typeface="Arial"/>
+            </a:endParaRPr>
+          </a:p>
+        </p:txBody>
+      </p:sp>
+      <p:sp>
+        <p:nvSpPr>
+          <p:cNvPr id="767" name="TextBox 8"/>
+          <p:cNvSpPr/>
+          <p:nvPr/>
+        </p:nvSpPr>
+        <p:spPr>
+          <a:xfrm>
+            <a:off x="457200" y="2020680"/>
+            <a:ext cx="3291480" cy="272520"/>
           </a:xfrm>
           <a:prstGeom prst="rect">
             <a:avLst/>
@@ -35162,33 +35990,33 @@
               </a:lnSpc>
             </a:pPr>
             <a:r>
-              <a:rPr b="0" lang="en-US" sz="1000" spc="-1" strike="noStrike">
-                <a:solidFill>
-                  <a:srgbClr val="aaccff"/>
-                </a:solidFill>
-                <a:latin typeface="Calibri"/>
-              </a:rPr>
-              <a:t>React 18 · MUI · 4 страницы · progress bars · alert banners</a:t>
-            </a:r>
-            <a:endParaRPr b="0" lang="en-US" sz="1000" spc="-1" strike="noStrike">
-              <a:solidFill>
-                <a:srgbClr val="000000"/>
-              </a:solidFill>
-              <a:latin typeface="Arial"/>
-            </a:endParaRPr>
-          </a:p>
-        </p:txBody>
-      </p:sp>
-      <p:sp>
-        <p:nvSpPr>
-          <p:cNvPr id="763" name="TextBox 30"/>
-          <p:cNvSpPr/>
-          <p:nvPr/>
-        </p:nvSpPr>
-        <p:spPr>
-          <a:xfrm>
-            <a:off x="457200" y="6309360"/>
-            <a:ext cx="11274120" cy="272520"/>
+              <a:rPr b="1" lang="en-US" sz="1200" spc="-1" strike="noStrike">
+                <a:solidFill>
+                  <a:srgbClr val="ffffff"/>
+                </a:solidFill>
+                <a:latin typeface="Calibri"/>
+              </a:rPr>
+              <a:t>SMART-оценка + AI-генерация</a:t>
+            </a:r>
+            <a:endParaRPr b="0" lang="en-US" sz="1200" spc="-1" strike="noStrike">
+              <a:solidFill>
+                <a:srgbClr val="000000"/>
+              </a:solidFill>
+              <a:latin typeface="Arial"/>
+            </a:endParaRPr>
+          </a:p>
+        </p:txBody>
+      </p:sp>
+      <p:sp>
+        <p:nvSpPr>
+          <p:cNvPr id="768" name="TextBox 9"/>
+          <p:cNvSpPr/>
+          <p:nvPr/>
+        </p:nvSpPr>
+        <p:spPr>
+          <a:xfrm>
+            <a:off x="457200" y="2386440"/>
+            <a:ext cx="3291480" cy="242280"/>
           </a:xfrm>
           <a:prstGeom prst="rect">
             <a:avLst/>
@@ -35209,39 +36037,157 @@
             <a:spAutoFit/>
           </a:bodyPr>
           <a:p>
+            <a:pPr defTabSz="457200">
+              <a:lnSpc>
+                <a:spcPct val="100000"/>
+              </a:lnSpc>
+            </a:pPr>
+            <a:r>
+              <a:rPr b="0" lang="en-US" sz="1000" spc="-1" strike="noStrike">
+                <a:solidFill>
+                  <a:srgbClr val="aaccff"/>
+                </a:solidFill>
+                <a:latin typeface="Calibri"/>
+              </a:rPr>
+              <a:t>Gemini Flash · 5 критериев · goal_type · strategic_alignment</a:t>
+            </a:r>
+            <a:endParaRPr b="0" lang="en-US" sz="1000" spc="-1" strike="noStrike">
+              <a:solidFill>
+                <a:srgbClr val="000000"/>
+              </a:solidFill>
+              <a:latin typeface="Arial"/>
+            </a:endParaRPr>
+          </a:p>
+        </p:txBody>
+      </p:sp>
+      <p:sp>
+        <p:nvSpPr>
+          <p:cNvPr id="769" name="Rectangle 10"/>
+          <p:cNvSpPr/>
+          <p:nvPr/>
+        </p:nvSpPr>
+        <p:spPr>
+          <a:xfrm>
+            <a:off x="4160520" y="1508760"/>
+            <a:ext cx="3565800" cy="1691280"/>
+          </a:xfrm>
+          <a:prstGeom prst="rect">
+            <a:avLst/>
+          </a:prstGeom>
+          <a:solidFill>
+            <a:srgbClr val="0d1b3e"/>
+          </a:solidFill>
+          <a:ln>
+            <a:noFill/>
+          </a:ln>
+          <a:effectLst>
+            <a:outerShdw blurRad="39960" dir="5400000" dist="23040" rotWithShape="0">
+              <a:srgbClr val="000000">
+                <a:alpha val="35000"/>
+              </a:srgbClr>
+            </a:outerShdw>
+          </a:effectLst>
+        </p:spPr>
+        <p:style>
+          <a:lnRef idx="1">
+            <a:schemeClr val="accent1"/>
+          </a:lnRef>
+          <a:fillRef idx="3">
+            <a:schemeClr val="accent1"/>
+          </a:fillRef>
+          <a:effectRef idx="2">
+            <a:schemeClr val="accent1"/>
+          </a:effectRef>
+          <a:fontRef idx="minor"/>
+        </p:style>
+        <p:txBody>
+          <a:bodyPr lIns="90000" rIns="90000" tIns="45000" bIns="45000" anchor="ctr">
+            <a:noAutofit/>
+          </a:bodyPr>
+          <a:p>
             <a:pPr algn="ctr" defTabSz="457200">
               <a:lnSpc>
                 <a:spcPct val="100000"/>
               </a:lnSpc>
             </a:pPr>
-            <a:r>
-              <a:rPr b="0" i="1" lang="en-US" sz="1200" spc="-1" strike="noStrike">
-                <a:solidFill>
-                  <a:srgbClr val="99bbee"/>
-                </a:solidFill>
-                <a:latin typeface="Calibri"/>
-              </a:rPr>
-              <a:t>Frontend: http://89.207.255.254:3000   ·   API: http://89.207.255.254:8001/docs</a:t>
-            </a:r>
-            <a:endParaRPr b="0" lang="en-US" sz="1200" spc="-1" strike="noStrike">
-              <a:solidFill>
-                <a:srgbClr val="000000"/>
-              </a:solidFill>
-              <a:latin typeface="Arial"/>
-            </a:endParaRPr>
-          </a:p>
-        </p:txBody>
-      </p:sp>
-      <p:sp>
-        <p:nvSpPr>
-          <p:cNvPr id="764" name="TextBox 31"/>
-          <p:cNvSpPr/>
-          <p:nvPr/>
-        </p:nvSpPr>
-        <p:spPr>
-          <a:xfrm>
-            <a:off x="11064240" y="6492240"/>
-            <a:ext cx="1005480" cy="242280"/>
+            <a:endParaRPr b="0" lang="en-US" sz="1800" spc="-1" strike="noStrike">
+              <a:solidFill>
+                <a:schemeClr val="lt1"/>
+              </a:solidFill>
+              <a:latin typeface="Calibri"/>
+            </a:endParaRPr>
+          </a:p>
+        </p:txBody>
+      </p:sp>
+      <p:sp>
+        <p:nvSpPr>
+          <p:cNvPr id="770" name="Rectangle 11"/>
+          <p:cNvSpPr/>
+          <p:nvPr/>
+        </p:nvSpPr>
+        <p:spPr>
+          <a:xfrm>
+            <a:off x="4160520" y="1508760"/>
+            <a:ext cx="3565800" cy="72720"/>
+          </a:xfrm>
+          <a:prstGeom prst="rect">
+            <a:avLst/>
+          </a:prstGeom>
+          <a:solidFill>
+            <a:srgbClr val="e8a838"/>
+          </a:solidFill>
+          <a:ln>
+            <a:noFill/>
+          </a:ln>
+          <a:effectLst>
+            <a:outerShdw blurRad="39960" dir="5400000" dist="23040" rotWithShape="0">
+              <a:srgbClr val="000000">
+                <a:alpha val="35000"/>
+              </a:srgbClr>
+            </a:outerShdw>
+          </a:effectLst>
+        </p:spPr>
+        <p:style>
+          <a:lnRef idx="1">
+            <a:schemeClr val="accent1"/>
+          </a:lnRef>
+          <a:fillRef idx="3">
+            <a:schemeClr val="accent1"/>
+          </a:fillRef>
+          <a:effectRef idx="2">
+            <a:schemeClr val="accent1"/>
+          </a:effectRef>
+          <a:fontRef idx="minor"/>
+        </p:style>
+        <p:txBody>
+          <a:bodyPr lIns="90000" rIns="90000" tIns="28080" bIns="28080" anchor="ctr">
+            <a:noAutofit/>
+          </a:bodyPr>
+          <a:p>
+            <a:pPr algn="ctr" defTabSz="457200">
+              <a:lnSpc>
+                <a:spcPct val="100000"/>
+              </a:lnSpc>
+            </a:pPr>
+            <a:endParaRPr b="0" lang="en-US" sz="1800" spc="-1" strike="noStrike">
+              <a:solidFill>
+                <a:schemeClr val="lt1"/>
+              </a:solidFill>
+              <a:latin typeface="Calibri"/>
+            </a:endParaRPr>
+          </a:p>
+        </p:txBody>
+      </p:sp>
+      <p:sp>
+        <p:nvSpPr>
+          <p:cNvPr id="771" name="TextBox 12"/>
+          <p:cNvSpPr/>
+          <p:nvPr/>
+        </p:nvSpPr>
+        <p:spPr>
+          <a:xfrm>
+            <a:off x="4297680" y="1645920"/>
+            <a:ext cx="3291480" cy="288000"/>
           </a:xfrm>
           <a:prstGeom prst="rect">
             <a:avLst/>
@@ -35262,6 +36208,1085 @@
             <a:spAutoFit/>
           </a:bodyPr>
           <a:p>
+            <a:pPr defTabSz="457200">
+              <a:lnSpc>
+                <a:spcPct val="100000"/>
+              </a:lnSpc>
+            </a:pPr>
+            <a:r>
+              <a:rPr b="1" lang="en-US" sz="1300" spc="-1" strike="noStrike">
+                <a:solidFill>
+                  <a:srgbClr val="e8a838"/>
+                </a:solidFill>
+                <a:latin typeface="Calibri"/>
+              </a:rPr>
+              <a:t>🔍  </a:t>
+            </a:r>
+            <a:r>
+              <a:rPr b="1" lang="en-US" sz="1300" spc="-1" strike="noStrike">
+                <a:solidFill>
+                  <a:srgbClr val="e8a838"/>
+                </a:solidFill>
+                <a:latin typeface="Calibri"/>
+              </a:rPr>
+              <a:t>15%</a:t>
+            </a:r>
+            <a:endParaRPr b="0" lang="en-US" sz="1300" spc="-1" strike="noStrike">
+              <a:solidFill>
+                <a:srgbClr val="000000"/>
+              </a:solidFill>
+              <a:latin typeface="Arial"/>
+            </a:endParaRPr>
+          </a:p>
+        </p:txBody>
+      </p:sp>
+      <p:sp>
+        <p:nvSpPr>
+          <p:cNvPr id="772" name="TextBox 13"/>
+          <p:cNvSpPr/>
+          <p:nvPr/>
+        </p:nvSpPr>
+        <p:spPr>
+          <a:xfrm>
+            <a:off x="4297680" y="2020680"/>
+            <a:ext cx="3291480" cy="272520"/>
+          </a:xfrm>
+          <a:prstGeom prst="rect">
+            <a:avLst/>
+          </a:prstGeom>
+          <a:noFill/>
+          <a:ln w="0">
+            <a:noFill/>
+          </a:ln>
+        </p:spPr>
+        <p:style>
+          <a:lnRef idx="0"/>
+          <a:fillRef idx="0"/>
+          <a:effectRef idx="0"/>
+          <a:fontRef idx="minor"/>
+        </p:style>
+        <p:txBody>
+          <a:bodyPr lIns="90000" rIns="90000" tIns="45000" bIns="45000" anchor="t">
+            <a:spAutoFit/>
+          </a:bodyPr>
+          <a:p>
+            <a:pPr defTabSz="457200">
+              <a:lnSpc>
+                <a:spcPct val="100000"/>
+              </a:lnSpc>
+            </a:pPr>
+            <a:r>
+              <a:rPr b="1" lang="en-US" sz="1200" spc="-1" strike="noStrike">
+                <a:solidFill>
+                  <a:srgbClr val="ffffff"/>
+                </a:solidFill>
+                <a:latin typeface="Calibri"/>
+              </a:rPr>
+              <a:t>RAG-пайплайн</a:t>
+            </a:r>
+            <a:endParaRPr b="0" lang="en-US" sz="1200" spc="-1" strike="noStrike">
+              <a:solidFill>
+                <a:srgbClr val="000000"/>
+              </a:solidFill>
+              <a:latin typeface="Arial"/>
+            </a:endParaRPr>
+          </a:p>
+        </p:txBody>
+      </p:sp>
+      <p:sp>
+        <p:nvSpPr>
+          <p:cNvPr id="773" name="TextBox 14"/>
+          <p:cNvSpPr/>
+          <p:nvPr/>
+        </p:nvSpPr>
+        <p:spPr>
+          <a:xfrm>
+            <a:off x="4297680" y="2386440"/>
+            <a:ext cx="3291480" cy="242280"/>
+          </a:xfrm>
+          <a:prstGeom prst="rect">
+            <a:avLst/>
+          </a:prstGeom>
+          <a:noFill/>
+          <a:ln w="0">
+            <a:noFill/>
+          </a:ln>
+        </p:spPr>
+        <p:style>
+          <a:lnRef idx="0"/>
+          <a:fillRef idx="0"/>
+          <a:effectRef idx="0"/>
+          <a:fontRef idx="minor"/>
+        </p:style>
+        <p:txBody>
+          <a:bodyPr lIns="90000" rIns="90000" tIns="45000" bIns="45000" anchor="t">
+            <a:spAutoFit/>
+          </a:bodyPr>
+          <a:p>
+            <a:pPr defTabSz="457200">
+              <a:lnSpc>
+                <a:spcPct val="100000"/>
+              </a:lnSpc>
+            </a:pPr>
+            <a:r>
+              <a:rPr b="0" lang="en-US" sz="1000" spc="-1" strike="noStrike">
+                <a:solidFill>
+                  <a:srgbClr val="aaccff"/>
+                </a:solidFill>
+                <a:latin typeface="Calibri"/>
+              </a:rPr>
+              <a:t>Qdrant · 160 ВНД · 412 чанков · cosine · source grounding</a:t>
+            </a:r>
+            <a:endParaRPr b="0" lang="en-US" sz="1000" spc="-1" strike="noStrike">
+              <a:solidFill>
+                <a:srgbClr val="000000"/>
+              </a:solidFill>
+              <a:latin typeface="Arial"/>
+            </a:endParaRPr>
+          </a:p>
+        </p:txBody>
+      </p:sp>
+      <p:sp>
+        <p:nvSpPr>
+          <p:cNvPr id="774" name="Rectangle 15"/>
+          <p:cNvSpPr/>
+          <p:nvPr/>
+        </p:nvSpPr>
+        <p:spPr>
+          <a:xfrm>
+            <a:off x="8001000" y="1508760"/>
+            <a:ext cx="3565800" cy="1691280"/>
+          </a:xfrm>
+          <a:prstGeom prst="rect">
+            <a:avLst/>
+          </a:prstGeom>
+          <a:solidFill>
+            <a:srgbClr val="0d1b3e"/>
+          </a:solidFill>
+          <a:ln>
+            <a:noFill/>
+          </a:ln>
+          <a:effectLst>
+            <a:outerShdw blurRad="39960" dir="5400000" dist="23040" rotWithShape="0">
+              <a:srgbClr val="000000">
+                <a:alpha val="35000"/>
+              </a:srgbClr>
+            </a:outerShdw>
+          </a:effectLst>
+        </p:spPr>
+        <p:style>
+          <a:lnRef idx="1">
+            <a:schemeClr val="accent1"/>
+          </a:lnRef>
+          <a:fillRef idx="3">
+            <a:schemeClr val="accent1"/>
+          </a:fillRef>
+          <a:effectRef idx="2">
+            <a:schemeClr val="accent1"/>
+          </a:effectRef>
+          <a:fontRef idx="minor"/>
+        </p:style>
+        <p:txBody>
+          <a:bodyPr lIns="90000" rIns="90000" tIns="45000" bIns="45000" anchor="ctr">
+            <a:noAutofit/>
+          </a:bodyPr>
+          <a:p>
+            <a:pPr algn="ctr" defTabSz="457200">
+              <a:lnSpc>
+                <a:spcPct val="100000"/>
+              </a:lnSpc>
+            </a:pPr>
+            <a:endParaRPr b="0" lang="en-US" sz="1800" spc="-1" strike="noStrike">
+              <a:solidFill>
+                <a:schemeClr val="lt1"/>
+              </a:solidFill>
+              <a:latin typeface="Calibri"/>
+            </a:endParaRPr>
+          </a:p>
+        </p:txBody>
+      </p:sp>
+      <p:sp>
+        <p:nvSpPr>
+          <p:cNvPr id="775" name="Rectangle 16"/>
+          <p:cNvSpPr/>
+          <p:nvPr/>
+        </p:nvSpPr>
+        <p:spPr>
+          <a:xfrm>
+            <a:off x="8001000" y="1508760"/>
+            <a:ext cx="3565800" cy="72720"/>
+          </a:xfrm>
+          <a:prstGeom prst="rect">
+            <a:avLst/>
+          </a:prstGeom>
+          <a:solidFill>
+            <a:srgbClr val="e8a838"/>
+          </a:solidFill>
+          <a:ln>
+            <a:noFill/>
+          </a:ln>
+          <a:effectLst>
+            <a:outerShdw blurRad="39960" dir="5400000" dist="23040" rotWithShape="0">
+              <a:srgbClr val="000000">
+                <a:alpha val="35000"/>
+              </a:srgbClr>
+            </a:outerShdw>
+          </a:effectLst>
+        </p:spPr>
+        <p:style>
+          <a:lnRef idx="1">
+            <a:schemeClr val="accent1"/>
+          </a:lnRef>
+          <a:fillRef idx="3">
+            <a:schemeClr val="accent1"/>
+          </a:fillRef>
+          <a:effectRef idx="2">
+            <a:schemeClr val="accent1"/>
+          </a:effectRef>
+          <a:fontRef idx="minor"/>
+        </p:style>
+        <p:txBody>
+          <a:bodyPr lIns="90000" rIns="90000" tIns="28080" bIns="28080" anchor="ctr">
+            <a:noAutofit/>
+          </a:bodyPr>
+          <a:p>
+            <a:pPr algn="ctr" defTabSz="457200">
+              <a:lnSpc>
+                <a:spcPct val="100000"/>
+              </a:lnSpc>
+            </a:pPr>
+            <a:endParaRPr b="0" lang="en-US" sz="1800" spc="-1" strike="noStrike">
+              <a:solidFill>
+                <a:schemeClr val="lt1"/>
+              </a:solidFill>
+              <a:latin typeface="Calibri"/>
+            </a:endParaRPr>
+          </a:p>
+        </p:txBody>
+      </p:sp>
+      <p:sp>
+        <p:nvSpPr>
+          <p:cNvPr id="776" name="TextBox 17"/>
+          <p:cNvSpPr/>
+          <p:nvPr/>
+        </p:nvSpPr>
+        <p:spPr>
+          <a:xfrm>
+            <a:off x="8138160" y="1645920"/>
+            <a:ext cx="3291480" cy="288000"/>
+          </a:xfrm>
+          <a:prstGeom prst="rect">
+            <a:avLst/>
+          </a:prstGeom>
+          <a:noFill/>
+          <a:ln w="0">
+            <a:noFill/>
+          </a:ln>
+        </p:spPr>
+        <p:style>
+          <a:lnRef idx="0"/>
+          <a:fillRef idx="0"/>
+          <a:effectRef idx="0"/>
+          <a:fontRef idx="minor"/>
+        </p:style>
+        <p:txBody>
+          <a:bodyPr lIns="90000" rIns="90000" tIns="45000" bIns="45000" anchor="t">
+            <a:spAutoFit/>
+          </a:bodyPr>
+          <a:p>
+            <a:pPr defTabSz="457200">
+              <a:lnSpc>
+                <a:spcPct val="100000"/>
+              </a:lnSpc>
+            </a:pPr>
+            <a:r>
+              <a:rPr b="1" lang="en-US" sz="1300" spc="-1" strike="noStrike">
+                <a:solidFill>
+                  <a:srgbClr val="e8a838"/>
+                </a:solidFill>
+                <a:latin typeface="Calibri"/>
+              </a:rPr>
+              <a:t>📊  </a:t>
+            </a:r>
+            <a:r>
+              <a:rPr b="1" lang="en-US" sz="1300" spc="-1" strike="noStrike">
+                <a:solidFill>
+                  <a:srgbClr val="e8a838"/>
+                </a:solidFill>
+                <a:latin typeface="Calibri"/>
+              </a:rPr>
+              <a:t>10%</a:t>
+            </a:r>
+            <a:endParaRPr b="0" lang="en-US" sz="1300" spc="-1" strike="noStrike">
+              <a:solidFill>
+                <a:srgbClr val="000000"/>
+              </a:solidFill>
+              <a:latin typeface="Arial"/>
+            </a:endParaRPr>
+          </a:p>
+        </p:txBody>
+      </p:sp>
+      <p:sp>
+        <p:nvSpPr>
+          <p:cNvPr id="777" name="TextBox 18"/>
+          <p:cNvSpPr/>
+          <p:nvPr/>
+        </p:nvSpPr>
+        <p:spPr>
+          <a:xfrm>
+            <a:off x="8138160" y="2020680"/>
+            <a:ext cx="3291480" cy="272520"/>
+          </a:xfrm>
+          <a:prstGeom prst="rect">
+            <a:avLst/>
+          </a:prstGeom>
+          <a:noFill/>
+          <a:ln w="0">
+            <a:noFill/>
+          </a:ln>
+        </p:spPr>
+        <p:style>
+          <a:lnRef idx="0"/>
+          <a:fillRef idx="0"/>
+          <a:effectRef idx="0"/>
+          <a:fontRef idx="minor"/>
+        </p:style>
+        <p:txBody>
+          <a:bodyPr lIns="90000" rIns="90000" tIns="45000" bIns="45000" anchor="t">
+            <a:spAutoFit/>
+          </a:bodyPr>
+          <a:p>
+            <a:pPr defTabSz="457200">
+              <a:lnSpc>
+                <a:spcPct val="100000"/>
+              </a:lnSpc>
+            </a:pPr>
+            <a:r>
+              <a:rPr b="1" lang="en-US" sz="1200" spc="-1" strike="noStrike">
+                <a:solidFill>
+                  <a:srgbClr val="ffffff"/>
+                </a:solidFill>
+                <a:latin typeface="Calibri"/>
+              </a:rPr>
+              <a:t>Аналитика и дашборд</a:t>
+            </a:r>
+            <a:endParaRPr b="0" lang="en-US" sz="1200" spc="-1" strike="noStrike">
+              <a:solidFill>
+                <a:srgbClr val="000000"/>
+              </a:solidFill>
+              <a:latin typeface="Arial"/>
+            </a:endParaRPr>
+          </a:p>
+        </p:txBody>
+      </p:sp>
+      <p:sp>
+        <p:nvSpPr>
+          <p:cNvPr id="778" name="TextBox 19"/>
+          <p:cNvSpPr/>
+          <p:nvPr/>
+        </p:nvSpPr>
+        <p:spPr>
+          <a:xfrm>
+            <a:off x="8138160" y="2386440"/>
+            <a:ext cx="3291480" cy="242280"/>
+          </a:xfrm>
+          <a:prstGeom prst="rect">
+            <a:avLst/>
+          </a:prstGeom>
+          <a:noFill/>
+          <a:ln w="0">
+            <a:noFill/>
+          </a:ln>
+        </p:spPr>
+        <p:style>
+          <a:lnRef idx="0"/>
+          <a:fillRef idx="0"/>
+          <a:effectRef idx="0"/>
+          <a:fontRef idx="minor"/>
+        </p:style>
+        <p:txBody>
+          <a:bodyPr lIns="90000" rIns="90000" tIns="45000" bIns="45000" anchor="t">
+            <a:spAutoFit/>
+          </a:bodyPr>
+          <a:p>
+            <a:pPr defTabSz="457200">
+              <a:lnSpc>
+                <a:spcPct val="100000"/>
+              </a:lnSpc>
+            </a:pPr>
+            <a:r>
+              <a:rPr b="0" lang="en-US" sz="1000" spc="-1" strike="noStrike">
+                <a:solidFill>
+                  <a:srgbClr val="aaccff"/>
+                </a:solidFill>
+                <a:latin typeface="Calibri"/>
+              </a:rPr>
+              <a:t>Dept quality · quarterly trend · maturity F-22 · radar chart</a:t>
+            </a:r>
+            <a:endParaRPr b="0" lang="en-US" sz="1000" spc="-1" strike="noStrike">
+              <a:solidFill>
+                <a:srgbClr val="000000"/>
+              </a:solidFill>
+              <a:latin typeface="Arial"/>
+            </a:endParaRPr>
+          </a:p>
+        </p:txBody>
+      </p:sp>
+      <p:sp>
+        <p:nvSpPr>
+          <p:cNvPr id="779" name="Rectangle 20"/>
+          <p:cNvSpPr/>
+          <p:nvPr/>
+        </p:nvSpPr>
+        <p:spPr>
+          <a:xfrm>
+            <a:off x="320040" y="3429000"/>
+            <a:ext cx="3565800" cy="1691280"/>
+          </a:xfrm>
+          <a:prstGeom prst="rect">
+            <a:avLst/>
+          </a:prstGeom>
+          <a:solidFill>
+            <a:srgbClr val="0d1b3e"/>
+          </a:solidFill>
+          <a:ln>
+            <a:noFill/>
+          </a:ln>
+          <a:effectLst>
+            <a:outerShdw blurRad="39960" dir="5400000" dist="23040" rotWithShape="0">
+              <a:srgbClr val="000000">
+                <a:alpha val="35000"/>
+              </a:srgbClr>
+            </a:outerShdw>
+          </a:effectLst>
+        </p:spPr>
+        <p:style>
+          <a:lnRef idx="1">
+            <a:schemeClr val="accent1"/>
+          </a:lnRef>
+          <a:fillRef idx="3">
+            <a:schemeClr val="accent1"/>
+          </a:fillRef>
+          <a:effectRef idx="2">
+            <a:schemeClr val="accent1"/>
+          </a:effectRef>
+          <a:fontRef idx="minor"/>
+        </p:style>
+        <p:txBody>
+          <a:bodyPr lIns="90000" rIns="90000" tIns="45000" bIns="45000" anchor="ctr">
+            <a:noAutofit/>
+          </a:bodyPr>
+          <a:p>
+            <a:pPr algn="ctr" defTabSz="457200">
+              <a:lnSpc>
+                <a:spcPct val="100000"/>
+              </a:lnSpc>
+            </a:pPr>
+            <a:endParaRPr b="0" lang="en-US" sz="1800" spc="-1" strike="noStrike">
+              <a:solidFill>
+                <a:schemeClr val="lt1"/>
+              </a:solidFill>
+              <a:latin typeface="Calibri"/>
+            </a:endParaRPr>
+          </a:p>
+        </p:txBody>
+      </p:sp>
+      <p:sp>
+        <p:nvSpPr>
+          <p:cNvPr id="780" name="Rectangle 21"/>
+          <p:cNvSpPr/>
+          <p:nvPr/>
+        </p:nvSpPr>
+        <p:spPr>
+          <a:xfrm>
+            <a:off x="320040" y="3429000"/>
+            <a:ext cx="3565800" cy="72720"/>
+          </a:xfrm>
+          <a:prstGeom prst="rect">
+            <a:avLst/>
+          </a:prstGeom>
+          <a:solidFill>
+            <a:srgbClr val="e8a838"/>
+          </a:solidFill>
+          <a:ln>
+            <a:noFill/>
+          </a:ln>
+          <a:effectLst>
+            <a:outerShdw blurRad="39960" dir="5400000" dist="23040" rotWithShape="0">
+              <a:srgbClr val="000000">
+                <a:alpha val="35000"/>
+              </a:srgbClr>
+            </a:outerShdw>
+          </a:effectLst>
+        </p:spPr>
+        <p:style>
+          <a:lnRef idx="1">
+            <a:schemeClr val="accent1"/>
+          </a:lnRef>
+          <a:fillRef idx="3">
+            <a:schemeClr val="accent1"/>
+          </a:fillRef>
+          <a:effectRef idx="2">
+            <a:schemeClr val="accent1"/>
+          </a:effectRef>
+          <a:fontRef idx="minor"/>
+        </p:style>
+        <p:txBody>
+          <a:bodyPr lIns="90000" rIns="90000" tIns="28080" bIns="28080" anchor="ctr">
+            <a:noAutofit/>
+          </a:bodyPr>
+          <a:p>
+            <a:pPr algn="ctr" defTabSz="457200">
+              <a:lnSpc>
+                <a:spcPct val="100000"/>
+              </a:lnSpc>
+            </a:pPr>
+            <a:endParaRPr b="0" lang="en-US" sz="1800" spc="-1" strike="noStrike">
+              <a:solidFill>
+                <a:schemeClr val="lt1"/>
+              </a:solidFill>
+              <a:latin typeface="Calibri"/>
+            </a:endParaRPr>
+          </a:p>
+        </p:txBody>
+      </p:sp>
+      <p:sp>
+        <p:nvSpPr>
+          <p:cNvPr id="781" name="TextBox 22"/>
+          <p:cNvSpPr/>
+          <p:nvPr/>
+        </p:nvSpPr>
+        <p:spPr>
+          <a:xfrm>
+            <a:off x="457200" y="3566160"/>
+            <a:ext cx="3291480" cy="288000"/>
+          </a:xfrm>
+          <a:prstGeom prst="rect">
+            <a:avLst/>
+          </a:prstGeom>
+          <a:noFill/>
+          <a:ln w="0">
+            <a:noFill/>
+          </a:ln>
+        </p:spPr>
+        <p:style>
+          <a:lnRef idx="0"/>
+          <a:fillRef idx="0"/>
+          <a:effectRef idx="0"/>
+          <a:fontRef idx="minor"/>
+        </p:style>
+        <p:txBody>
+          <a:bodyPr lIns="90000" rIns="90000" tIns="45000" bIns="45000" anchor="t">
+            <a:spAutoFit/>
+          </a:bodyPr>
+          <a:p>
+            <a:pPr defTabSz="457200">
+              <a:lnSpc>
+                <a:spcPct val="100000"/>
+              </a:lnSpc>
+            </a:pPr>
+            <a:r>
+              <a:rPr b="1" lang="en-US" sz="1300" spc="-1" strike="noStrike">
+                <a:solidFill>
+                  <a:srgbClr val="e8a838"/>
+                </a:solidFill>
+                <a:latin typeface="Calibri"/>
+              </a:rPr>
+              <a:t>⚙️  </a:t>
+            </a:r>
+            <a:r>
+              <a:rPr b="1" lang="en-US" sz="1300" spc="-1" strike="noStrike">
+                <a:solidFill>
+                  <a:srgbClr val="e8a838"/>
+                </a:solidFill>
+                <a:latin typeface="Calibri"/>
+              </a:rPr>
+              <a:t>10%</a:t>
+            </a:r>
+            <a:endParaRPr b="0" lang="en-US" sz="1300" spc="-1" strike="noStrike">
+              <a:solidFill>
+                <a:srgbClr val="000000"/>
+              </a:solidFill>
+              <a:latin typeface="Arial"/>
+            </a:endParaRPr>
+          </a:p>
+        </p:txBody>
+      </p:sp>
+      <p:sp>
+        <p:nvSpPr>
+          <p:cNvPr id="782" name="TextBox 23"/>
+          <p:cNvSpPr/>
+          <p:nvPr/>
+        </p:nvSpPr>
+        <p:spPr>
+          <a:xfrm>
+            <a:off x="457200" y="3940920"/>
+            <a:ext cx="3291480" cy="272520"/>
+          </a:xfrm>
+          <a:prstGeom prst="rect">
+            <a:avLst/>
+          </a:prstGeom>
+          <a:noFill/>
+          <a:ln w="0">
+            <a:noFill/>
+          </a:ln>
+        </p:spPr>
+        <p:style>
+          <a:lnRef idx="0"/>
+          <a:fillRef idx="0"/>
+          <a:effectRef idx="0"/>
+          <a:fontRef idx="minor"/>
+        </p:style>
+        <p:txBody>
+          <a:bodyPr lIns="90000" rIns="90000" tIns="45000" bIns="45000" anchor="t">
+            <a:spAutoFit/>
+          </a:bodyPr>
+          <a:p>
+            <a:pPr defTabSz="457200">
+              <a:lnSpc>
+                <a:spcPct val="100000"/>
+              </a:lnSpc>
+            </a:pPr>
+            <a:r>
+              <a:rPr b="1" lang="en-US" sz="1200" spc="-1" strike="noStrike">
+                <a:solidFill>
+                  <a:srgbClr val="ffffff"/>
+                </a:solidFill>
+                <a:latin typeface="Calibri"/>
+              </a:rPr>
+              <a:t>Архитектура и API</a:t>
+            </a:r>
+            <a:endParaRPr b="0" lang="en-US" sz="1200" spc="-1" strike="noStrike">
+              <a:solidFill>
+                <a:srgbClr val="000000"/>
+              </a:solidFill>
+              <a:latin typeface="Arial"/>
+            </a:endParaRPr>
+          </a:p>
+        </p:txBody>
+      </p:sp>
+      <p:sp>
+        <p:nvSpPr>
+          <p:cNvPr id="783" name="TextBox 24"/>
+          <p:cNvSpPr/>
+          <p:nvPr/>
+        </p:nvSpPr>
+        <p:spPr>
+          <a:xfrm>
+            <a:off x="457200" y="4306680"/>
+            <a:ext cx="3291480" cy="394920"/>
+          </a:xfrm>
+          <a:prstGeom prst="rect">
+            <a:avLst/>
+          </a:prstGeom>
+          <a:noFill/>
+          <a:ln w="0">
+            <a:noFill/>
+          </a:ln>
+        </p:spPr>
+        <p:style>
+          <a:lnRef idx="0"/>
+          <a:fillRef idx="0"/>
+          <a:effectRef idx="0"/>
+          <a:fontRef idx="minor"/>
+        </p:style>
+        <p:txBody>
+          <a:bodyPr lIns="90000" rIns="90000" tIns="45000" bIns="45000" anchor="t">
+            <a:spAutoFit/>
+          </a:bodyPr>
+          <a:p>
+            <a:pPr defTabSz="457200">
+              <a:lnSpc>
+                <a:spcPct val="100000"/>
+              </a:lnSpc>
+            </a:pPr>
+            <a:r>
+              <a:rPr b="0" lang="en-US" sz="1000" spc="-1" strike="noStrike">
+                <a:solidFill>
+                  <a:srgbClr val="aaccff"/>
+                </a:solidFill>
+                <a:latin typeface="Calibri"/>
+              </a:rPr>
+              <a:t>FastAPI · OpenAPI /docs · Docker Compose · Alembic · Pydantic v2</a:t>
+            </a:r>
+            <a:endParaRPr b="0" lang="en-US" sz="1000" spc="-1" strike="noStrike">
+              <a:solidFill>
+                <a:srgbClr val="000000"/>
+              </a:solidFill>
+              <a:latin typeface="Arial"/>
+            </a:endParaRPr>
+          </a:p>
+        </p:txBody>
+      </p:sp>
+      <p:sp>
+        <p:nvSpPr>
+          <p:cNvPr id="784" name="Rectangle 25"/>
+          <p:cNvSpPr/>
+          <p:nvPr/>
+        </p:nvSpPr>
+        <p:spPr>
+          <a:xfrm>
+            <a:off x="4160520" y="3429000"/>
+            <a:ext cx="3565800" cy="1691280"/>
+          </a:xfrm>
+          <a:prstGeom prst="rect">
+            <a:avLst/>
+          </a:prstGeom>
+          <a:solidFill>
+            <a:srgbClr val="0d1b3e"/>
+          </a:solidFill>
+          <a:ln>
+            <a:noFill/>
+          </a:ln>
+          <a:effectLst>
+            <a:outerShdw blurRad="39960" dir="5400000" dist="23040" rotWithShape="0">
+              <a:srgbClr val="000000">
+                <a:alpha val="35000"/>
+              </a:srgbClr>
+            </a:outerShdw>
+          </a:effectLst>
+        </p:spPr>
+        <p:style>
+          <a:lnRef idx="1">
+            <a:schemeClr val="accent1"/>
+          </a:lnRef>
+          <a:fillRef idx="3">
+            <a:schemeClr val="accent1"/>
+          </a:fillRef>
+          <a:effectRef idx="2">
+            <a:schemeClr val="accent1"/>
+          </a:effectRef>
+          <a:fontRef idx="minor"/>
+        </p:style>
+        <p:txBody>
+          <a:bodyPr lIns="90000" rIns="90000" tIns="45000" bIns="45000" anchor="ctr">
+            <a:noAutofit/>
+          </a:bodyPr>
+          <a:p>
+            <a:pPr algn="ctr" defTabSz="457200">
+              <a:lnSpc>
+                <a:spcPct val="100000"/>
+              </a:lnSpc>
+            </a:pPr>
+            <a:endParaRPr b="0" lang="en-US" sz="1800" spc="-1" strike="noStrike">
+              <a:solidFill>
+                <a:schemeClr val="lt1"/>
+              </a:solidFill>
+              <a:latin typeface="Calibri"/>
+            </a:endParaRPr>
+          </a:p>
+        </p:txBody>
+      </p:sp>
+      <p:sp>
+        <p:nvSpPr>
+          <p:cNvPr id="785" name="Rectangle 26"/>
+          <p:cNvSpPr/>
+          <p:nvPr/>
+        </p:nvSpPr>
+        <p:spPr>
+          <a:xfrm>
+            <a:off x="4160520" y="3429000"/>
+            <a:ext cx="3565800" cy="72720"/>
+          </a:xfrm>
+          <a:prstGeom prst="rect">
+            <a:avLst/>
+          </a:prstGeom>
+          <a:solidFill>
+            <a:srgbClr val="e8a838"/>
+          </a:solidFill>
+          <a:ln>
+            <a:noFill/>
+          </a:ln>
+          <a:effectLst>
+            <a:outerShdw blurRad="39960" dir="5400000" dist="23040" rotWithShape="0">
+              <a:srgbClr val="000000">
+                <a:alpha val="35000"/>
+              </a:srgbClr>
+            </a:outerShdw>
+          </a:effectLst>
+        </p:spPr>
+        <p:style>
+          <a:lnRef idx="1">
+            <a:schemeClr val="accent1"/>
+          </a:lnRef>
+          <a:fillRef idx="3">
+            <a:schemeClr val="accent1"/>
+          </a:fillRef>
+          <a:effectRef idx="2">
+            <a:schemeClr val="accent1"/>
+          </a:effectRef>
+          <a:fontRef idx="minor"/>
+        </p:style>
+        <p:txBody>
+          <a:bodyPr lIns="90000" rIns="90000" tIns="28080" bIns="28080" anchor="ctr">
+            <a:noAutofit/>
+          </a:bodyPr>
+          <a:p>
+            <a:pPr algn="ctr" defTabSz="457200">
+              <a:lnSpc>
+                <a:spcPct val="100000"/>
+              </a:lnSpc>
+            </a:pPr>
+            <a:endParaRPr b="0" lang="en-US" sz="1800" spc="-1" strike="noStrike">
+              <a:solidFill>
+                <a:schemeClr val="lt1"/>
+              </a:solidFill>
+              <a:latin typeface="Calibri"/>
+            </a:endParaRPr>
+          </a:p>
+        </p:txBody>
+      </p:sp>
+      <p:sp>
+        <p:nvSpPr>
+          <p:cNvPr id="786" name="TextBox 27"/>
+          <p:cNvSpPr/>
+          <p:nvPr/>
+        </p:nvSpPr>
+        <p:spPr>
+          <a:xfrm>
+            <a:off x="4297680" y="3566160"/>
+            <a:ext cx="3291480" cy="288000"/>
+          </a:xfrm>
+          <a:prstGeom prst="rect">
+            <a:avLst/>
+          </a:prstGeom>
+          <a:noFill/>
+          <a:ln w="0">
+            <a:noFill/>
+          </a:ln>
+        </p:spPr>
+        <p:style>
+          <a:lnRef idx="0"/>
+          <a:fillRef idx="0"/>
+          <a:effectRef idx="0"/>
+          <a:fontRef idx="minor"/>
+        </p:style>
+        <p:txBody>
+          <a:bodyPr lIns="90000" rIns="90000" tIns="45000" bIns="45000" anchor="t">
+            <a:spAutoFit/>
+          </a:bodyPr>
+          <a:p>
+            <a:pPr defTabSz="457200">
+              <a:lnSpc>
+                <a:spcPct val="100000"/>
+              </a:lnSpc>
+            </a:pPr>
+            <a:r>
+              <a:rPr b="1" lang="en-US" sz="1300" spc="-1" strike="noStrike">
+                <a:solidFill>
+                  <a:srgbClr val="e8a838"/>
+                </a:solidFill>
+                <a:latin typeface="Calibri"/>
+              </a:rPr>
+              <a:t>💻  </a:t>
+            </a:r>
+            <a:r>
+              <a:rPr b="1" lang="en-US" sz="1300" spc="-1" strike="noStrike">
+                <a:solidFill>
+                  <a:srgbClr val="e8a838"/>
+                </a:solidFill>
+                <a:latin typeface="Calibri"/>
+              </a:rPr>
+              <a:t>15%</a:t>
+            </a:r>
+            <a:endParaRPr b="0" lang="en-US" sz="1300" spc="-1" strike="noStrike">
+              <a:solidFill>
+                <a:srgbClr val="000000"/>
+              </a:solidFill>
+              <a:latin typeface="Arial"/>
+            </a:endParaRPr>
+          </a:p>
+        </p:txBody>
+      </p:sp>
+      <p:sp>
+        <p:nvSpPr>
+          <p:cNvPr id="787" name="TextBox 28"/>
+          <p:cNvSpPr/>
+          <p:nvPr/>
+        </p:nvSpPr>
+        <p:spPr>
+          <a:xfrm>
+            <a:off x="4297680" y="3940920"/>
+            <a:ext cx="3291480" cy="272520"/>
+          </a:xfrm>
+          <a:prstGeom prst="rect">
+            <a:avLst/>
+          </a:prstGeom>
+          <a:noFill/>
+          <a:ln w="0">
+            <a:noFill/>
+          </a:ln>
+        </p:spPr>
+        <p:style>
+          <a:lnRef idx="0"/>
+          <a:fillRef idx="0"/>
+          <a:effectRef idx="0"/>
+          <a:fontRef idx="minor"/>
+        </p:style>
+        <p:txBody>
+          <a:bodyPr lIns="90000" rIns="90000" tIns="45000" bIns="45000" anchor="t">
+            <a:spAutoFit/>
+          </a:bodyPr>
+          <a:p>
+            <a:pPr defTabSz="457200">
+              <a:lnSpc>
+                <a:spcPct val="100000"/>
+              </a:lnSpc>
+            </a:pPr>
+            <a:r>
+              <a:rPr b="1" lang="en-US" sz="1200" spc="-1" strike="noStrike">
+                <a:solidFill>
+                  <a:srgbClr val="ffffff"/>
+                </a:solidFill>
+                <a:latin typeface="Calibri"/>
+              </a:rPr>
+              <a:t>UX интерфейса</a:t>
+            </a:r>
+            <a:endParaRPr b="0" lang="en-US" sz="1200" spc="-1" strike="noStrike">
+              <a:solidFill>
+                <a:srgbClr val="000000"/>
+              </a:solidFill>
+              <a:latin typeface="Arial"/>
+            </a:endParaRPr>
+          </a:p>
+        </p:txBody>
+      </p:sp>
+      <p:sp>
+        <p:nvSpPr>
+          <p:cNvPr id="788" name="TextBox 29"/>
+          <p:cNvSpPr/>
+          <p:nvPr/>
+        </p:nvSpPr>
+        <p:spPr>
+          <a:xfrm>
+            <a:off x="4297680" y="4306680"/>
+            <a:ext cx="3291480" cy="242280"/>
+          </a:xfrm>
+          <a:prstGeom prst="rect">
+            <a:avLst/>
+          </a:prstGeom>
+          <a:noFill/>
+          <a:ln w="0">
+            <a:noFill/>
+          </a:ln>
+        </p:spPr>
+        <p:style>
+          <a:lnRef idx="0"/>
+          <a:fillRef idx="0"/>
+          <a:effectRef idx="0"/>
+          <a:fontRef idx="minor"/>
+        </p:style>
+        <p:txBody>
+          <a:bodyPr lIns="90000" rIns="90000" tIns="45000" bIns="45000" anchor="t">
+            <a:spAutoFit/>
+          </a:bodyPr>
+          <a:p>
+            <a:pPr defTabSz="457200">
+              <a:lnSpc>
+                <a:spcPct val="100000"/>
+              </a:lnSpc>
+            </a:pPr>
+            <a:r>
+              <a:rPr b="0" lang="en-US" sz="1000" spc="-1" strike="noStrike">
+                <a:solidFill>
+                  <a:srgbClr val="aaccff"/>
+                </a:solidFill>
+                <a:latin typeface="Calibri"/>
+              </a:rPr>
+              <a:t>React 18 · MUI · 6 страниц · progress bars · alert banners</a:t>
+            </a:r>
+            <a:endParaRPr b="0" lang="en-US" sz="1000" spc="-1" strike="noStrike">
+              <a:solidFill>
+                <a:srgbClr val="000000"/>
+              </a:solidFill>
+              <a:latin typeface="Arial"/>
+            </a:endParaRPr>
+          </a:p>
+        </p:txBody>
+      </p:sp>
+      <p:sp>
+        <p:nvSpPr>
+          <p:cNvPr id="789" name="TextBox 30"/>
+          <p:cNvSpPr/>
+          <p:nvPr/>
+        </p:nvSpPr>
+        <p:spPr>
+          <a:xfrm>
+            <a:off x="457200" y="6309360"/>
+            <a:ext cx="11274120" cy="272520"/>
+          </a:xfrm>
+          <a:prstGeom prst="rect">
+            <a:avLst/>
+          </a:prstGeom>
+          <a:noFill/>
+          <a:ln w="0">
+            <a:noFill/>
+          </a:ln>
+        </p:spPr>
+        <p:style>
+          <a:lnRef idx="0"/>
+          <a:fillRef idx="0"/>
+          <a:effectRef idx="0"/>
+          <a:fontRef idx="minor"/>
+        </p:style>
+        <p:txBody>
+          <a:bodyPr lIns="90000" rIns="90000" tIns="45000" bIns="45000" anchor="t">
+            <a:spAutoFit/>
+          </a:bodyPr>
+          <a:p>
+            <a:pPr algn="ctr" defTabSz="457200">
+              <a:lnSpc>
+                <a:spcPct val="100000"/>
+              </a:lnSpc>
+            </a:pPr>
+            <a:r>
+              <a:rPr b="0" i="1" lang="en-US" sz="1200" spc="-1" strike="noStrike">
+                <a:solidFill>
+                  <a:srgbClr val="99bbee"/>
+                </a:solidFill>
+                <a:latin typeface="Calibri"/>
+              </a:rPr>
+              <a:t>Frontend: http://89.207.255.254:3000   ·   API: http://89.207.255.254:8001/docs</a:t>
+            </a:r>
+            <a:endParaRPr b="0" lang="en-US" sz="1200" spc="-1" strike="noStrike">
+              <a:solidFill>
+                <a:srgbClr val="000000"/>
+              </a:solidFill>
+              <a:latin typeface="Arial"/>
+            </a:endParaRPr>
+          </a:p>
+        </p:txBody>
+      </p:sp>
+      <p:sp>
+        <p:nvSpPr>
+          <p:cNvPr id="790" name="TextBox 31"/>
+          <p:cNvSpPr/>
+          <p:nvPr/>
+        </p:nvSpPr>
+        <p:spPr>
+          <a:xfrm>
+            <a:off x="11064240" y="6492240"/>
+            <a:ext cx="1005480" cy="242280"/>
+          </a:xfrm>
+          <a:prstGeom prst="rect">
+            <a:avLst/>
+          </a:prstGeom>
+          <a:noFill/>
+          <a:ln w="0">
+            <a:noFill/>
+          </a:ln>
+        </p:spPr>
+        <p:style>
+          <a:lnRef idx="0"/>
+          <a:fillRef idx="0"/>
+          <a:effectRef idx="0"/>
+          <a:fontRef idx="minor"/>
+        </p:style>
+        <p:txBody>
+          <a:bodyPr lIns="90000" rIns="90000" tIns="45000" bIns="45000" anchor="t">
+            <a:spAutoFit/>
+          </a:bodyPr>
+          <a:p>
             <a:pPr algn="r" defTabSz="457200">
               <a:lnSpc>
                 <a:spcPct val="100000"/>
@@ -35274,7 +37299,7 @@
                 </a:solidFill>
                 <a:latin typeface="Calibri"/>
               </a:rPr>
-              <a:t>20 / 20</a:t>
+              <a:t>21 / 21</a:t>
             </a:r>
             <a:endParaRPr b="0" lang="en-US" sz="1000" spc="-1" strike="noStrike">
               <a:solidFill>
@@ -37105,7 +39130,7 @@
                 </a:solidFill>
                 <a:latin typeface="Calibri"/>
               </a:rPr>
-              <a:t>3 / 20</a:t>
+              <a:t>3 / 21</a:t>
             </a:r>
             <a:endParaRPr b="0" lang="en-US" sz="1000" spc="-1" strike="noStrike">
               <a:solidFill>
@@ -39347,7 +41372,7 @@
                 </a:solidFill>
                 <a:latin typeface="Calibri"/>
               </a:rPr>
-              <a:t>4 / 20</a:t>
+              <a:t>4 / 21</a:t>
             </a:r>
             <a:endParaRPr b="0" lang="en-US" sz="1000" spc="-1" strike="noStrike">
               <a:solidFill>
@@ -42735,7 +44760,7 @@
                 </a:solidFill>
                 <a:latin typeface="Calibri"/>
               </a:rPr>
-              <a:t>5 / 20</a:t>
+              <a:t>5 / 21</a:t>
             </a:r>
             <a:endParaRPr b="0" lang="en-US" sz="1000" spc="-1" strike="noStrike">
               <a:solidFill>
@@ -44865,7 +46890,7 @@
                 </a:solidFill>
                 <a:latin typeface="Calibri"/>
               </a:rPr>
-              <a:t>6 / 20</a:t>
+              <a:t>6 / 21</a:t>
             </a:r>
             <a:endParaRPr b="0" lang="en-US" sz="1000" spc="-1" strike="noStrike">
               <a:solidFill>
@@ -45301,7 +47326,7 @@
                 </a:solidFill>
                 <a:latin typeface="Calibri"/>
               </a:rPr>
-              <a:t>7 / 20</a:t>
+              <a:t>7 / 21</a:t>
             </a:r>
             <a:endParaRPr b="0" lang="en-US" sz="1000" spc="-1" strike="noStrike">
               <a:solidFill>
@@ -46482,7 +48507,7 @@
                 </a:solidFill>
                 <a:latin typeface="Calibri"/>
               </a:rPr>
-              <a:t>8 / 20</a:t>
+              <a:t>8 / 21</a:t>
             </a:r>
             <a:endParaRPr b="0" lang="en-US" sz="1000" spc="-1" strike="noStrike">
               <a:solidFill>
@@ -47663,7 +49688,7 @@
                 </a:solidFill>
                 <a:latin typeface="Calibri"/>
               </a:rPr>
-              <a:t>9 / 20</a:t>
+              <a:t>9 / 21</a:t>
             </a:r>
             <a:endParaRPr b="0" lang="en-US" sz="1000" spc="-1" strike="noStrike">
               <a:solidFill>

--- a/KMG_HR_AI_Presentation.pptx
+++ b/KMG_HR_AI_Presentation.pptx
@@ -173,7 +173,7 @@
         <p:txBody>
           <a:bodyPr/>
           <a:p>
-            <a:fld id="{7EB4410C-A1D4-4AE5-AC0C-3B165A53350F}" type="slidenum">
+            <a:fld id="{2B8728EF-2CB7-4CB6-AB40-50D9271E9E19}" type="slidenum">
               <a:t>&lt;#&gt;</a:t>
             </a:fld>
           </a:p>
@@ -256,7 +256,7 @@
         <p:txBody>
           <a:bodyPr/>
           <a:p>
-            <a:fld id="{C6476016-0599-4ECB-AF71-3EA19216835D}" type="slidenum">
+            <a:fld id="{4D22CA58-463E-4FC4-BB1D-A5E9AFE9A51D}" type="slidenum">
               <a:t>&lt;#&gt;</a:t>
             </a:fld>
           </a:p>
@@ -339,7 +339,7 @@
         <p:txBody>
           <a:bodyPr/>
           <a:p>
-            <a:fld id="{3464F71B-DF94-4ED9-A56B-2FD9E8C74140}" type="slidenum">
+            <a:fld id="{AA815944-AD11-477E-81B2-510098D9D667}" type="slidenum">
               <a:t>&lt;#&gt;</a:t>
             </a:fld>
           </a:p>
@@ -422,7 +422,7 @@
         <p:txBody>
           <a:bodyPr/>
           <a:p>
-            <a:fld id="{D645B2AF-AC1B-443E-A5B8-59EBE4BDC2D3}" type="slidenum">
+            <a:fld id="{1E730B5F-8118-4E4A-9C6D-DCD3B59FDB65}" type="slidenum">
               <a:t>&lt;#&gt;</a:t>
             </a:fld>
           </a:p>
@@ -505,7 +505,7 @@
         <p:txBody>
           <a:bodyPr/>
           <a:p>
-            <a:fld id="{05DC4CFD-FE87-4FCF-A46C-DEEF2C2690B3}" type="slidenum">
+            <a:fld id="{6EF1D8BF-265E-45AC-AD31-04384FCA2C20}" type="slidenum">
               <a:t>&lt;#&gt;</a:t>
             </a:fld>
           </a:p>
@@ -671,7 +671,7 @@
         <p:txBody>
           <a:bodyPr/>
           <a:p>
-            <a:fld id="{61BC701A-7172-46FB-AD7B-BF83EA650216}" type="slidenum">
+            <a:fld id="{1A5AEC06-62D3-41AD-8031-E7A4592F09BF}" type="slidenum">
               <a:t>&lt;#&gt;</a:t>
             </a:fld>
           </a:p>
@@ -754,7 +754,7 @@
         <p:txBody>
           <a:bodyPr/>
           <a:p>
-            <a:fld id="{E1F5C319-8C9C-4BAC-BE46-7F8B0CBEAF58}" type="slidenum">
+            <a:fld id="{03F38F0B-D86C-4CC4-B427-DE79EF5D16B8}" type="slidenum">
               <a:t>&lt;#&gt;</a:t>
             </a:fld>
           </a:p>
@@ -963,7 +963,7 @@
         <p:txBody>
           <a:bodyPr/>
           <a:p>
-            <a:fld id="{3F636BAB-B28F-43B4-AFA0-E2475585C6B1}" type="slidenum">
+            <a:fld id="{A111435C-5440-4346-A551-1B4D4057A9EB}" type="slidenum">
               <a:t>&lt;#&gt;</a:t>
             </a:fld>
           </a:p>
@@ -1046,7 +1046,7 @@
         <p:txBody>
           <a:bodyPr/>
           <a:p>
-            <a:fld id="{CF454358-C7FA-4954-B43E-556FE6C94724}" type="slidenum">
+            <a:fld id="{2C9C3DE5-A20F-45CE-A080-7506DD44E54F}" type="slidenum">
               <a:t>&lt;#&gt;</a:t>
             </a:fld>
           </a:p>
@@ -1169,7 +1169,7 @@
         <p:txBody>
           <a:bodyPr/>
           <a:p>
-            <a:fld id="{E69E5165-FDBC-47FE-86FB-9CEF92150EBF}" type="slidenum">
+            <a:fld id="{F8B69902-FEA8-4ED3-AF88-2A1A2FBA2E36}" type="slidenum">
               <a:t>&lt;#&gt;</a:t>
             </a:fld>
           </a:p>
@@ -1252,7 +1252,7 @@
         <p:txBody>
           <a:bodyPr/>
           <a:p>
-            <a:fld id="{5038905A-E606-485A-B02E-577F51702D7D}" type="slidenum">
+            <a:fld id="{9AE40511-628D-47D9-B70A-C5CAC0421C58}" type="slidenum">
               <a:t>&lt;#&gt;</a:t>
             </a:fld>
           </a:p>
@@ -1349,232 +1349,7 @@
                 </a:solidFill>
                 <a:latin typeface="Calibri"/>
               </a:rPr>
-              <a:t>C</a:t>
-            </a:r>
-            <a:r>
-              <a:rPr b="0" lang="en-US" sz="4400" spc="-1" strike="noStrike">
-                <a:solidFill>
-                  <a:schemeClr val="dk1"/>
-                </a:solidFill>
-                <a:latin typeface="Calibri"/>
-              </a:rPr>
-              <a:t>li</a:t>
-            </a:r>
-            <a:r>
-              <a:rPr b="0" lang="en-US" sz="4400" spc="-1" strike="noStrike">
-                <a:solidFill>
-                  <a:schemeClr val="dk1"/>
-                </a:solidFill>
-                <a:latin typeface="Calibri"/>
-              </a:rPr>
-              <a:t>c</a:t>
-            </a:r>
-            <a:r>
-              <a:rPr b="0" lang="en-US" sz="4400" spc="-1" strike="noStrike">
-                <a:solidFill>
-                  <a:schemeClr val="dk1"/>
-                </a:solidFill>
-                <a:latin typeface="Calibri"/>
-              </a:rPr>
-              <a:t>k </a:t>
-            </a:r>
-            <a:r>
-              <a:rPr b="0" lang="en-US" sz="4400" spc="-1" strike="noStrike">
-                <a:solidFill>
-                  <a:schemeClr val="dk1"/>
-                </a:solidFill>
-                <a:latin typeface="Calibri"/>
-              </a:rPr>
-              <a:t>t</a:t>
-            </a:r>
-            <a:r>
-              <a:rPr b="0" lang="en-US" sz="4400" spc="-1" strike="noStrike">
-                <a:solidFill>
-                  <a:schemeClr val="dk1"/>
-                </a:solidFill>
-                <a:latin typeface="Calibri"/>
-              </a:rPr>
-              <a:t>o </a:t>
-            </a:r>
-            <a:r>
-              <a:rPr b="0" lang="en-US" sz="4400" spc="-1" strike="noStrike">
-                <a:solidFill>
-                  <a:schemeClr val="dk1"/>
-                </a:solidFill>
-                <a:latin typeface="Calibri"/>
-              </a:rPr>
-              <a:t>e</a:t>
-            </a:r>
-            <a:r>
-              <a:rPr b="0" lang="en-US" sz="4400" spc="-1" strike="noStrike">
-                <a:solidFill>
-                  <a:schemeClr val="dk1"/>
-                </a:solidFill>
-                <a:latin typeface="Calibri"/>
-              </a:rPr>
-              <a:t>d</a:t>
-            </a:r>
-            <a:r>
-              <a:rPr b="0" lang="en-US" sz="4400" spc="-1" strike="noStrike">
-                <a:solidFill>
-                  <a:schemeClr val="dk1"/>
-                </a:solidFill>
-                <a:latin typeface="Calibri"/>
-              </a:rPr>
-              <a:t>i</a:t>
-            </a:r>
-            <a:r>
-              <a:rPr b="0" lang="en-US" sz="4400" spc="-1" strike="noStrike">
-                <a:solidFill>
-                  <a:schemeClr val="dk1"/>
-                </a:solidFill>
-                <a:latin typeface="Calibri"/>
-              </a:rPr>
-              <a:t>t </a:t>
-            </a:r>
-            <a:r>
-              <a:rPr b="0" lang="en-US" sz="4400" spc="-1" strike="noStrike">
-                <a:solidFill>
-                  <a:schemeClr val="dk1"/>
-                </a:solidFill>
-                <a:latin typeface="Calibri"/>
-              </a:rPr>
-              <a:t>M</a:t>
-            </a:r>
-            <a:r>
-              <a:rPr b="0" lang="en-US" sz="4400" spc="-1" strike="noStrike">
-                <a:solidFill>
-                  <a:schemeClr val="dk1"/>
-                </a:solidFill>
-                <a:latin typeface="Calibri"/>
-              </a:rPr>
-              <a:t>a</a:t>
-            </a:r>
-            <a:r>
-              <a:rPr b="0" lang="en-US" sz="4400" spc="-1" strike="noStrike">
-                <a:solidFill>
-                  <a:schemeClr val="dk1"/>
-                </a:solidFill>
-                <a:latin typeface="Calibri"/>
-              </a:rPr>
-              <a:t>s</a:t>
-            </a:r>
-            <a:r>
-              <a:rPr b="0" lang="en-US" sz="4400" spc="-1" strike="noStrike">
-                <a:solidFill>
-                  <a:schemeClr val="dk1"/>
-                </a:solidFill>
-                <a:latin typeface="Calibri"/>
-              </a:rPr>
-              <a:t>t</a:t>
-            </a:r>
-            <a:r>
-              <a:rPr b="0" lang="en-US" sz="4400" spc="-1" strike="noStrike">
-                <a:solidFill>
-                  <a:schemeClr val="dk1"/>
-                </a:solidFill>
-                <a:latin typeface="Calibri"/>
-              </a:rPr>
-              <a:t>e</a:t>
-            </a:r>
-            <a:r>
-              <a:rPr b="0" lang="en-US" sz="4400" spc="-1" strike="noStrike">
-                <a:solidFill>
-                  <a:schemeClr val="dk1"/>
-                </a:solidFill>
-                <a:latin typeface="Calibri"/>
-              </a:rPr>
-              <a:t>r </a:t>
-            </a:r>
-            <a:r>
-              <a:rPr b="0" lang="en-US" sz="4400" spc="-1" strike="noStrike">
-                <a:solidFill>
-                  <a:schemeClr val="dk1"/>
-                </a:solidFill>
-                <a:latin typeface="Calibri"/>
-              </a:rPr>
-              <a:t>t</a:t>
-            </a:r>
-            <a:r>
-              <a:rPr b="0" lang="en-US" sz="4400" spc="-1" strike="noStrike">
-                <a:solidFill>
-                  <a:schemeClr val="dk1"/>
-                </a:solidFill>
-                <a:latin typeface="Calibri"/>
-              </a:rPr>
-              <a:t>i</a:t>
-            </a:r>
-            <a:r>
-              <a:rPr b="0" lang="en-US" sz="4400" spc="-1" strike="noStrike">
-                <a:solidFill>
-                  <a:schemeClr val="dk1"/>
-                </a:solidFill>
-                <a:latin typeface="Calibri"/>
-              </a:rPr>
-              <a:t>t</a:t>
-            </a:r>
-            <a:r>
-              <a:rPr b="0" lang="en-US" sz="4400" spc="-1" strike="noStrike">
-                <a:solidFill>
-                  <a:schemeClr val="dk1"/>
-                </a:solidFill>
-                <a:latin typeface="Calibri"/>
-              </a:rPr>
-              <a:t>l</a:t>
-            </a:r>
-            <a:r>
-              <a:rPr b="0" lang="en-US" sz="4400" spc="-1" strike="noStrike">
-                <a:solidFill>
-                  <a:schemeClr val="dk1"/>
-                </a:solidFill>
-                <a:latin typeface="Calibri"/>
-              </a:rPr>
-              <a:t>e </a:t>
-            </a:r>
-            <a:r>
-              <a:rPr b="0" lang="en-US" sz="4400" spc="-1" strike="noStrike">
-                <a:solidFill>
-                  <a:schemeClr val="dk1"/>
-                </a:solidFill>
-                <a:latin typeface="Calibri"/>
-              </a:rPr>
-              <a:t>s</a:t>
-            </a:r>
-            <a:r>
-              <a:rPr b="0" lang="en-US" sz="4400" spc="-1" strike="noStrike">
-                <a:solidFill>
-                  <a:schemeClr val="dk1"/>
-                </a:solidFill>
-                <a:latin typeface="Calibri"/>
-              </a:rPr>
-              <a:t>t</a:t>
-            </a:r>
-            <a:r>
-              <a:rPr b="0" lang="en-US" sz="4400" spc="-1" strike="noStrike">
-                <a:solidFill>
-                  <a:schemeClr val="dk1"/>
-                </a:solidFill>
-                <a:latin typeface="Calibri"/>
-              </a:rPr>
-              <a:t>y</a:t>
-            </a:r>
-            <a:r>
-              <a:rPr b="0" lang="en-US" sz="4400" spc="-1" strike="noStrike">
-                <a:solidFill>
-                  <a:schemeClr val="dk1"/>
-                </a:solidFill>
-                <a:latin typeface="Calibri"/>
-              </a:rPr>
-              <a:t>l</a:t>
-            </a:r>
-            <a:r>
-              <a:rPr b="0" lang="en-US" sz="4400" spc="-1" strike="noStrike">
-                <a:solidFill>
-                  <a:schemeClr val="dk1"/>
-                </a:solidFill>
-                <a:latin typeface="Calibri"/>
-              </a:rPr>
-              <a:t>e</a:t>
+              <a:t>Click to edit Master title style</a:t>
             </a:r>
             <a:endParaRPr b="0" lang="en-US" sz="4400" spc="-1" strike="noStrike">
               <a:solidFill>
@@ -1765,7 +1540,7 @@
               </a:lnSpc>
               <a:buNone/>
             </a:pPr>
-            <a:fld id="{8541B2D9-E45C-4DC4-8EA3-77EE141FAFC7}" type="slidenum">
+            <a:fld id="{1B358734-69EF-49FA-BCC0-E17FFFDF3C7E}" type="slidenum">
               <a:rPr b="0" lang="en-US" sz="1200" spc="-1" strike="noStrike">
                 <a:solidFill>
                   <a:schemeClr val="dk1">
@@ -2287,7 +2062,7 @@
               </a:lnSpc>
               <a:buNone/>
             </a:pPr>
-            <a:fld id="{5DF72B5A-7D58-4719-B851-7BF84A9ED76D}" type="slidenum">
+            <a:fld id="{A639500A-451B-4530-AF66-DD728221DF0D}" type="slidenum">
               <a:rPr b="0" lang="en-US" sz="1200" spc="-1" strike="noStrike">
                 <a:solidFill>
                   <a:schemeClr val="dk1">
@@ -2381,7 +2156,25 @@
                 </a:solidFill>
                 <a:latin typeface="Calibri"/>
               </a:rPr>
-              <a:t>Click to edit Master title style</a:t>
+              <a:t>Click to edit </a:t>
+            </a:r>
+            <a:r>
+              <a:rPr b="1" lang="en-US" sz="2000" spc="-1" strike="noStrike">
+                <a:solidFill>
+                  <a:schemeClr val="dk1"/>
+                </a:solidFill>
+                <a:latin typeface="Calibri"/>
+              </a:rPr>
+              <a:t>Master title </a:t>
+            </a:r>
+            <a:r>
+              <a:rPr b="1" lang="en-US" sz="2000" spc="-1" strike="noStrike">
+                <a:solidFill>
+                  <a:schemeClr val="dk1"/>
+                </a:solidFill>
+                <a:latin typeface="Calibri"/>
+              </a:rPr>
+              <a:t>style</a:t>
             </a:r>
             <a:endParaRPr b="0" lang="en-US" sz="2000" spc="-1" strike="noStrike">
               <a:solidFill>
@@ -2855,7 +2648,7 @@
               </a:lnSpc>
               <a:buNone/>
             </a:pPr>
-            <a:fld id="{B62BED88-68B4-42A9-9999-DC3BD0B206BD}" type="slidenum">
+            <a:fld id="{92445A89-9340-495A-B313-85C040D98121}" type="slidenum">
               <a:rPr b="0" lang="en-US" sz="1200" spc="-1" strike="noStrike">
                 <a:solidFill>
                   <a:schemeClr val="dk1">
@@ -2949,52 +2742,7 @@
                 </a:solidFill>
                 <a:latin typeface="Calibri"/>
               </a:rPr>
-              <a:t>Click </a:t>
-            </a:r>
-            <a:r>
-              <a:rPr b="0" lang="en-US" sz="4400" spc="-1" strike="noStrike">
-                <a:solidFill>
-                  <a:schemeClr val="dk1"/>
-                </a:solidFill>
-                <a:latin typeface="Calibri"/>
-              </a:rPr>
-              <a:t>to </a:t>
-            </a:r>
-            <a:r>
-              <a:rPr b="0" lang="en-US" sz="4400" spc="-1" strike="noStrike">
-                <a:solidFill>
-                  <a:schemeClr val="dk1"/>
-                </a:solidFill>
-                <a:latin typeface="Calibri"/>
-              </a:rPr>
-              <a:t>edit </a:t>
-            </a:r>
-            <a:r>
-              <a:rPr b="0" lang="en-US" sz="4400" spc="-1" strike="noStrike">
-                <a:solidFill>
-                  <a:schemeClr val="dk1"/>
-                </a:solidFill>
-                <a:latin typeface="Calibri"/>
-              </a:rPr>
-              <a:t>Maste</a:t>
-            </a:r>
-            <a:r>
-              <a:rPr b="0" lang="en-US" sz="4400" spc="-1" strike="noStrike">
-                <a:solidFill>
-                  <a:schemeClr val="dk1"/>
-                </a:solidFill>
-                <a:latin typeface="Calibri"/>
-              </a:rPr>
-              <a:t>r title </a:t>
-            </a:r>
-            <a:r>
-              <a:rPr b="0" lang="en-US" sz="4400" spc="-1" strike="noStrike">
-                <a:solidFill>
-                  <a:schemeClr val="dk1"/>
-                </a:solidFill>
-                <a:latin typeface="Calibri"/>
-              </a:rPr>
-              <a:t>style</a:t>
+              <a:t>Click to edit Master title style</a:t>
             </a:r>
             <a:endParaRPr b="0" lang="en-US" sz="4400" spc="-1" strike="noStrike">
               <a:solidFill>
@@ -3364,7 +3112,7 @@
               </a:lnSpc>
               <a:buNone/>
             </a:pPr>
-            <a:fld id="{B295A1F9-3396-4520-929E-8BE0E763F2AA}" type="slidenum">
+            <a:fld id="{6B06674E-18CB-4B6A-A938-22953E80A12B}" type="slidenum">
               <a:rPr b="0" lang="en-US" sz="1200" spc="-1" strike="noStrike">
                 <a:solidFill>
                   <a:schemeClr val="dk1">
@@ -3458,169 +3206,7 @@
                 </a:solidFill>
                 <a:latin typeface="Calibri"/>
               </a:rPr>
-              <a:t>Cl</a:t>
-            </a:r>
-            <a:r>
-              <a:rPr b="0" lang="en-US" sz="4400" spc="-1" strike="noStrike">
-                <a:solidFill>
-                  <a:schemeClr val="dk1"/>
-                </a:solidFill>
-                <a:latin typeface="Calibri"/>
-              </a:rPr>
-              <a:t>ic</a:t>
-            </a:r>
-            <a:r>
-              <a:rPr b="0" lang="en-US" sz="4400" spc="-1" strike="noStrike">
-                <a:solidFill>
-                  <a:schemeClr val="dk1"/>
-                </a:solidFill>
-                <a:latin typeface="Calibri"/>
-              </a:rPr>
-              <a:t>k </a:t>
-            </a:r>
-            <a:r>
-              <a:rPr b="0" lang="en-US" sz="4400" spc="-1" strike="noStrike">
-                <a:solidFill>
-                  <a:schemeClr val="dk1"/>
-                </a:solidFill>
-                <a:latin typeface="Calibri"/>
-              </a:rPr>
-              <a:t>t</a:t>
-            </a:r>
-            <a:r>
-              <a:rPr b="0" lang="en-US" sz="4400" spc="-1" strike="noStrike">
-                <a:solidFill>
-                  <a:schemeClr val="dk1"/>
-                </a:solidFill>
-                <a:latin typeface="Calibri"/>
-              </a:rPr>
-              <a:t>o </a:t>
-            </a:r>
-            <a:r>
-              <a:rPr b="0" lang="en-US" sz="4400" spc="-1" strike="noStrike">
-                <a:solidFill>
-                  <a:schemeClr val="dk1"/>
-                </a:solidFill>
-                <a:latin typeface="Calibri"/>
-              </a:rPr>
-              <a:t>e</a:t>
-            </a:r>
-            <a:r>
-              <a:rPr b="0" lang="en-US" sz="4400" spc="-1" strike="noStrike">
-                <a:solidFill>
-                  <a:schemeClr val="dk1"/>
-                </a:solidFill>
-                <a:latin typeface="Calibri"/>
-              </a:rPr>
-              <a:t>di</a:t>
-            </a:r>
-            <a:r>
-              <a:rPr b="0" lang="en-US" sz="4400" spc="-1" strike="noStrike">
-                <a:solidFill>
-                  <a:schemeClr val="dk1"/>
-                </a:solidFill>
-                <a:latin typeface="Calibri"/>
-              </a:rPr>
-              <a:t>t </a:t>
-            </a:r>
-            <a:r>
-              <a:rPr b="0" lang="en-US" sz="4400" spc="-1" strike="noStrike">
-                <a:solidFill>
-                  <a:schemeClr val="dk1"/>
-                </a:solidFill>
-                <a:latin typeface="Calibri"/>
-              </a:rPr>
-              <a:t>M</a:t>
-            </a:r>
-            <a:r>
-              <a:rPr b="0" lang="en-US" sz="4400" spc="-1" strike="noStrike">
-                <a:solidFill>
-                  <a:schemeClr val="dk1"/>
-                </a:solidFill>
-                <a:latin typeface="Calibri"/>
-              </a:rPr>
-              <a:t>a</a:t>
-            </a:r>
-            <a:r>
-              <a:rPr b="0" lang="en-US" sz="4400" spc="-1" strike="noStrike">
-                <a:solidFill>
-                  <a:schemeClr val="dk1"/>
-                </a:solidFill>
-                <a:latin typeface="Calibri"/>
-              </a:rPr>
-              <a:t>st</a:t>
-            </a:r>
-            <a:r>
-              <a:rPr b="0" lang="en-US" sz="4400" spc="-1" strike="noStrike">
-                <a:solidFill>
-                  <a:schemeClr val="dk1"/>
-                </a:solidFill>
-                <a:latin typeface="Calibri"/>
-              </a:rPr>
-              <a:t>e</a:t>
-            </a:r>
-            <a:r>
-              <a:rPr b="0" lang="en-US" sz="4400" spc="-1" strike="noStrike">
-                <a:solidFill>
-                  <a:schemeClr val="dk1"/>
-                </a:solidFill>
-                <a:latin typeface="Calibri"/>
-              </a:rPr>
-              <a:t>r </a:t>
-            </a:r>
-            <a:r>
-              <a:rPr b="0" lang="en-US" sz="4400" spc="-1" strike="noStrike">
-                <a:solidFill>
-                  <a:schemeClr val="dk1"/>
-                </a:solidFill>
-                <a:latin typeface="Calibri"/>
-              </a:rPr>
-              <a:t>ti</a:t>
-            </a:r>
-            <a:r>
-              <a:rPr b="0" lang="en-US" sz="4400" spc="-1" strike="noStrike">
-                <a:solidFill>
-                  <a:schemeClr val="dk1"/>
-                </a:solidFill>
-                <a:latin typeface="Calibri"/>
-              </a:rPr>
-              <a:t>tl</a:t>
-            </a:r>
-            <a:r>
-              <a:rPr b="0" lang="en-US" sz="4400" spc="-1" strike="noStrike">
-                <a:solidFill>
-                  <a:schemeClr val="dk1"/>
-                </a:solidFill>
-                <a:latin typeface="Calibri"/>
-              </a:rPr>
-              <a:t>e </a:t>
-            </a:r>
-            <a:r>
-              <a:rPr b="0" lang="en-US" sz="4400" spc="-1" strike="noStrike">
-                <a:solidFill>
-                  <a:schemeClr val="dk1"/>
-                </a:solidFill>
-                <a:latin typeface="Calibri"/>
-              </a:rPr>
-              <a:t>st</a:t>
-            </a:r>
-            <a:r>
-              <a:rPr b="0" lang="en-US" sz="4400" spc="-1" strike="noStrike">
-                <a:solidFill>
-                  <a:schemeClr val="dk1"/>
-                </a:solidFill>
-                <a:latin typeface="Calibri"/>
-              </a:rPr>
-              <a:t>yl</a:t>
-            </a:r>
-            <a:r>
-              <a:rPr b="0" lang="en-US" sz="4400" spc="-1" strike="noStrike">
-                <a:solidFill>
-                  <a:schemeClr val="dk1"/>
-                </a:solidFill>
-                <a:latin typeface="Calibri"/>
-              </a:rPr>
-              <a:t>e</a:t>
+              <a:t>Click to edit Master title style</a:t>
             </a:r>
             <a:endParaRPr b="0" lang="en-US" sz="4400" spc="-1" strike="noStrike">
               <a:solidFill>
@@ -3990,7 +3576,7 @@
               </a:lnSpc>
               <a:buNone/>
             </a:pPr>
-            <a:fld id="{B28C77E5-7A9B-4A73-A961-5785328808ED}" type="slidenum">
+            <a:fld id="{4086CCAB-232E-4C89-BD94-935097D9D95D}" type="slidenum">
               <a:rPr b="0" lang="en-US" sz="1200" spc="-1" strike="noStrike">
                 <a:solidFill>
                   <a:schemeClr val="dk1">
@@ -4084,52 +3670,7 @@
                 </a:solidFill>
                 <a:latin typeface="Calibri"/>
               </a:rPr>
-              <a:t>Click </a:t>
-            </a:r>
-            <a:r>
-              <a:rPr b="0" lang="en-US" sz="4400" spc="-1" strike="noStrike">
-                <a:solidFill>
-                  <a:schemeClr val="dk1"/>
-                </a:solidFill>
-                <a:latin typeface="Calibri"/>
-              </a:rPr>
-              <a:t>to </a:t>
-            </a:r>
-            <a:r>
-              <a:rPr b="0" lang="en-US" sz="4400" spc="-1" strike="noStrike">
-                <a:solidFill>
-                  <a:schemeClr val="dk1"/>
-                </a:solidFill>
-                <a:latin typeface="Calibri"/>
-              </a:rPr>
-              <a:t>edit </a:t>
-            </a:r>
-            <a:r>
-              <a:rPr b="0" lang="en-US" sz="4400" spc="-1" strike="noStrike">
-                <a:solidFill>
-                  <a:schemeClr val="dk1"/>
-                </a:solidFill>
-                <a:latin typeface="Calibri"/>
-              </a:rPr>
-              <a:t>Maste</a:t>
-            </a:r>
-            <a:r>
-              <a:rPr b="0" lang="en-US" sz="4400" spc="-1" strike="noStrike">
-                <a:solidFill>
-                  <a:schemeClr val="dk1"/>
-                </a:solidFill>
-                <a:latin typeface="Calibri"/>
-              </a:rPr>
-              <a:t>r title </a:t>
-            </a:r>
-            <a:r>
-              <a:rPr b="0" lang="en-US" sz="4400" spc="-1" strike="noStrike">
-                <a:solidFill>
-                  <a:schemeClr val="dk1"/>
-                </a:solidFill>
-                <a:latin typeface="Calibri"/>
-              </a:rPr>
-              <a:t>style</a:t>
+              <a:t>Click to edit Master title style</a:t>
             </a:r>
             <a:endParaRPr b="0" lang="en-US" sz="4400" spc="-1" strike="noStrike">
               <a:solidFill>
@@ -4499,7 +4040,7 @@
               </a:lnSpc>
               <a:buNone/>
             </a:pPr>
-            <a:fld id="{23DBB6DE-2BC9-429E-8E93-02141BD98BA1}" type="slidenum">
+            <a:fld id="{4C04B1B5-3B58-47CD-A1B2-EFF598845911}" type="slidenum">
               <a:rPr b="0" lang="en-US" sz="1200" spc="-1" strike="noStrike">
                 <a:solidFill>
                   <a:schemeClr val="dk1">
@@ -4593,286 +4134,7 @@
                 </a:solidFill>
                 <a:latin typeface="Calibri"/>
               </a:rPr>
-              <a:t>C</a:t>
-            </a:r>
-            <a:r>
-              <a:rPr b="1" lang="en-US" sz="4000" spc="-1" strike="noStrike" cap="all">
-                <a:solidFill>
-                  <a:schemeClr val="dk1"/>
-                </a:solidFill>
-                <a:latin typeface="Calibri"/>
-              </a:rPr>
-              <a:t>l</a:t>
-            </a:r>
-            <a:r>
-              <a:rPr b="1" lang="en-US" sz="4000" spc="-1" strike="noStrike" cap="all">
-                <a:solidFill>
-                  <a:schemeClr val="dk1"/>
-                </a:solidFill>
-                <a:latin typeface="Calibri"/>
-              </a:rPr>
-              <a:t>i</a:t>
-            </a:r>
-            <a:r>
-              <a:rPr b="1" lang="en-US" sz="4000" spc="-1" strike="noStrike" cap="all">
-                <a:solidFill>
-                  <a:schemeClr val="dk1"/>
-                </a:solidFill>
-                <a:latin typeface="Calibri"/>
-              </a:rPr>
-              <a:t>c</a:t>
-            </a:r>
-            <a:r>
-              <a:rPr b="1" lang="en-US" sz="4000" spc="-1" strike="noStrike" cap="all">
-                <a:solidFill>
-                  <a:schemeClr val="dk1"/>
-                </a:solidFill>
-                <a:latin typeface="Calibri"/>
-              </a:rPr>
-              <a:t>k</a:t>
-            </a:r>
-            <a:r>
-              <a:rPr b="1" lang="en-US" sz="4000" spc="-1" strike="noStrike" cap="all">
-                <a:solidFill>
-                  <a:schemeClr val="dk1"/>
-                </a:solidFill>
-                <a:latin typeface="Calibri"/>
-              </a:rPr>
-              <a:t> </a:t>
-            </a:r>
-            <a:r>
-              <a:rPr b="1" lang="en-US" sz="4000" spc="-1" strike="noStrike" cap="all">
-                <a:solidFill>
-                  <a:schemeClr val="dk1"/>
-                </a:solidFill>
-                <a:latin typeface="Calibri"/>
-              </a:rPr>
-              <a:t>t</a:t>
-            </a:r>
-            <a:r>
-              <a:rPr b="1" lang="en-US" sz="4000" spc="-1" strike="noStrike" cap="all">
-                <a:solidFill>
-                  <a:schemeClr val="dk1"/>
-                </a:solidFill>
-                <a:latin typeface="Calibri"/>
-              </a:rPr>
-              <a:t>o</a:t>
-            </a:r>
-            <a:r>
-              <a:rPr b="1" lang="en-US" sz="4000" spc="-1" strike="noStrike" cap="all">
-                <a:solidFill>
-                  <a:schemeClr val="dk1"/>
-                </a:solidFill>
-                <a:latin typeface="Calibri"/>
-              </a:rPr>
-              <a:t> </a:t>
-            </a:r>
-            <a:r>
-              <a:rPr b="1" lang="en-US" sz="4000" spc="-1" strike="noStrike" cap="all">
-                <a:solidFill>
-                  <a:schemeClr val="dk1"/>
-                </a:solidFill>
-                <a:latin typeface="Calibri"/>
-              </a:rPr>
-              <a:t>e</a:t>
-            </a:r>
-            <a:r>
-              <a:rPr b="1" lang="en-US" sz="4000" spc="-1" strike="noStrike" cap="all">
-                <a:solidFill>
-                  <a:schemeClr val="dk1"/>
-                </a:solidFill>
-                <a:latin typeface="Calibri"/>
-              </a:rPr>
-              <a:t>d</a:t>
-            </a:r>
-            <a:r>
-              <a:rPr b="1" lang="en-US" sz="4000" spc="-1" strike="noStrike" cap="all">
-                <a:solidFill>
-                  <a:schemeClr val="dk1"/>
-                </a:solidFill>
-                <a:latin typeface="Calibri"/>
-              </a:rPr>
-              <a:t>i</a:t>
-            </a:r>
-            <a:r>
-              <a:rPr b="1" lang="en-US" sz="4000" spc="-1" strike="noStrike" cap="all">
-                <a:solidFill>
-                  <a:schemeClr val="dk1"/>
-                </a:solidFill>
-                <a:latin typeface="Calibri"/>
-              </a:rPr>
-              <a:t>t</a:t>
-            </a:r>
-            <a:r>
-              <a:rPr b="1" lang="en-US" sz="4000" spc="-1" strike="noStrike" cap="all">
-                <a:solidFill>
-                  <a:schemeClr val="dk1"/>
-                </a:solidFill>
-                <a:latin typeface="Calibri"/>
-              </a:rPr>
-              <a:t> </a:t>
-            </a:r>
-            <a:r>
-              <a:rPr b="1" lang="en-US" sz="4000" spc="-1" strike="noStrike" cap="all">
-                <a:solidFill>
-                  <a:schemeClr val="dk1"/>
-                </a:solidFill>
-                <a:latin typeface="Calibri"/>
-              </a:rPr>
-              <a:t>M</a:t>
-            </a:r>
-            <a:r>
-              <a:rPr b="1" lang="en-US" sz="4000" spc="-1" strike="noStrike" cap="all">
-                <a:solidFill>
-                  <a:schemeClr val="dk1"/>
-                </a:solidFill>
-                <a:latin typeface="Calibri"/>
-              </a:rPr>
-              <a:t>a</a:t>
-            </a:r>
-            <a:r>
-              <a:rPr b="1" lang="en-US" sz="4000" spc="-1" strike="noStrike" cap="all">
-                <a:solidFill>
-                  <a:schemeClr val="dk1"/>
-                </a:solidFill>
-                <a:latin typeface="Calibri"/>
-              </a:rPr>
-              <a:t>s</a:t>
-            </a:r>
-            <a:r>
-              <a:rPr b="1" lang="en-US" sz="4000" spc="-1" strike="noStrike" cap="all">
-                <a:solidFill>
-                  <a:schemeClr val="dk1"/>
-                </a:solidFill>
-                <a:latin typeface="Calibri"/>
-              </a:rPr>
-              <a:t>t</a:t>
-            </a:r>
-            <a:r>
-              <a:rPr b="1" lang="en-US" sz="4000" spc="-1" strike="noStrike" cap="all">
-                <a:solidFill>
-                  <a:schemeClr val="dk1"/>
-                </a:solidFill>
-                <a:latin typeface="Calibri"/>
-              </a:rPr>
-              <a:t>e</a:t>
-            </a:r>
-            <a:r>
-              <a:rPr b="1" lang="en-US" sz="4000" spc="-1" strike="noStrike" cap="all">
-                <a:solidFill>
-                  <a:schemeClr val="dk1"/>
-                </a:solidFill>
-                <a:latin typeface="Calibri"/>
-              </a:rPr>
-              <a:t>r</a:t>
-            </a:r>
-            <a:r>
-              <a:rPr b="1" lang="en-US" sz="4000" spc="-1" strike="noStrike" cap="all">
-                <a:solidFill>
-                  <a:schemeClr val="dk1"/>
-                </a:solidFill>
-                <a:latin typeface="Calibri"/>
-              </a:rPr>
-              <a:t> </a:t>
-            </a:r>
-            <a:r>
-              <a:rPr b="1" lang="en-US" sz="4000" spc="-1" strike="noStrike" cap="all">
-                <a:solidFill>
-                  <a:schemeClr val="dk1"/>
-                </a:solidFill>
-                <a:latin typeface="Calibri"/>
-              </a:rPr>
-              <a:t>t</a:t>
-            </a:r>
-            <a:r>
-              <a:rPr b="1" lang="en-US" sz="4000" spc="-1" strike="noStrike" cap="all">
-                <a:solidFill>
-                  <a:schemeClr val="dk1"/>
-                </a:solidFill>
-                <a:latin typeface="Calibri"/>
-              </a:rPr>
-              <a:t>i</a:t>
-            </a:r>
-            <a:r>
-              <a:rPr b="1" lang="en-US" sz="4000" spc="-1" strike="noStrike" cap="all">
-                <a:solidFill>
-                  <a:schemeClr val="dk1"/>
-                </a:solidFill>
-                <a:latin typeface="Calibri"/>
-              </a:rPr>
-              <a:t>t</a:t>
-            </a:r>
-            <a:r>
-              <a:rPr b="1" lang="en-US" sz="4000" spc="-1" strike="noStrike" cap="all">
-                <a:solidFill>
-                  <a:schemeClr val="dk1"/>
-                </a:solidFill>
-                <a:latin typeface="Calibri"/>
-              </a:rPr>
-              <a:t>l</a:t>
-            </a:r>
-            <a:r>
-              <a:rPr b="1" lang="en-US" sz="4000" spc="-1" strike="noStrike" cap="all">
-                <a:solidFill>
-                  <a:schemeClr val="dk1"/>
-                </a:solidFill>
-                <a:latin typeface="Calibri"/>
-              </a:rPr>
-              <a:t>e</a:t>
-            </a:r>
-            <a:r>
-              <a:rPr b="1" lang="en-US" sz="4000" spc="-1" strike="noStrike" cap="all">
-                <a:solidFill>
-                  <a:schemeClr val="dk1"/>
-                </a:solidFill>
-                <a:latin typeface="Calibri"/>
-              </a:rPr>
-              <a:t> </a:t>
-            </a:r>
-            <a:r>
-              <a:rPr b="1" lang="en-US" sz="4000" spc="-1" strike="noStrike" cap="all">
-                <a:solidFill>
-                  <a:schemeClr val="dk1"/>
-                </a:solidFill>
-                <a:latin typeface="Calibri"/>
-              </a:rPr>
-              <a:t>s</a:t>
-            </a:r>
-            <a:r>
-              <a:rPr b="1" lang="en-US" sz="4000" spc="-1" strike="noStrike" cap="all">
-                <a:solidFill>
-                  <a:schemeClr val="dk1"/>
-                </a:solidFill>
-                <a:latin typeface="Calibri"/>
-              </a:rPr>
-              <a:t>t</a:t>
-            </a:r>
-            <a:r>
-              <a:rPr b="1" lang="en-US" sz="4000" spc="-1" strike="noStrike" cap="all">
-                <a:solidFill>
-                  <a:schemeClr val="dk1"/>
-                </a:solidFill>
-                <a:latin typeface="Calibri"/>
-              </a:rPr>
-              <a:t>y</a:t>
-            </a:r>
-            <a:r>
-              <a:rPr b="1" lang="en-US" sz="4000" spc="-1" strike="noStrike" cap="all">
-                <a:solidFill>
-                  <a:schemeClr val="dk1"/>
-                </a:solidFill>
-                <a:latin typeface="Calibri"/>
-              </a:rPr>
-              <a:t>l</a:t>
-            </a:r>
-            <a:r>
-              <a:rPr b="1" lang="en-US" sz="4000" spc="-1" strike="noStrike" cap="all">
-                <a:solidFill>
-                  <a:schemeClr val="dk1"/>
-                </a:solidFill>
-                <a:latin typeface="Calibri"/>
-              </a:rPr>
-              <a:t>e</a:t>
+              <a:t>Click to edit Master title style</a:t>
             </a:r>
             <a:endParaRPr b="0" lang="en-US" sz="4000" spc="-1" strike="noStrike">
               <a:solidFill>
@@ -5123,7 +4385,7 @@
               </a:lnSpc>
               <a:buNone/>
             </a:pPr>
-            <a:fld id="{0143DE4A-C56A-476E-AAF1-8E9BE5948FAA}" type="slidenum">
+            <a:fld id="{17CBF672-7AB8-44B8-B89E-FE9A116EAC8E}" type="slidenum">
               <a:rPr b="0" lang="en-US" sz="1200" spc="-1" strike="noStrike">
                 <a:solidFill>
                   <a:schemeClr val="dk1">
@@ -5766,7 +5028,7 @@
               </a:lnSpc>
               <a:buNone/>
             </a:pPr>
-            <a:fld id="{BEAB7832-DD4A-4193-A5B7-83B36E2F3E9C}" type="slidenum">
+            <a:fld id="{86F2E3CD-3CD8-4E8D-B3A7-0CDD7E52AD7E}" type="slidenum">
               <a:rPr b="0" lang="en-US" sz="1200" spc="-1" strike="noStrike">
                 <a:solidFill>
                   <a:schemeClr val="dk1">
@@ -6525,7 +5787,7 @@
               </a:lnSpc>
               <a:buNone/>
             </a:pPr>
-            <a:fld id="{1F1C6915-48E8-4DCE-AB2F-5020B5288E72}" type="slidenum">
+            <a:fld id="{09505B79-A2B5-4C5A-8637-D81D33B56EEE}" type="slidenum">
               <a:rPr b="0" lang="en-US" sz="1200" spc="-1" strike="noStrike">
                 <a:solidFill>
                   <a:schemeClr val="dk1">
@@ -6810,7 +6072,7 @@
               </a:lnSpc>
               <a:buNone/>
             </a:pPr>
-            <a:fld id="{72DAA768-1E49-4540-BD1A-22C9B30C9547}" type="slidenum">
+            <a:fld id="{69B90DE3-4F01-4A6C-B08E-EC3949AFEBE9}" type="slidenum">
               <a:rPr b="0" lang="en-US" sz="1200" spc="-1" strike="noStrike">
                 <a:solidFill>
                   <a:schemeClr val="dk1">
@@ -7043,7 +6305,7 @@
               </a:lnSpc>
               <a:buNone/>
             </a:pPr>
-            <a:fld id="{B4B2787D-EEB3-42DF-976D-6478D44BB6D9}" type="slidenum">
+            <a:fld id="{DC38C8A3-C9A2-4182-8017-49080FD7163A}" type="slidenum">
               <a:rPr b="0" lang="en-US" sz="1200" spc="-1" strike="noStrike">
                 <a:solidFill>
                   <a:schemeClr val="dk1">
@@ -12402,7 +11664,7 @@
         </p:nvSpPr>
         <p:spPr>
           <a:xfrm>
-            <a:off x="274320" y="2487240"/>
+            <a:off x="274320" y="2331720"/>
             <a:ext cx="11639880" cy="914040"/>
           </a:xfrm>
           <a:prstGeom prst="rect">
@@ -12461,7 +11723,7 @@
         </p:nvSpPr>
         <p:spPr>
           <a:xfrm>
-            <a:off x="274320" y="2487240"/>
+            <a:off x="274320" y="2331720"/>
             <a:ext cx="109440" cy="914040"/>
           </a:xfrm>
           <a:prstGeom prst="rect">
@@ -12520,7 +11782,7 @@
         </p:nvSpPr>
         <p:spPr>
           <a:xfrm>
-            <a:off x="457200" y="2578680"/>
+            <a:off x="457200" y="2423160"/>
             <a:ext cx="456840" cy="699480"/>
           </a:xfrm>
           <a:prstGeom prst="rect">
@@ -12573,7 +11835,7 @@
         </p:nvSpPr>
         <p:spPr>
           <a:xfrm>
-            <a:off x="1005840" y="2560320"/>
+            <a:off x="1005840" y="2404800"/>
             <a:ext cx="4571640" cy="288000"/>
           </a:xfrm>
           <a:prstGeom prst="rect">
@@ -12626,7 +11888,7 @@
         </p:nvSpPr>
         <p:spPr>
           <a:xfrm>
-            <a:off x="1005840" y="2871360"/>
+            <a:off x="1005840" y="2715840"/>
             <a:ext cx="10698120" cy="409320"/>
           </a:xfrm>
           <a:prstGeom prst="rect">
@@ -12696,7 +11958,7 @@
         </p:nvSpPr>
         <p:spPr>
           <a:xfrm>
-            <a:off x="274320" y="3511440"/>
+            <a:off x="274320" y="3200400"/>
             <a:ext cx="11639880" cy="914040"/>
           </a:xfrm>
           <a:prstGeom prst="rect">
@@ -12755,7 +12017,7 @@
         </p:nvSpPr>
         <p:spPr>
           <a:xfrm>
-            <a:off x="274320" y="3511440"/>
+            <a:off x="274320" y="3200400"/>
             <a:ext cx="109440" cy="914040"/>
           </a:xfrm>
           <a:prstGeom prst="rect">
@@ -12814,7 +12076,7 @@
         </p:nvSpPr>
         <p:spPr>
           <a:xfrm>
-            <a:off x="457200" y="3602880"/>
+            <a:off x="457200" y="3291840"/>
             <a:ext cx="456840" cy="699480"/>
           </a:xfrm>
           <a:prstGeom prst="rect">
@@ -12867,7 +12129,7 @@
         </p:nvSpPr>
         <p:spPr>
           <a:xfrm>
-            <a:off x="1005840" y="3584520"/>
+            <a:off x="1005840" y="3273480"/>
             <a:ext cx="4571640" cy="288000"/>
           </a:xfrm>
           <a:prstGeom prst="rect">
@@ -12920,7 +12182,7 @@
         </p:nvSpPr>
         <p:spPr>
           <a:xfrm>
-            <a:off x="1005840" y="3895200"/>
+            <a:off x="1005840" y="3584520"/>
             <a:ext cx="10698120" cy="409320"/>
           </a:xfrm>
           <a:prstGeom prst="rect">
@@ -12990,7 +12252,7 @@
         </p:nvSpPr>
         <p:spPr>
           <a:xfrm>
-            <a:off x="274320" y="4535280"/>
+            <a:off x="274320" y="4069080"/>
             <a:ext cx="11639880" cy="914040"/>
           </a:xfrm>
           <a:prstGeom prst="rect">
@@ -13049,7 +12311,7 @@
         </p:nvSpPr>
         <p:spPr>
           <a:xfrm>
-            <a:off x="274320" y="4535280"/>
+            <a:off x="274320" y="4069080"/>
             <a:ext cx="109440" cy="914040"/>
           </a:xfrm>
           <a:prstGeom prst="rect">
@@ -13108,7 +12370,7 @@
         </p:nvSpPr>
         <p:spPr>
           <a:xfrm>
-            <a:off x="457200" y="4626720"/>
+            <a:off x="457200" y="4160520"/>
             <a:ext cx="456840" cy="699480"/>
           </a:xfrm>
           <a:prstGeom prst="rect">
@@ -13161,7 +12423,7 @@
         </p:nvSpPr>
         <p:spPr>
           <a:xfrm>
-            <a:off x="1005840" y="4608720"/>
+            <a:off x="1005840" y="4142160"/>
             <a:ext cx="4571640" cy="288000"/>
           </a:xfrm>
           <a:prstGeom prst="rect">
@@ -13214,7 +12476,7 @@
         </p:nvSpPr>
         <p:spPr>
           <a:xfrm>
-            <a:off x="1005840" y="4919400"/>
+            <a:off x="1005840" y="4453200"/>
             <a:ext cx="10698120" cy="409320"/>
           </a:xfrm>
           <a:prstGeom prst="rect">
@@ -13284,7 +12546,7 @@
         </p:nvSpPr>
         <p:spPr>
           <a:xfrm>
-            <a:off x="274320" y="5559480"/>
+            <a:off x="274320" y="4937760"/>
             <a:ext cx="11639880" cy="914040"/>
           </a:xfrm>
           <a:prstGeom prst="rect">
@@ -13343,7 +12605,7 @@
         </p:nvSpPr>
         <p:spPr>
           <a:xfrm>
-            <a:off x="274320" y="5559480"/>
+            <a:off x="274320" y="4937760"/>
             <a:ext cx="109440" cy="914040"/>
           </a:xfrm>
           <a:prstGeom prst="rect">
@@ -13402,7 +12664,7 @@
         </p:nvSpPr>
         <p:spPr>
           <a:xfrm>
-            <a:off x="457200" y="5650920"/>
+            <a:off x="457200" y="5029200"/>
             <a:ext cx="456840" cy="394560"/>
           </a:xfrm>
           <a:prstGeom prst="rect">
@@ -13455,7 +12717,7 @@
         </p:nvSpPr>
         <p:spPr>
           <a:xfrm>
-            <a:off x="1005840" y="5632560"/>
+            <a:off x="1005840" y="5010840"/>
             <a:ext cx="4571640" cy="288000"/>
           </a:xfrm>
           <a:prstGeom prst="rect">
@@ -13508,7 +12770,7 @@
         </p:nvSpPr>
         <p:spPr>
           <a:xfrm>
-            <a:off x="1005840" y="5943600"/>
+            <a:off x="1005840" y="5321880"/>
             <a:ext cx="10698120" cy="409320"/>
           </a:xfrm>
           <a:prstGeom prst="rect">
@@ -13572,7 +12834,301 @@
       </p:sp>
       <p:sp>
         <p:nvSpPr>
-          <p:cNvPr id="401" name="TextBox 31"/>
+          <p:cNvPr id="401" name="Rectangle 31"/>
+          <p:cNvSpPr/>
+          <p:nvPr/>
+        </p:nvSpPr>
+        <p:spPr>
+          <a:xfrm>
+            <a:off x="274320" y="5806440"/>
+            <a:ext cx="11639880" cy="914040"/>
+          </a:xfrm>
+          <a:prstGeom prst="rect">
+            <a:avLst/>
+          </a:prstGeom>
+          <a:solidFill>
+            <a:srgbClr val="f5f8ff"/>
+          </a:solidFill>
+          <a:ln>
+            <a:noFill/>
+          </a:ln>
+          <a:effectLst>
+            <a:outerShdw blurRad="39960" dir="5400000" dist="23040" rotWithShape="0">
+              <a:srgbClr val="000000">
+                <a:alpha val="35000"/>
+              </a:srgbClr>
+            </a:outerShdw>
+          </a:effectLst>
+        </p:spPr>
+        <p:style>
+          <a:lnRef idx="1">
+            <a:schemeClr val="accent1"/>
+          </a:lnRef>
+          <a:fillRef idx="3">
+            <a:schemeClr val="accent1"/>
+          </a:fillRef>
+          <a:effectRef idx="2">
+            <a:schemeClr val="accent1"/>
+          </a:effectRef>
+          <a:fontRef idx="minor"/>
+        </p:style>
+        <p:txBody>
+          <a:bodyPr lIns="90000" rIns="90000" tIns="45000" bIns="45000" anchor="ctr">
+            <a:noAutofit/>
+          </a:bodyPr>
+          <a:p>
+            <a:pPr algn="ctr" defTabSz="457200">
+              <a:lnSpc>
+                <a:spcPct val="100000"/>
+              </a:lnSpc>
+            </a:pPr>
+            <a:endParaRPr b="0" lang="en-US" sz="1800" spc="-1" strike="noStrike">
+              <a:solidFill>
+                <a:schemeClr val="lt1"/>
+              </a:solidFill>
+              <a:latin typeface="Calibri"/>
+            </a:endParaRPr>
+          </a:p>
+        </p:txBody>
+      </p:sp>
+      <p:sp>
+        <p:nvSpPr>
+          <p:cNvPr id="402" name="Rectangle 32"/>
+          <p:cNvSpPr/>
+          <p:nvPr/>
+        </p:nvSpPr>
+        <p:spPr>
+          <a:xfrm>
+            <a:off x="274320" y="5806440"/>
+            <a:ext cx="109440" cy="914040"/>
+          </a:xfrm>
+          <a:prstGeom prst="rect">
+            <a:avLst/>
+          </a:prstGeom>
+          <a:solidFill>
+            <a:srgbClr val="006064"/>
+          </a:solidFill>
+          <a:ln>
+            <a:noFill/>
+          </a:ln>
+          <a:effectLst>
+            <a:outerShdw blurRad="39960" dir="5400000" dist="23040" rotWithShape="0">
+              <a:srgbClr val="000000">
+                <a:alpha val="35000"/>
+              </a:srgbClr>
+            </a:outerShdw>
+          </a:effectLst>
+        </p:spPr>
+        <p:style>
+          <a:lnRef idx="1">
+            <a:schemeClr val="accent1"/>
+          </a:lnRef>
+          <a:fillRef idx="3">
+            <a:schemeClr val="accent1"/>
+          </a:fillRef>
+          <a:effectRef idx="2">
+            <a:schemeClr val="accent1"/>
+          </a:effectRef>
+          <a:fontRef idx="minor"/>
+        </p:style>
+        <p:txBody>
+          <a:bodyPr lIns="90000" rIns="90000" tIns="45000" bIns="45000" anchor="ctr">
+            <a:noAutofit/>
+          </a:bodyPr>
+          <a:p>
+            <a:pPr algn="ctr" defTabSz="457200">
+              <a:lnSpc>
+                <a:spcPct val="100000"/>
+              </a:lnSpc>
+            </a:pPr>
+            <a:endParaRPr b="0" lang="en-US" sz="1800" spc="-1" strike="noStrike">
+              <a:solidFill>
+                <a:schemeClr val="lt1"/>
+              </a:solidFill>
+              <a:latin typeface="Calibri"/>
+            </a:endParaRPr>
+          </a:p>
+        </p:txBody>
+      </p:sp>
+      <p:sp>
+        <p:nvSpPr>
+          <p:cNvPr id="403" name="TextBox 33"/>
+          <p:cNvSpPr/>
+          <p:nvPr/>
+        </p:nvSpPr>
+        <p:spPr>
+          <a:xfrm>
+            <a:off x="457200" y="5897880"/>
+            <a:ext cx="456840" cy="699480"/>
+          </a:xfrm>
+          <a:prstGeom prst="rect">
+            <a:avLst/>
+          </a:prstGeom>
+          <a:noFill/>
+          <a:ln w="0">
+            <a:noFill/>
+          </a:ln>
+        </p:spPr>
+        <p:style>
+          <a:lnRef idx="0"/>
+          <a:fillRef idx="0"/>
+          <a:effectRef idx="0"/>
+          <a:fontRef idx="minor"/>
+        </p:style>
+        <p:txBody>
+          <a:bodyPr lIns="90000" rIns="90000" tIns="45000" bIns="45000" anchor="t">
+            <a:spAutoFit/>
+          </a:bodyPr>
+          <a:p>
+            <a:pPr defTabSz="457200">
+              <a:lnSpc>
+                <a:spcPct val="100000"/>
+              </a:lnSpc>
+            </a:pPr>
+            <a:r>
+              <a:rPr b="0" lang="en-US" sz="2000" spc="-1" strike="noStrike">
+                <a:solidFill>
+                  <a:srgbClr val="ffffff"/>
+                </a:solidFill>
+                <a:latin typeface="Calibri"/>
+              </a:rPr>
+              <a:t>🔐</a:t>
+            </a:r>
+            <a:endParaRPr b="0" lang="en-US" sz="2000" spc="-1" strike="noStrike">
+              <a:solidFill>
+                <a:srgbClr val="000000"/>
+              </a:solidFill>
+              <a:latin typeface="Arial"/>
+            </a:endParaRPr>
+          </a:p>
+        </p:txBody>
+      </p:sp>
+      <p:sp>
+        <p:nvSpPr>
+          <p:cNvPr id="404" name="TextBox 34"/>
+          <p:cNvSpPr/>
+          <p:nvPr/>
+        </p:nvSpPr>
+        <p:spPr>
+          <a:xfrm>
+            <a:off x="1005840" y="5879520"/>
+            <a:ext cx="4571640" cy="288000"/>
+          </a:xfrm>
+          <a:prstGeom prst="rect">
+            <a:avLst/>
+          </a:prstGeom>
+          <a:noFill/>
+          <a:ln w="0">
+            <a:noFill/>
+          </a:ln>
+        </p:spPr>
+        <p:style>
+          <a:lnRef idx="0"/>
+          <a:fillRef idx="0"/>
+          <a:effectRef idx="0"/>
+          <a:fontRef idx="minor"/>
+        </p:style>
+        <p:txBody>
+          <a:bodyPr lIns="90000" rIns="90000" tIns="45000" bIns="45000" anchor="t">
+            <a:spAutoFit/>
+          </a:bodyPr>
+          <a:p>
+            <a:pPr defTabSz="457200">
+              <a:lnSpc>
+                <a:spcPct val="100000"/>
+              </a:lnSpc>
+            </a:pPr>
+            <a:r>
+              <a:rPr b="1" lang="en-US" sz="1300" spc="-1" strike="noStrike">
+                <a:solidFill>
+                  <a:srgbClr val="006064"/>
+                </a:solidFill>
+                <a:latin typeface="Calibri"/>
+              </a:rPr>
+              <a:t>ACID-транзакции (race condition protection)</a:t>
+            </a:r>
+            <a:endParaRPr b="0" lang="en-US" sz="1300" spc="-1" strike="noStrike">
+              <a:solidFill>
+                <a:srgbClr val="000000"/>
+              </a:solidFill>
+              <a:latin typeface="Arial"/>
+            </a:endParaRPr>
+          </a:p>
+        </p:txBody>
+      </p:sp>
+      <p:sp>
+        <p:nvSpPr>
+          <p:cNvPr id="405" name="TextBox 35"/>
+          <p:cNvSpPr/>
+          <p:nvPr/>
+        </p:nvSpPr>
+        <p:spPr>
+          <a:xfrm>
+            <a:off x="1005840" y="6190560"/>
+            <a:ext cx="10698120" cy="409320"/>
+          </a:xfrm>
+          <a:prstGeom prst="rect">
+            <a:avLst/>
+          </a:prstGeom>
+          <a:noFill/>
+          <a:ln w="0">
+            <a:noFill/>
+          </a:ln>
+        </p:spPr>
+        <p:style>
+          <a:lnRef idx="0"/>
+          <a:fillRef idx="0"/>
+          <a:effectRef idx="0"/>
+          <a:fontRef idx="minor"/>
+        </p:style>
+        <p:txBody>
+          <a:bodyPr lIns="90000" rIns="90000" tIns="45000" bIns="45000" anchor="t">
+            <a:spAutoFit/>
+          </a:bodyPr>
+          <a:p>
+            <a:r>
+              <a:rPr b="0" lang="en-US" sz="1050" spc="-1" strike="noStrike">
+                <a:solidFill>
+                  <a:srgbClr val="1a1a2e"/>
+                </a:solidFill>
+                <a:latin typeface="Calibri"/>
+              </a:rPr>
+              <a:t>SELECT FOR UPDATE → DELETE → INSERT → один COMMIT. Второй параллельный запрос</a:t>
+            </a:r>
+            <a:endParaRPr b="0" lang="en-US" sz="1050" spc="-1" strike="noStrike">
+              <a:solidFill>
+                <a:srgbClr val="000000"/>
+              </a:solidFill>
+              <a:latin typeface="Arial"/>
+            </a:endParaRPr>
+          </a:p>
+          <a:p>
+            <a:pPr defTabSz="457200">
+              <a:lnSpc>
+                <a:spcPct val="100000"/>
+              </a:lnSpc>
+            </a:pPr>
+            <a:r>
+              <a:rPr b="0" lang="en-US" sz="1050" spc="-1" strike="noStrike">
+                <a:solidFill>
+                  <a:srgbClr val="1a1a2e"/>
+                </a:solidFill>
+                <a:latin typeface="Calibri"/>
+              </a:rPr>
+              <a:t>ждёт на FOR UPDATE пока первый не закоммитит. Дубли и потеря данных невозможны.</a:t>
+            </a:r>
+            <a:endParaRPr b="0" lang="en-US" sz="1050" spc="-1" strike="noStrike">
+              <a:solidFill>
+                <a:srgbClr val="000000"/>
+              </a:solidFill>
+              <a:latin typeface="Arial"/>
+            </a:endParaRPr>
+          </a:p>
+        </p:txBody>
+      </p:sp>
+      <p:sp>
+        <p:nvSpPr>
+          <p:cNvPr id="406" name="TextBox 36"/>
           <p:cNvSpPr/>
           <p:nvPr/>
         </p:nvSpPr>
@@ -13655,7 +13211,7 @@
       </p:grpSpPr>
       <p:sp>
         <p:nvSpPr>
-          <p:cNvPr id="402" name="Rectangle 1"/>
+          <p:cNvPr id="407" name="Rectangle 1"/>
           <p:cNvSpPr/>
           <p:nvPr/>
         </p:nvSpPr>
@@ -13714,7 +13270,7 @@
       </p:sp>
       <p:sp>
         <p:nvSpPr>
-          <p:cNvPr id="403" name="Rectangle 2"/>
+          <p:cNvPr id="408" name="Rectangle 2"/>
           <p:cNvSpPr/>
           <p:nvPr/>
         </p:nvSpPr>
@@ -13773,7 +13329,7 @@
       </p:sp>
       <p:sp>
         <p:nvSpPr>
-          <p:cNvPr id="404" name="TextBox 3"/>
+          <p:cNvPr id="409" name="TextBox 3"/>
           <p:cNvSpPr/>
           <p:nvPr/>
         </p:nvSpPr>
@@ -13826,7 +13382,7 @@
       </p:sp>
       <p:sp>
         <p:nvSpPr>
-          <p:cNvPr id="405" name="TextBox 4"/>
+          <p:cNvPr id="410" name="TextBox 4"/>
           <p:cNvSpPr/>
           <p:nvPr/>
         </p:nvSpPr>
@@ -13879,7 +13435,7 @@
       </p:sp>
       <p:sp>
         <p:nvSpPr>
-          <p:cNvPr id="406" name="Rectangle 5"/>
+          <p:cNvPr id="411" name="Rectangle 5"/>
           <p:cNvSpPr/>
           <p:nvPr/>
         </p:nvSpPr>
@@ -13938,7 +13494,7 @@
       </p:sp>
       <p:sp>
         <p:nvSpPr>
-          <p:cNvPr id="407" name="Rectangle 6"/>
+          <p:cNvPr id="412" name="Rectangle 6"/>
           <p:cNvSpPr/>
           <p:nvPr/>
         </p:nvSpPr>
@@ -13997,7 +13553,7 @@
       </p:sp>
       <p:sp>
         <p:nvSpPr>
-          <p:cNvPr id="408" name="Rectangle 7"/>
+          <p:cNvPr id="413" name="Rectangle 7"/>
           <p:cNvSpPr/>
           <p:nvPr/>
         </p:nvSpPr>
@@ -14056,7 +13612,7 @@
       </p:sp>
       <p:sp>
         <p:nvSpPr>
-          <p:cNvPr id="409" name="TextBox 8"/>
+          <p:cNvPr id="414" name="TextBox 8"/>
           <p:cNvSpPr/>
           <p:nvPr/>
         </p:nvSpPr>
@@ -14109,7 +13665,7 @@
       </p:sp>
       <p:sp>
         <p:nvSpPr>
-          <p:cNvPr id="410" name="TextBox 9"/>
+          <p:cNvPr id="415" name="TextBox 9"/>
           <p:cNvSpPr/>
           <p:nvPr/>
         </p:nvSpPr>
@@ -14162,7 +13718,7 @@
       </p:sp>
       <p:sp>
         <p:nvSpPr>
-          <p:cNvPr id="411" name="TextBox 10"/>
+          <p:cNvPr id="416" name="TextBox 10"/>
           <p:cNvSpPr/>
           <p:nvPr/>
         </p:nvSpPr>
@@ -14232,7 +13788,7 @@
       </p:sp>
       <p:sp>
         <p:nvSpPr>
-          <p:cNvPr id="412" name="TextBox 11"/>
+          <p:cNvPr id="417" name="TextBox 11"/>
           <p:cNvSpPr/>
           <p:nvPr/>
         </p:nvSpPr>
@@ -14285,7 +13841,7 @@
       </p:sp>
       <p:sp>
         <p:nvSpPr>
-          <p:cNvPr id="413" name="TextBox 12"/>
+          <p:cNvPr id="418" name="TextBox 12"/>
           <p:cNvSpPr/>
           <p:nvPr/>
         </p:nvSpPr>
@@ -14355,7 +13911,7 @@
       </p:sp>
       <p:sp>
         <p:nvSpPr>
-          <p:cNvPr id="414" name="TextBox 13"/>
+          <p:cNvPr id="419" name="TextBox 13"/>
           <p:cNvSpPr/>
           <p:nvPr/>
         </p:nvSpPr>
@@ -14408,7 +13964,7 @@
       </p:sp>
       <p:sp>
         <p:nvSpPr>
-          <p:cNvPr id="415" name="TextBox 14"/>
+          <p:cNvPr id="420" name="TextBox 14"/>
           <p:cNvSpPr/>
           <p:nvPr/>
         </p:nvSpPr>
@@ -14478,7 +14034,7 @@
       </p:sp>
       <p:sp>
         <p:nvSpPr>
-          <p:cNvPr id="416" name="TextBox 15"/>
+          <p:cNvPr id="421" name="TextBox 15"/>
           <p:cNvSpPr/>
           <p:nvPr/>
         </p:nvSpPr>
@@ -14531,7 +14087,7 @@
       </p:sp>
       <p:sp>
         <p:nvSpPr>
-          <p:cNvPr id="417" name="TextBox 16"/>
+          <p:cNvPr id="422" name="TextBox 16"/>
           <p:cNvSpPr/>
           <p:nvPr/>
         </p:nvSpPr>
@@ -14601,7 +14157,7 @@
       </p:sp>
       <p:sp>
         <p:nvSpPr>
-          <p:cNvPr id="418" name="Rectangle 17"/>
+          <p:cNvPr id="423" name="Rectangle 17"/>
           <p:cNvSpPr/>
           <p:nvPr/>
         </p:nvSpPr>
@@ -14660,7 +14216,7 @@
       </p:sp>
       <p:sp>
         <p:nvSpPr>
-          <p:cNvPr id="419" name="Rectangle 18"/>
+          <p:cNvPr id="424" name="Rectangle 18"/>
           <p:cNvSpPr/>
           <p:nvPr/>
         </p:nvSpPr>
@@ -14719,7 +14275,7 @@
       </p:sp>
       <p:sp>
         <p:nvSpPr>
-          <p:cNvPr id="420" name="TextBox 19"/>
+          <p:cNvPr id="425" name="TextBox 19"/>
           <p:cNvSpPr/>
           <p:nvPr/>
         </p:nvSpPr>
@@ -14772,7 +14328,7 @@
       </p:sp>
       <p:sp>
         <p:nvSpPr>
-          <p:cNvPr id="421" name="Rectangle 20"/>
+          <p:cNvPr id="426" name="Rectangle 20"/>
           <p:cNvSpPr/>
           <p:nvPr/>
         </p:nvSpPr>
@@ -14831,7 +14387,7 @@
       </p:sp>
       <p:sp>
         <p:nvSpPr>
-          <p:cNvPr id="422" name="TextBox 21"/>
+          <p:cNvPr id="427" name="TextBox 21"/>
           <p:cNvSpPr/>
           <p:nvPr/>
         </p:nvSpPr>
@@ -14884,7 +14440,7 @@
       </p:sp>
       <p:sp>
         <p:nvSpPr>
-          <p:cNvPr id="423" name="TextBox 22"/>
+          <p:cNvPr id="428" name="TextBox 22"/>
           <p:cNvSpPr/>
           <p:nvPr/>
         </p:nvSpPr>
@@ -14954,7 +14510,7 @@
       </p:sp>
       <p:sp>
         <p:nvSpPr>
-          <p:cNvPr id="424" name="Rectangle 23"/>
+          <p:cNvPr id="429" name="Rectangle 23"/>
           <p:cNvSpPr/>
           <p:nvPr/>
         </p:nvSpPr>
@@ -15013,7 +14569,7 @@
       </p:sp>
       <p:sp>
         <p:nvSpPr>
-          <p:cNvPr id="425" name="TextBox 24"/>
+          <p:cNvPr id="430" name="TextBox 24"/>
           <p:cNvSpPr/>
           <p:nvPr/>
         </p:nvSpPr>
@@ -15066,7 +14622,7 @@
       </p:sp>
       <p:sp>
         <p:nvSpPr>
-          <p:cNvPr id="426" name="TextBox 25"/>
+          <p:cNvPr id="431" name="TextBox 25"/>
           <p:cNvSpPr/>
           <p:nvPr/>
         </p:nvSpPr>
@@ -15136,7 +14692,7 @@
       </p:sp>
       <p:sp>
         <p:nvSpPr>
-          <p:cNvPr id="427" name="Rectangle 26"/>
+          <p:cNvPr id="432" name="Rectangle 26"/>
           <p:cNvSpPr/>
           <p:nvPr/>
         </p:nvSpPr>
@@ -15195,7 +14751,7 @@
       </p:sp>
       <p:sp>
         <p:nvSpPr>
-          <p:cNvPr id="428" name="TextBox 27"/>
+          <p:cNvPr id="433" name="TextBox 27"/>
           <p:cNvSpPr/>
           <p:nvPr/>
         </p:nvSpPr>
@@ -15248,7 +14804,7 @@
       </p:sp>
       <p:sp>
         <p:nvSpPr>
-          <p:cNvPr id="429" name="TextBox 28"/>
+          <p:cNvPr id="434" name="TextBox 28"/>
           <p:cNvSpPr/>
           <p:nvPr/>
         </p:nvSpPr>
@@ -15335,7 +14891,7 @@
       </p:sp>
       <p:sp>
         <p:nvSpPr>
-          <p:cNvPr id="430" name="Rectangle 29"/>
+          <p:cNvPr id="435" name="Rectangle 29"/>
           <p:cNvSpPr/>
           <p:nvPr/>
         </p:nvSpPr>
@@ -15394,7 +14950,7 @@
       </p:sp>
       <p:sp>
         <p:nvSpPr>
-          <p:cNvPr id="431" name="TextBox 30"/>
+          <p:cNvPr id="436" name="TextBox 30"/>
           <p:cNvSpPr/>
           <p:nvPr/>
         </p:nvSpPr>
@@ -15447,7 +15003,7 @@
       </p:sp>
       <p:sp>
         <p:nvSpPr>
-          <p:cNvPr id="432" name="TextBox 31"/>
+          <p:cNvPr id="437" name="TextBox 31"/>
           <p:cNvSpPr/>
           <p:nvPr/>
         </p:nvSpPr>
@@ -15534,7 +15090,7 @@
       </p:sp>
       <p:sp>
         <p:nvSpPr>
-          <p:cNvPr id="433" name="TextBox 32"/>
+          <p:cNvPr id="438" name="TextBox 32"/>
           <p:cNvSpPr/>
           <p:nvPr/>
         </p:nvSpPr>
@@ -15617,7 +15173,7 @@
       </p:grpSpPr>
       <p:sp>
         <p:nvSpPr>
-          <p:cNvPr id="434" name="Rectangle 1"/>
+          <p:cNvPr id="439" name="Rectangle 1"/>
           <p:cNvSpPr/>
           <p:nvPr/>
         </p:nvSpPr>
@@ -15676,7 +15232,7 @@
       </p:sp>
       <p:sp>
         <p:nvSpPr>
-          <p:cNvPr id="435" name="Rectangle 2"/>
+          <p:cNvPr id="440" name="Rectangle 2"/>
           <p:cNvSpPr/>
           <p:nvPr/>
         </p:nvSpPr>
@@ -15735,7 +15291,7 @@
       </p:sp>
       <p:sp>
         <p:nvSpPr>
-          <p:cNvPr id="436" name="TextBox 3"/>
+          <p:cNvPr id="441" name="TextBox 3"/>
           <p:cNvSpPr/>
           <p:nvPr/>
         </p:nvSpPr>
@@ -15788,7 +15344,7 @@
       </p:sp>
       <p:sp>
         <p:nvSpPr>
-          <p:cNvPr id="437" name="TextBox 4"/>
+          <p:cNvPr id="442" name="TextBox 4"/>
           <p:cNvSpPr/>
           <p:nvPr/>
         </p:nvSpPr>
@@ -15841,7 +15397,7 @@
       </p:sp>
       <p:sp>
         <p:nvSpPr>
-          <p:cNvPr id="438" name="Rectangle 5"/>
+          <p:cNvPr id="443" name="Rectangle 5"/>
           <p:cNvSpPr/>
           <p:nvPr/>
         </p:nvSpPr>
@@ -15900,7 +15456,7 @@
       </p:sp>
       <p:sp>
         <p:nvSpPr>
-          <p:cNvPr id="439" name="Rectangle 6"/>
+          <p:cNvPr id="444" name="Rectangle 6"/>
           <p:cNvSpPr/>
           <p:nvPr/>
         </p:nvSpPr>
@@ -15959,7 +15515,7 @@
       </p:sp>
       <p:sp>
         <p:nvSpPr>
-          <p:cNvPr id="440" name="Rectangle 7"/>
+          <p:cNvPr id="445" name="Rectangle 7"/>
           <p:cNvSpPr/>
           <p:nvPr/>
         </p:nvSpPr>
@@ -16018,7 +15574,7 @@
       </p:sp>
       <p:sp>
         <p:nvSpPr>
-          <p:cNvPr id="441" name="TextBox 8"/>
+          <p:cNvPr id="446" name="TextBox 8"/>
           <p:cNvSpPr/>
           <p:nvPr/>
         </p:nvSpPr>
@@ -16071,7 +15627,7 @@
       </p:sp>
       <p:sp>
         <p:nvSpPr>
-          <p:cNvPr id="442" name="Rectangle 9"/>
+          <p:cNvPr id="447" name="Rectangle 9"/>
           <p:cNvSpPr/>
           <p:nvPr/>
         </p:nvSpPr>
@@ -16130,7 +15686,7 @@
       </p:sp>
       <p:sp>
         <p:nvSpPr>
-          <p:cNvPr id="443" name="Rectangle 10"/>
+          <p:cNvPr id="448" name="Rectangle 10"/>
           <p:cNvSpPr/>
           <p:nvPr/>
         </p:nvSpPr>
@@ -16189,7 +15745,7 @@
       </p:sp>
       <p:sp>
         <p:nvSpPr>
-          <p:cNvPr id="444" name="TextBox 11"/>
+          <p:cNvPr id="449" name="TextBox 11"/>
           <p:cNvSpPr/>
           <p:nvPr/>
         </p:nvSpPr>
@@ -16242,7 +15798,7 @@
       </p:sp>
       <p:sp>
         <p:nvSpPr>
-          <p:cNvPr id="445" name="TextBox 12"/>
+          <p:cNvPr id="450" name="TextBox 12"/>
           <p:cNvSpPr/>
           <p:nvPr/>
         </p:nvSpPr>
@@ -16304,7 +15860,7 @@
       </p:sp>
       <p:sp>
         <p:nvSpPr>
-          <p:cNvPr id="446" name="TextBox 13"/>
+          <p:cNvPr id="451" name="TextBox 13"/>
           <p:cNvSpPr/>
           <p:nvPr/>
         </p:nvSpPr>
@@ -16357,7 +15913,7 @@
       </p:sp>
       <p:sp>
         <p:nvSpPr>
-          <p:cNvPr id="447" name="TextBox 14"/>
+          <p:cNvPr id="452" name="TextBox 14"/>
           <p:cNvSpPr/>
           <p:nvPr/>
         </p:nvSpPr>
@@ -16427,7 +15983,7 @@
       </p:sp>
       <p:sp>
         <p:nvSpPr>
-          <p:cNvPr id="448" name="Rectangle 15"/>
+          <p:cNvPr id="453" name="Rectangle 15"/>
           <p:cNvSpPr/>
           <p:nvPr/>
         </p:nvSpPr>
@@ -16486,7 +16042,7 @@
       </p:sp>
       <p:sp>
         <p:nvSpPr>
-          <p:cNvPr id="449" name="Rectangle 16"/>
+          <p:cNvPr id="454" name="Rectangle 16"/>
           <p:cNvSpPr/>
           <p:nvPr/>
         </p:nvSpPr>
@@ -16545,7 +16101,7 @@
       </p:sp>
       <p:sp>
         <p:nvSpPr>
-          <p:cNvPr id="450" name="TextBox 17"/>
+          <p:cNvPr id="455" name="TextBox 17"/>
           <p:cNvSpPr/>
           <p:nvPr/>
         </p:nvSpPr>
@@ -16598,7 +16154,7 @@
       </p:sp>
       <p:sp>
         <p:nvSpPr>
-          <p:cNvPr id="451" name="TextBox 18"/>
+          <p:cNvPr id="456" name="TextBox 18"/>
           <p:cNvSpPr/>
           <p:nvPr/>
         </p:nvSpPr>
@@ -16660,7 +16216,7 @@
       </p:sp>
       <p:sp>
         <p:nvSpPr>
-          <p:cNvPr id="452" name="TextBox 19"/>
+          <p:cNvPr id="457" name="TextBox 19"/>
           <p:cNvSpPr/>
           <p:nvPr/>
         </p:nvSpPr>
@@ -16713,7 +16269,7 @@
       </p:sp>
       <p:sp>
         <p:nvSpPr>
-          <p:cNvPr id="453" name="TextBox 20"/>
+          <p:cNvPr id="458" name="TextBox 20"/>
           <p:cNvSpPr/>
           <p:nvPr/>
         </p:nvSpPr>
@@ -16766,7 +16322,7 @@
       </p:sp>
       <p:sp>
         <p:nvSpPr>
-          <p:cNvPr id="454" name="Rectangle 21"/>
+          <p:cNvPr id="459" name="Rectangle 21"/>
           <p:cNvSpPr/>
           <p:nvPr/>
         </p:nvSpPr>
@@ -16825,7 +16381,7 @@
       </p:sp>
       <p:sp>
         <p:nvSpPr>
-          <p:cNvPr id="455" name="Rectangle 22"/>
+          <p:cNvPr id="460" name="Rectangle 22"/>
           <p:cNvSpPr/>
           <p:nvPr/>
         </p:nvSpPr>
@@ -16884,7 +16440,7 @@
       </p:sp>
       <p:sp>
         <p:nvSpPr>
-          <p:cNvPr id="456" name="TextBox 23"/>
+          <p:cNvPr id="461" name="TextBox 23"/>
           <p:cNvSpPr/>
           <p:nvPr/>
         </p:nvSpPr>
@@ -16937,7 +16493,7 @@
       </p:sp>
       <p:sp>
         <p:nvSpPr>
-          <p:cNvPr id="457" name="TextBox 24"/>
+          <p:cNvPr id="462" name="TextBox 24"/>
           <p:cNvSpPr/>
           <p:nvPr/>
         </p:nvSpPr>
@@ -16999,7 +16555,7 @@
       </p:sp>
       <p:sp>
         <p:nvSpPr>
-          <p:cNvPr id="458" name="TextBox 25"/>
+          <p:cNvPr id="463" name="TextBox 25"/>
           <p:cNvSpPr/>
           <p:nvPr/>
         </p:nvSpPr>
@@ -17078,7 +16634,7 @@
       </p:sp>
       <p:sp>
         <p:nvSpPr>
-          <p:cNvPr id="459" name="TextBox 26"/>
+          <p:cNvPr id="464" name="TextBox 26"/>
           <p:cNvSpPr/>
           <p:nvPr/>
         </p:nvSpPr>
@@ -17131,7 +16687,7 @@
       </p:sp>
       <p:sp>
         <p:nvSpPr>
-          <p:cNvPr id="460" name="Rectangle 27"/>
+          <p:cNvPr id="465" name="Rectangle 27"/>
           <p:cNvSpPr/>
           <p:nvPr/>
         </p:nvSpPr>
@@ -17190,7 +16746,7 @@
       </p:sp>
       <p:sp>
         <p:nvSpPr>
-          <p:cNvPr id="461" name="Rectangle 28"/>
+          <p:cNvPr id="466" name="Rectangle 28"/>
           <p:cNvSpPr/>
           <p:nvPr/>
         </p:nvSpPr>
@@ -17249,7 +16805,7 @@
       </p:sp>
       <p:sp>
         <p:nvSpPr>
-          <p:cNvPr id="462" name="TextBox 29"/>
+          <p:cNvPr id="467" name="TextBox 29"/>
           <p:cNvSpPr/>
           <p:nvPr/>
         </p:nvSpPr>
@@ -17302,7 +16858,7 @@
       </p:sp>
       <p:sp>
         <p:nvSpPr>
-          <p:cNvPr id="463" name="Rectangle 30"/>
+          <p:cNvPr id="468" name="Rectangle 30"/>
           <p:cNvSpPr/>
           <p:nvPr/>
         </p:nvSpPr>
@@ -17361,7 +16917,7 @@
       </p:sp>
       <p:sp>
         <p:nvSpPr>
-          <p:cNvPr id="464" name="Rectangle 31"/>
+          <p:cNvPr id="469" name="Rectangle 31"/>
           <p:cNvSpPr/>
           <p:nvPr/>
         </p:nvSpPr>
@@ -17420,7 +16976,7 @@
       </p:sp>
       <p:sp>
         <p:nvSpPr>
-          <p:cNvPr id="465" name="TextBox 32"/>
+          <p:cNvPr id="470" name="TextBox 32"/>
           <p:cNvSpPr/>
           <p:nvPr/>
         </p:nvSpPr>
@@ -17473,7 +17029,7 @@
       </p:sp>
       <p:sp>
         <p:nvSpPr>
-          <p:cNvPr id="466" name="TextBox 33"/>
+          <p:cNvPr id="471" name="TextBox 33"/>
           <p:cNvSpPr/>
           <p:nvPr/>
         </p:nvSpPr>
@@ -17535,7 +17091,7 @@
       </p:sp>
       <p:sp>
         <p:nvSpPr>
-          <p:cNvPr id="467" name="TextBox 34"/>
+          <p:cNvPr id="472" name="TextBox 34"/>
           <p:cNvSpPr/>
           <p:nvPr/>
         </p:nvSpPr>
@@ -17605,7 +17161,7 @@
       </p:sp>
       <p:sp>
         <p:nvSpPr>
-          <p:cNvPr id="468" name="TextBox 35"/>
+          <p:cNvPr id="473" name="TextBox 35"/>
           <p:cNvSpPr/>
           <p:nvPr/>
         </p:nvSpPr>
@@ -17658,7 +17214,7 @@
       </p:sp>
       <p:sp>
         <p:nvSpPr>
-          <p:cNvPr id="469" name="Rectangle 36"/>
+          <p:cNvPr id="474" name="Rectangle 36"/>
           <p:cNvSpPr/>
           <p:nvPr/>
         </p:nvSpPr>
@@ -17717,7 +17273,7 @@
       </p:sp>
       <p:sp>
         <p:nvSpPr>
-          <p:cNvPr id="470" name="Rectangle 37"/>
+          <p:cNvPr id="475" name="Rectangle 37"/>
           <p:cNvSpPr/>
           <p:nvPr/>
         </p:nvSpPr>
@@ -17776,7 +17332,7 @@
       </p:sp>
       <p:sp>
         <p:nvSpPr>
-          <p:cNvPr id="471" name="TextBox 38"/>
+          <p:cNvPr id="476" name="TextBox 38"/>
           <p:cNvSpPr/>
           <p:nvPr/>
         </p:nvSpPr>
@@ -17829,7 +17385,7 @@
       </p:sp>
       <p:sp>
         <p:nvSpPr>
-          <p:cNvPr id="472" name="TextBox 39"/>
+          <p:cNvPr id="477" name="TextBox 39"/>
           <p:cNvSpPr/>
           <p:nvPr/>
         </p:nvSpPr>
@@ -17891,7 +17447,7 @@
       </p:sp>
       <p:sp>
         <p:nvSpPr>
-          <p:cNvPr id="473" name="TextBox 40"/>
+          <p:cNvPr id="478" name="TextBox 40"/>
           <p:cNvSpPr/>
           <p:nvPr/>
         </p:nvSpPr>
@@ -17961,7 +17517,7 @@
       </p:sp>
       <p:sp>
         <p:nvSpPr>
-          <p:cNvPr id="474" name="TextBox 41"/>
+          <p:cNvPr id="479" name="TextBox 41"/>
           <p:cNvSpPr/>
           <p:nvPr/>
         </p:nvSpPr>
@@ -18014,7 +17570,7 @@
       </p:sp>
       <p:sp>
         <p:nvSpPr>
-          <p:cNvPr id="475" name="Rectangle 42"/>
+          <p:cNvPr id="480" name="Rectangle 42"/>
           <p:cNvSpPr/>
           <p:nvPr/>
         </p:nvSpPr>
@@ -18073,7 +17629,7 @@
       </p:sp>
       <p:sp>
         <p:nvSpPr>
-          <p:cNvPr id="476" name="Rectangle 43"/>
+          <p:cNvPr id="481" name="Rectangle 43"/>
           <p:cNvSpPr/>
           <p:nvPr/>
         </p:nvSpPr>
@@ -18132,7 +17688,7 @@
       </p:sp>
       <p:sp>
         <p:nvSpPr>
-          <p:cNvPr id="477" name="TextBox 44"/>
+          <p:cNvPr id="482" name="TextBox 44"/>
           <p:cNvSpPr/>
           <p:nvPr/>
         </p:nvSpPr>
@@ -18185,7 +17741,7 @@
       </p:sp>
       <p:sp>
         <p:nvSpPr>
-          <p:cNvPr id="478" name="TextBox 45"/>
+          <p:cNvPr id="483" name="TextBox 45"/>
           <p:cNvSpPr/>
           <p:nvPr/>
         </p:nvSpPr>
@@ -18247,7 +17803,7 @@
       </p:sp>
       <p:sp>
         <p:nvSpPr>
-          <p:cNvPr id="479" name="TextBox 46"/>
+          <p:cNvPr id="484" name="TextBox 46"/>
           <p:cNvSpPr/>
           <p:nvPr/>
         </p:nvSpPr>
@@ -18317,7 +17873,7 @@
       </p:sp>
       <p:sp>
         <p:nvSpPr>
-          <p:cNvPr id="480" name="TextBox 47"/>
+          <p:cNvPr id="485" name="TextBox 47"/>
           <p:cNvSpPr/>
           <p:nvPr/>
         </p:nvSpPr>
@@ -18370,7 +17926,7 @@
       </p:sp>
       <p:sp>
         <p:nvSpPr>
-          <p:cNvPr id="481" name="TextBox 48"/>
+          <p:cNvPr id="486" name="TextBox 48"/>
           <p:cNvSpPr/>
           <p:nvPr/>
         </p:nvSpPr>
@@ -18453,7 +18009,7 @@
       </p:grpSpPr>
       <p:sp>
         <p:nvSpPr>
-          <p:cNvPr id="482" name="Rectangle 1"/>
+          <p:cNvPr id="487" name="Rectangle 1"/>
           <p:cNvSpPr/>
           <p:nvPr/>
         </p:nvSpPr>
@@ -18512,7 +18068,7 @@
       </p:sp>
       <p:sp>
         <p:nvSpPr>
-          <p:cNvPr id="483" name="Rectangle 2"/>
+          <p:cNvPr id="488" name="Rectangle 2"/>
           <p:cNvSpPr/>
           <p:nvPr/>
         </p:nvSpPr>
@@ -18571,7 +18127,7 @@
       </p:sp>
       <p:sp>
         <p:nvSpPr>
-          <p:cNvPr id="484" name="TextBox 3"/>
+          <p:cNvPr id="489" name="TextBox 3"/>
           <p:cNvSpPr/>
           <p:nvPr/>
         </p:nvSpPr>
@@ -18624,7 +18180,7 @@
       </p:sp>
       <p:sp>
         <p:nvSpPr>
-          <p:cNvPr id="485" name="TextBox 4"/>
+          <p:cNvPr id="490" name="TextBox 4"/>
           <p:cNvSpPr/>
           <p:nvPr/>
         </p:nvSpPr>
@@ -18677,7 +18233,7 @@
       </p:sp>
       <p:sp>
         <p:nvSpPr>
-          <p:cNvPr id="486" name="Rectangle 5"/>
+          <p:cNvPr id="491" name="Rectangle 5"/>
           <p:cNvSpPr/>
           <p:nvPr/>
         </p:nvSpPr>
@@ -18736,7 +18292,7 @@
       </p:sp>
       <p:sp>
         <p:nvSpPr>
-          <p:cNvPr id="487" name="Rectangle 6"/>
+          <p:cNvPr id="492" name="Rectangle 6"/>
           <p:cNvSpPr/>
           <p:nvPr/>
         </p:nvSpPr>
@@ -18795,7 +18351,7 @@
       </p:sp>
       <p:sp>
         <p:nvSpPr>
-          <p:cNvPr id="488" name="TextBox 7"/>
+          <p:cNvPr id="493" name="TextBox 7"/>
           <p:cNvSpPr/>
           <p:nvPr/>
         </p:nvSpPr>
@@ -18857,7 +18413,7 @@
       </p:sp>
       <p:sp>
         <p:nvSpPr>
-          <p:cNvPr id="489" name="TextBox 8"/>
+          <p:cNvPr id="494" name="TextBox 8"/>
           <p:cNvSpPr/>
           <p:nvPr/>
         </p:nvSpPr>
@@ -18953,7 +18509,7 @@
       </p:sp>
       <p:sp>
         <p:nvSpPr>
-          <p:cNvPr id="490" name="TextBox 9"/>
+          <p:cNvPr id="495" name="TextBox 9"/>
           <p:cNvSpPr/>
           <p:nvPr/>
         </p:nvSpPr>
@@ -19006,7 +18562,7 @@
       </p:sp>
       <p:sp>
         <p:nvSpPr>
-          <p:cNvPr id="491" name="Rectangle 10"/>
+          <p:cNvPr id="496" name="Rectangle 10"/>
           <p:cNvSpPr/>
           <p:nvPr/>
         </p:nvSpPr>
@@ -19065,7 +18621,7 @@
       </p:sp>
       <p:sp>
         <p:nvSpPr>
-          <p:cNvPr id="492" name="TextBox 11"/>
+          <p:cNvPr id="497" name="TextBox 11"/>
           <p:cNvSpPr/>
           <p:nvPr/>
         </p:nvSpPr>
@@ -19127,7 +18683,7 @@
       </p:sp>
       <p:sp>
         <p:nvSpPr>
-          <p:cNvPr id="493" name="TextBox 12"/>
+          <p:cNvPr id="498" name="TextBox 12"/>
           <p:cNvSpPr/>
           <p:nvPr/>
         </p:nvSpPr>
@@ -19214,7 +18770,7 @@
       </p:sp>
       <p:sp>
         <p:nvSpPr>
-          <p:cNvPr id="494" name="TextBox 13"/>
+          <p:cNvPr id="499" name="TextBox 13"/>
           <p:cNvSpPr/>
           <p:nvPr/>
         </p:nvSpPr>
@@ -19267,7 +18823,7 @@
       </p:sp>
       <p:sp>
         <p:nvSpPr>
-          <p:cNvPr id="495" name="Rectangle 14"/>
+          <p:cNvPr id="500" name="Rectangle 14"/>
           <p:cNvSpPr/>
           <p:nvPr/>
         </p:nvSpPr>
@@ -19326,7 +18882,7 @@
       </p:sp>
       <p:sp>
         <p:nvSpPr>
-          <p:cNvPr id="496" name="TextBox 15"/>
+          <p:cNvPr id="501" name="TextBox 15"/>
           <p:cNvSpPr/>
           <p:nvPr/>
         </p:nvSpPr>
@@ -19388,7 +18944,7 @@
       </p:sp>
       <p:sp>
         <p:nvSpPr>
-          <p:cNvPr id="497" name="TextBox 16"/>
+          <p:cNvPr id="502" name="TextBox 16"/>
           <p:cNvSpPr/>
           <p:nvPr/>
         </p:nvSpPr>
@@ -19475,7 +19031,7 @@
       </p:sp>
       <p:sp>
         <p:nvSpPr>
-          <p:cNvPr id="498" name="TextBox 17"/>
+          <p:cNvPr id="503" name="TextBox 17"/>
           <p:cNvSpPr/>
           <p:nvPr/>
         </p:nvSpPr>
@@ -19528,7 +19084,7 @@
       </p:sp>
       <p:sp>
         <p:nvSpPr>
-          <p:cNvPr id="499" name="Rectangle 18"/>
+          <p:cNvPr id="504" name="Rectangle 18"/>
           <p:cNvSpPr/>
           <p:nvPr/>
         </p:nvSpPr>
@@ -19587,7 +19143,7 @@
       </p:sp>
       <p:sp>
         <p:nvSpPr>
-          <p:cNvPr id="500" name="TextBox 19"/>
+          <p:cNvPr id="505" name="TextBox 19"/>
           <p:cNvSpPr/>
           <p:nvPr/>
         </p:nvSpPr>
@@ -19649,7 +19205,7 @@
       </p:sp>
       <p:sp>
         <p:nvSpPr>
-          <p:cNvPr id="501" name="TextBox 20"/>
+          <p:cNvPr id="506" name="TextBox 20"/>
           <p:cNvSpPr/>
           <p:nvPr/>
         </p:nvSpPr>
@@ -19736,7 +19292,7 @@
       </p:sp>
       <p:sp>
         <p:nvSpPr>
-          <p:cNvPr id="502" name="Rectangle 21"/>
+          <p:cNvPr id="507" name="Rectangle 21"/>
           <p:cNvSpPr/>
           <p:nvPr/>
         </p:nvSpPr>
@@ -19795,7 +19351,7 @@
       </p:sp>
       <p:sp>
         <p:nvSpPr>
-          <p:cNvPr id="503" name="Rectangle 22"/>
+          <p:cNvPr id="508" name="Rectangle 22"/>
           <p:cNvSpPr/>
           <p:nvPr/>
         </p:nvSpPr>
@@ -19854,7 +19410,7 @@
       </p:sp>
       <p:sp>
         <p:nvSpPr>
-          <p:cNvPr id="504" name="TextBox 23"/>
+          <p:cNvPr id="509" name="TextBox 23"/>
           <p:cNvSpPr/>
           <p:nvPr/>
         </p:nvSpPr>
@@ -19907,7 +19463,7 @@
       </p:sp>
       <p:sp>
         <p:nvSpPr>
-          <p:cNvPr id="505" name="TextBox 24"/>
+          <p:cNvPr id="510" name="TextBox 24"/>
           <p:cNvSpPr/>
           <p:nvPr/>
         </p:nvSpPr>
@@ -19960,7 +19516,7 @@
       </p:sp>
       <p:sp>
         <p:nvSpPr>
-          <p:cNvPr id="506" name="TextBox 25"/>
+          <p:cNvPr id="511" name="TextBox 25"/>
           <p:cNvSpPr/>
           <p:nvPr/>
         </p:nvSpPr>
@@ -20013,7 +19569,7 @@
       </p:sp>
       <p:sp>
         <p:nvSpPr>
-          <p:cNvPr id="507" name="TextBox 26"/>
+          <p:cNvPr id="512" name="TextBox 26"/>
           <p:cNvSpPr/>
           <p:nvPr/>
         </p:nvSpPr>
@@ -20066,7 +19622,7 @@
       </p:sp>
       <p:sp>
         <p:nvSpPr>
-          <p:cNvPr id="508" name="TextBox 27"/>
+          <p:cNvPr id="513" name="TextBox 27"/>
           <p:cNvSpPr/>
           <p:nvPr/>
         </p:nvSpPr>
@@ -20119,7 +19675,7 @@
       </p:sp>
       <p:sp>
         <p:nvSpPr>
-          <p:cNvPr id="509" name="TextBox 28"/>
+          <p:cNvPr id="514" name="TextBox 28"/>
           <p:cNvSpPr/>
           <p:nvPr/>
         </p:nvSpPr>
@@ -20172,7 +19728,7 @@
       </p:sp>
       <p:sp>
         <p:nvSpPr>
-          <p:cNvPr id="510" name="TextBox 29"/>
+          <p:cNvPr id="515" name="TextBox 29"/>
           <p:cNvSpPr/>
           <p:nvPr/>
         </p:nvSpPr>
@@ -20225,7 +19781,7 @@
       </p:sp>
       <p:sp>
         <p:nvSpPr>
-          <p:cNvPr id="511" name="TextBox 30"/>
+          <p:cNvPr id="516" name="TextBox 30"/>
           <p:cNvSpPr/>
           <p:nvPr/>
         </p:nvSpPr>
@@ -20278,7 +19834,7 @@
       </p:sp>
       <p:sp>
         <p:nvSpPr>
-          <p:cNvPr id="512" name="TextBox 31"/>
+          <p:cNvPr id="517" name="TextBox 31"/>
           <p:cNvSpPr/>
           <p:nvPr/>
         </p:nvSpPr>
@@ -20331,7 +19887,7 @@
       </p:sp>
       <p:sp>
         <p:nvSpPr>
-          <p:cNvPr id="513" name="TextBox 32"/>
+          <p:cNvPr id="518" name="TextBox 32"/>
           <p:cNvSpPr/>
           <p:nvPr/>
         </p:nvSpPr>
@@ -20384,7 +19940,7 @@
       </p:sp>
       <p:sp>
         <p:nvSpPr>
-          <p:cNvPr id="514" name="TextBox 33"/>
+          <p:cNvPr id="519" name="TextBox 33"/>
           <p:cNvSpPr/>
           <p:nvPr/>
         </p:nvSpPr>
@@ -20437,7 +19993,7 @@
       </p:sp>
       <p:sp>
         <p:nvSpPr>
-          <p:cNvPr id="515" name="TextBox 34"/>
+          <p:cNvPr id="520" name="TextBox 34"/>
           <p:cNvSpPr/>
           <p:nvPr/>
         </p:nvSpPr>
@@ -20490,7 +20046,7 @@
       </p:sp>
       <p:sp>
         <p:nvSpPr>
-          <p:cNvPr id="516" name="TextBox 35"/>
+          <p:cNvPr id="521" name="TextBox 35"/>
           <p:cNvSpPr/>
           <p:nvPr/>
         </p:nvSpPr>
@@ -20543,7 +20099,7 @@
       </p:sp>
       <p:sp>
         <p:nvSpPr>
-          <p:cNvPr id="517" name="Rectangle 36"/>
+          <p:cNvPr id="522" name="Rectangle 36"/>
           <p:cNvSpPr/>
           <p:nvPr/>
         </p:nvSpPr>
@@ -20602,7 +20158,7 @@
       </p:sp>
       <p:sp>
         <p:nvSpPr>
-          <p:cNvPr id="518" name="Rectangle 37"/>
+          <p:cNvPr id="523" name="Rectangle 37"/>
           <p:cNvSpPr/>
           <p:nvPr/>
         </p:nvSpPr>
@@ -20661,7 +20217,7 @@
       </p:sp>
       <p:sp>
         <p:nvSpPr>
-          <p:cNvPr id="519" name="TextBox 38"/>
+          <p:cNvPr id="524" name="TextBox 38"/>
           <p:cNvSpPr/>
           <p:nvPr/>
         </p:nvSpPr>
@@ -20714,7 +20270,7 @@
       </p:sp>
       <p:sp>
         <p:nvSpPr>
-          <p:cNvPr id="520" name="TextBox 39"/>
+          <p:cNvPr id="525" name="TextBox 39"/>
           <p:cNvSpPr/>
           <p:nvPr/>
         </p:nvSpPr>
@@ -20767,7 +20323,7 @@
       </p:sp>
       <p:sp>
         <p:nvSpPr>
-          <p:cNvPr id="521" name="TextBox 40"/>
+          <p:cNvPr id="526" name="TextBox 40"/>
           <p:cNvSpPr/>
           <p:nvPr/>
         </p:nvSpPr>
@@ -20820,7 +20376,7 @@
       </p:sp>
       <p:sp>
         <p:nvSpPr>
-          <p:cNvPr id="522" name="TextBox 41"/>
+          <p:cNvPr id="527" name="TextBox 41"/>
           <p:cNvSpPr/>
           <p:nvPr/>
         </p:nvSpPr>
@@ -20873,7 +20429,7 @@
       </p:sp>
       <p:sp>
         <p:nvSpPr>
-          <p:cNvPr id="523" name="TextBox 42"/>
+          <p:cNvPr id="528" name="TextBox 42"/>
           <p:cNvSpPr/>
           <p:nvPr/>
         </p:nvSpPr>
@@ -20926,7 +20482,7 @@
       </p:sp>
       <p:sp>
         <p:nvSpPr>
-          <p:cNvPr id="524" name="TextBox 43"/>
+          <p:cNvPr id="529" name="TextBox 43"/>
           <p:cNvSpPr/>
           <p:nvPr/>
         </p:nvSpPr>
@@ -20979,7 +20535,7 @@
       </p:sp>
       <p:sp>
         <p:nvSpPr>
-          <p:cNvPr id="525" name="TextBox 44"/>
+          <p:cNvPr id="530" name="TextBox 44"/>
           <p:cNvSpPr/>
           <p:nvPr/>
         </p:nvSpPr>
@@ -21032,7 +20588,7 @@
       </p:sp>
       <p:sp>
         <p:nvSpPr>
-          <p:cNvPr id="526" name="TextBox 45"/>
+          <p:cNvPr id="531" name="TextBox 45"/>
           <p:cNvSpPr/>
           <p:nvPr/>
         </p:nvSpPr>
@@ -21085,7 +20641,7 @@
       </p:sp>
       <p:sp>
         <p:nvSpPr>
-          <p:cNvPr id="527" name="TextBox 46"/>
+          <p:cNvPr id="532" name="TextBox 46"/>
           <p:cNvSpPr/>
           <p:nvPr/>
         </p:nvSpPr>
@@ -21138,7 +20694,7 @@
       </p:sp>
       <p:sp>
         <p:nvSpPr>
-          <p:cNvPr id="528" name="TextBox 47"/>
+          <p:cNvPr id="533" name="TextBox 47"/>
           <p:cNvSpPr/>
           <p:nvPr/>
         </p:nvSpPr>
@@ -21191,7 +20747,7 @@
       </p:sp>
       <p:sp>
         <p:nvSpPr>
-          <p:cNvPr id="529" name="TextBox 48"/>
+          <p:cNvPr id="534" name="TextBox 48"/>
           <p:cNvSpPr/>
           <p:nvPr/>
         </p:nvSpPr>
@@ -21244,7 +20800,7 @@
       </p:sp>
       <p:sp>
         <p:nvSpPr>
-          <p:cNvPr id="530" name="TextBox 49"/>
+          <p:cNvPr id="535" name="TextBox 49"/>
           <p:cNvSpPr/>
           <p:nvPr/>
         </p:nvSpPr>
@@ -21297,7 +20853,7 @@
       </p:sp>
       <p:sp>
         <p:nvSpPr>
-          <p:cNvPr id="531" name="TextBox 50"/>
+          <p:cNvPr id="536" name="TextBox 50"/>
           <p:cNvSpPr/>
           <p:nvPr/>
         </p:nvSpPr>
@@ -21350,7 +20906,7 @@
       </p:sp>
       <p:sp>
         <p:nvSpPr>
-          <p:cNvPr id="532" name="TextBox 51"/>
+          <p:cNvPr id="537" name="TextBox 51"/>
           <p:cNvSpPr/>
           <p:nvPr/>
         </p:nvSpPr>
@@ -21403,7 +20959,7 @@
       </p:sp>
       <p:sp>
         <p:nvSpPr>
-          <p:cNvPr id="533" name="TextBox 52"/>
+          <p:cNvPr id="538" name="TextBox 52"/>
           <p:cNvSpPr/>
           <p:nvPr/>
         </p:nvSpPr>
@@ -21456,7 +21012,7 @@
       </p:sp>
       <p:sp>
         <p:nvSpPr>
-          <p:cNvPr id="534" name="TextBox 53"/>
+          <p:cNvPr id="539" name="TextBox 53"/>
           <p:cNvSpPr/>
           <p:nvPr/>
         </p:nvSpPr>
@@ -21539,7 +21095,7 @@
       </p:grpSpPr>
       <p:sp>
         <p:nvSpPr>
-          <p:cNvPr id="535" name="Rectangle 1"/>
+          <p:cNvPr id="540" name="Rectangle 1"/>
           <p:cNvSpPr/>
           <p:nvPr/>
         </p:nvSpPr>
@@ -21598,7 +21154,7 @@
       </p:sp>
       <p:sp>
         <p:nvSpPr>
-          <p:cNvPr id="536" name="Rectangle 2"/>
+          <p:cNvPr id="541" name="Rectangle 2"/>
           <p:cNvSpPr/>
           <p:nvPr/>
         </p:nvSpPr>
@@ -21657,7 +21213,7 @@
       </p:sp>
       <p:sp>
         <p:nvSpPr>
-          <p:cNvPr id="537" name="TextBox 3"/>
+          <p:cNvPr id="542" name="TextBox 3"/>
           <p:cNvSpPr/>
           <p:nvPr/>
         </p:nvSpPr>
@@ -21710,7 +21266,7 @@
       </p:sp>
       <p:sp>
         <p:nvSpPr>
-          <p:cNvPr id="538" name="TextBox 4"/>
+          <p:cNvPr id="543" name="TextBox 4"/>
           <p:cNvSpPr/>
           <p:nvPr/>
         </p:nvSpPr>
@@ -21763,7 +21319,7 @@
       </p:sp>
       <p:sp>
         <p:nvSpPr>
-          <p:cNvPr id="539" name="Rectangle 5"/>
+          <p:cNvPr id="544" name="Rectangle 5"/>
           <p:cNvSpPr/>
           <p:nvPr/>
         </p:nvSpPr>
@@ -21822,7 +21378,7 @@
       </p:sp>
       <p:sp>
         <p:nvSpPr>
-          <p:cNvPr id="540" name="Rectangle 6"/>
+          <p:cNvPr id="545" name="Rectangle 6"/>
           <p:cNvSpPr/>
           <p:nvPr/>
         </p:nvSpPr>
@@ -21881,7 +21437,7 @@
       </p:sp>
       <p:sp>
         <p:nvSpPr>
-          <p:cNvPr id="541" name="TextBox 7"/>
+          <p:cNvPr id="546" name="TextBox 7"/>
           <p:cNvSpPr/>
           <p:nvPr/>
         </p:nvSpPr>
@@ -21934,7 +21490,7 @@
       </p:sp>
       <p:sp>
         <p:nvSpPr>
-          <p:cNvPr id="542" name="TextBox 8"/>
+          <p:cNvPr id="547" name="TextBox 8"/>
           <p:cNvSpPr/>
           <p:nvPr/>
         </p:nvSpPr>
@@ -21987,7 +21543,7 @@
       </p:sp>
       <p:sp>
         <p:nvSpPr>
-          <p:cNvPr id="543" name="TextBox 9"/>
+          <p:cNvPr id="548" name="TextBox 9"/>
           <p:cNvSpPr/>
           <p:nvPr/>
         </p:nvSpPr>
@@ -22040,7 +21596,7 @@
       </p:sp>
       <p:sp>
         <p:nvSpPr>
-          <p:cNvPr id="544" name="Rectangle 10"/>
+          <p:cNvPr id="549" name="Rectangle 10"/>
           <p:cNvSpPr/>
           <p:nvPr/>
         </p:nvSpPr>
@@ -22099,7 +21655,7 @@
       </p:sp>
       <p:sp>
         <p:nvSpPr>
-          <p:cNvPr id="545" name="Rectangle 11"/>
+          <p:cNvPr id="550" name="Rectangle 11"/>
           <p:cNvSpPr/>
           <p:nvPr/>
         </p:nvSpPr>
@@ -22158,7 +21714,7 @@
       </p:sp>
       <p:sp>
         <p:nvSpPr>
-          <p:cNvPr id="546" name="TextBox 12"/>
+          <p:cNvPr id="551" name="TextBox 12"/>
           <p:cNvSpPr/>
           <p:nvPr/>
         </p:nvSpPr>
@@ -22211,7 +21767,7 @@
       </p:sp>
       <p:sp>
         <p:nvSpPr>
-          <p:cNvPr id="547" name="TextBox 13"/>
+          <p:cNvPr id="552" name="TextBox 13"/>
           <p:cNvSpPr/>
           <p:nvPr/>
         </p:nvSpPr>
@@ -22264,7 +21820,7 @@
       </p:sp>
       <p:sp>
         <p:nvSpPr>
-          <p:cNvPr id="548" name="TextBox 14"/>
+          <p:cNvPr id="553" name="TextBox 14"/>
           <p:cNvSpPr/>
           <p:nvPr/>
         </p:nvSpPr>
@@ -22317,7 +21873,7 @@
       </p:sp>
       <p:sp>
         <p:nvSpPr>
-          <p:cNvPr id="549" name="Rectangle 15"/>
+          <p:cNvPr id="554" name="Rectangle 15"/>
           <p:cNvSpPr/>
           <p:nvPr/>
         </p:nvSpPr>
@@ -22376,7 +21932,7 @@
       </p:sp>
       <p:sp>
         <p:nvSpPr>
-          <p:cNvPr id="550" name="Rectangle 16"/>
+          <p:cNvPr id="555" name="Rectangle 16"/>
           <p:cNvSpPr/>
           <p:nvPr/>
         </p:nvSpPr>
@@ -22435,7 +21991,7 @@
       </p:sp>
       <p:sp>
         <p:nvSpPr>
-          <p:cNvPr id="551" name="TextBox 17"/>
+          <p:cNvPr id="556" name="TextBox 17"/>
           <p:cNvSpPr/>
           <p:nvPr/>
         </p:nvSpPr>
@@ -22488,7 +22044,7 @@
       </p:sp>
       <p:sp>
         <p:nvSpPr>
-          <p:cNvPr id="552" name="TextBox 18"/>
+          <p:cNvPr id="557" name="TextBox 18"/>
           <p:cNvSpPr/>
           <p:nvPr/>
         </p:nvSpPr>
@@ -22541,7 +22097,7 @@
       </p:sp>
       <p:sp>
         <p:nvSpPr>
-          <p:cNvPr id="553" name="TextBox 19"/>
+          <p:cNvPr id="558" name="TextBox 19"/>
           <p:cNvSpPr/>
           <p:nvPr/>
         </p:nvSpPr>
@@ -22594,7 +22150,7 @@
       </p:sp>
       <p:sp>
         <p:nvSpPr>
-          <p:cNvPr id="554" name="Rectangle 20"/>
+          <p:cNvPr id="559" name="Rectangle 20"/>
           <p:cNvSpPr/>
           <p:nvPr/>
         </p:nvSpPr>
@@ -22653,7 +22209,7 @@
       </p:sp>
       <p:sp>
         <p:nvSpPr>
-          <p:cNvPr id="555" name="Rectangle 21"/>
+          <p:cNvPr id="560" name="Rectangle 21"/>
           <p:cNvSpPr/>
           <p:nvPr/>
         </p:nvSpPr>
@@ -22712,7 +22268,7 @@
       </p:sp>
       <p:sp>
         <p:nvSpPr>
-          <p:cNvPr id="556" name="TextBox 22"/>
+          <p:cNvPr id="561" name="TextBox 22"/>
           <p:cNvSpPr/>
           <p:nvPr/>
         </p:nvSpPr>
@@ -22765,7 +22321,7 @@
       </p:sp>
       <p:sp>
         <p:nvSpPr>
-          <p:cNvPr id="557" name="TextBox 23"/>
+          <p:cNvPr id="562" name="TextBox 23"/>
           <p:cNvSpPr/>
           <p:nvPr/>
         </p:nvSpPr>
@@ -22818,7 +22374,7 @@
       </p:sp>
       <p:sp>
         <p:nvSpPr>
-          <p:cNvPr id="558" name="TextBox 24"/>
+          <p:cNvPr id="563" name="TextBox 24"/>
           <p:cNvSpPr/>
           <p:nvPr/>
         </p:nvSpPr>
@@ -22871,7 +22427,7 @@
       </p:sp>
       <p:sp>
         <p:nvSpPr>
-          <p:cNvPr id="559" name="Rectangle 25"/>
+          <p:cNvPr id="564" name="Rectangle 25"/>
           <p:cNvSpPr/>
           <p:nvPr/>
         </p:nvSpPr>
@@ -22930,7 +22486,7 @@
       </p:sp>
       <p:sp>
         <p:nvSpPr>
-          <p:cNvPr id="560" name="Rectangle 26"/>
+          <p:cNvPr id="565" name="Rectangle 26"/>
           <p:cNvSpPr/>
           <p:nvPr/>
         </p:nvSpPr>
@@ -22989,7 +22545,7 @@
       </p:sp>
       <p:sp>
         <p:nvSpPr>
-          <p:cNvPr id="561" name="TextBox 27"/>
+          <p:cNvPr id="566" name="TextBox 27"/>
           <p:cNvSpPr/>
           <p:nvPr/>
         </p:nvSpPr>
@@ -23042,7 +22598,7 @@
       </p:sp>
       <p:sp>
         <p:nvSpPr>
-          <p:cNvPr id="562" name="TextBox 28"/>
+          <p:cNvPr id="567" name="TextBox 28"/>
           <p:cNvSpPr/>
           <p:nvPr/>
         </p:nvSpPr>
@@ -23095,7 +22651,7 @@
       </p:sp>
       <p:sp>
         <p:nvSpPr>
-          <p:cNvPr id="563" name="TextBox 29"/>
+          <p:cNvPr id="568" name="TextBox 29"/>
           <p:cNvSpPr/>
           <p:nvPr/>
         </p:nvSpPr>
@@ -23148,7 +22704,7 @@
       </p:sp>
       <p:sp>
         <p:nvSpPr>
-          <p:cNvPr id="564" name="Rectangle 30"/>
+          <p:cNvPr id="569" name="Rectangle 30"/>
           <p:cNvSpPr/>
           <p:nvPr/>
         </p:nvSpPr>
@@ -23207,7 +22763,7 @@
       </p:sp>
       <p:sp>
         <p:nvSpPr>
-          <p:cNvPr id="565" name="Rectangle 31"/>
+          <p:cNvPr id="570" name="Rectangle 31"/>
           <p:cNvSpPr/>
           <p:nvPr/>
         </p:nvSpPr>
@@ -23266,7 +22822,7 @@
       </p:sp>
       <p:sp>
         <p:nvSpPr>
-          <p:cNvPr id="566" name="TextBox 32"/>
+          <p:cNvPr id="571" name="TextBox 32"/>
           <p:cNvSpPr/>
           <p:nvPr/>
         </p:nvSpPr>
@@ -23319,7 +22875,7 @@
       </p:sp>
       <p:sp>
         <p:nvSpPr>
-          <p:cNvPr id="567" name="Rectangle 33"/>
+          <p:cNvPr id="572" name="Rectangle 33"/>
           <p:cNvSpPr/>
           <p:nvPr/>
         </p:nvSpPr>
@@ -23378,7 +22934,7 @@
       </p:sp>
       <p:sp>
         <p:nvSpPr>
-          <p:cNvPr id="568" name="Rectangle 34"/>
+          <p:cNvPr id="573" name="Rectangle 34"/>
           <p:cNvSpPr/>
           <p:nvPr/>
         </p:nvSpPr>
@@ -23437,7 +22993,7 @@
       </p:sp>
       <p:sp>
         <p:nvSpPr>
-          <p:cNvPr id="569" name="TextBox 35"/>
+          <p:cNvPr id="574" name="TextBox 35"/>
           <p:cNvSpPr/>
           <p:nvPr/>
         </p:nvSpPr>
@@ -23490,7 +23046,7 @@
       </p:sp>
       <p:sp>
         <p:nvSpPr>
-          <p:cNvPr id="570" name="TextBox 36"/>
+          <p:cNvPr id="575" name="TextBox 36"/>
           <p:cNvSpPr/>
           <p:nvPr/>
         </p:nvSpPr>
@@ -23543,7 +23099,7 @@
       </p:sp>
       <p:sp>
         <p:nvSpPr>
-          <p:cNvPr id="571" name="TextBox 37"/>
+          <p:cNvPr id="576" name="TextBox 37"/>
           <p:cNvSpPr/>
           <p:nvPr/>
         </p:nvSpPr>
@@ -23596,7 +23152,7 @@
       </p:sp>
       <p:sp>
         <p:nvSpPr>
-          <p:cNvPr id="572" name="Rectangle 38"/>
+          <p:cNvPr id="577" name="Rectangle 38"/>
           <p:cNvSpPr/>
           <p:nvPr/>
         </p:nvSpPr>
@@ -23655,7 +23211,7 @@
       </p:sp>
       <p:sp>
         <p:nvSpPr>
-          <p:cNvPr id="573" name="Rectangle 39"/>
+          <p:cNvPr id="578" name="Rectangle 39"/>
           <p:cNvSpPr/>
           <p:nvPr/>
         </p:nvSpPr>
@@ -23714,7 +23270,7 @@
       </p:sp>
       <p:sp>
         <p:nvSpPr>
-          <p:cNvPr id="574" name="TextBox 40"/>
+          <p:cNvPr id="579" name="TextBox 40"/>
           <p:cNvSpPr/>
           <p:nvPr/>
         </p:nvSpPr>
@@ -23767,7 +23323,7 @@
       </p:sp>
       <p:sp>
         <p:nvSpPr>
-          <p:cNvPr id="575" name="TextBox 41"/>
+          <p:cNvPr id="580" name="TextBox 41"/>
           <p:cNvSpPr/>
           <p:nvPr/>
         </p:nvSpPr>
@@ -23820,7 +23376,7 @@
       </p:sp>
       <p:sp>
         <p:nvSpPr>
-          <p:cNvPr id="576" name="TextBox 42"/>
+          <p:cNvPr id="581" name="TextBox 42"/>
           <p:cNvSpPr/>
           <p:nvPr/>
         </p:nvSpPr>
@@ -23873,7 +23429,7 @@
       </p:sp>
       <p:sp>
         <p:nvSpPr>
-          <p:cNvPr id="577" name="Rectangle 43"/>
+          <p:cNvPr id="582" name="Rectangle 43"/>
           <p:cNvSpPr/>
           <p:nvPr/>
         </p:nvSpPr>
@@ -23932,7 +23488,7 @@
       </p:sp>
       <p:sp>
         <p:nvSpPr>
-          <p:cNvPr id="578" name="Rectangle 44"/>
+          <p:cNvPr id="583" name="Rectangle 44"/>
           <p:cNvSpPr/>
           <p:nvPr/>
         </p:nvSpPr>
@@ -23991,7 +23547,7 @@
       </p:sp>
       <p:sp>
         <p:nvSpPr>
-          <p:cNvPr id="579" name="TextBox 45"/>
+          <p:cNvPr id="584" name="TextBox 45"/>
           <p:cNvSpPr/>
           <p:nvPr/>
         </p:nvSpPr>
@@ -24044,7 +23600,7 @@
       </p:sp>
       <p:sp>
         <p:nvSpPr>
-          <p:cNvPr id="580" name="TextBox 46"/>
+          <p:cNvPr id="585" name="TextBox 46"/>
           <p:cNvSpPr/>
           <p:nvPr/>
         </p:nvSpPr>
@@ -24097,7 +23653,7 @@
       </p:sp>
       <p:sp>
         <p:nvSpPr>
-          <p:cNvPr id="581" name="TextBox 47"/>
+          <p:cNvPr id="586" name="TextBox 47"/>
           <p:cNvSpPr/>
           <p:nvPr/>
         </p:nvSpPr>
@@ -24150,7 +23706,7 @@
       </p:sp>
       <p:sp>
         <p:nvSpPr>
-          <p:cNvPr id="582" name="Rectangle 48"/>
+          <p:cNvPr id="587" name="Rectangle 48"/>
           <p:cNvSpPr/>
           <p:nvPr/>
         </p:nvSpPr>
@@ -24209,7 +23765,7 @@
       </p:sp>
       <p:sp>
         <p:nvSpPr>
-          <p:cNvPr id="583" name="Rectangle 49"/>
+          <p:cNvPr id="588" name="Rectangle 49"/>
           <p:cNvSpPr/>
           <p:nvPr/>
         </p:nvSpPr>
@@ -24268,7 +23824,7 @@
       </p:sp>
       <p:sp>
         <p:nvSpPr>
-          <p:cNvPr id="584" name="TextBox 50"/>
+          <p:cNvPr id="589" name="TextBox 50"/>
           <p:cNvSpPr/>
           <p:nvPr/>
         </p:nvSpPr>
@@ -24321,7 +23877,7 @@
       </p:sp>
       <p:sp>
         <p:nvSpPr>
-          <p:cNvPr id="585" name="TextBox 51"/>
+          <p:cNvPr id="590" name="TextBox 51"/>
           <p:cNvSpPr/>
           <p:nvPr/>
         </p:nvSpPr>
@@ -24374,7 +23930,7 @@
       </p:sp>
       <p:sp>
         <p:nvSpPr>
-          <p:cNvPr id="586" name="TextBox 52"/>
+          <p:cNvPr id="591" name="TextBox 52"/>
           <p:cNvSpPr/>
           <p:nvPr/>
         </p:nvSpPr>
@@ -24427,7 +23983,7 @@
       </p:sp>
       <p:sp>
         <p:nvSpPr>
-          <p:cNvPr id="587" name="Rectangle 53"/>
+          <p:cNvPr id="592" name="Rectangle 53"/>
           <p:cNvSpPr/>
           <p:nvPr/>
         </p:nvSpPr>
@@ -24486,7 +24042,7 @@
       </p:sp>
       <p:sp>
         <p:nvSpPr>
-          <p:cNvPr id="588" name="Rectangle 54"/>
+          <p:cNvPr id="593" name="Rectangle 54"/>
           <p:cNvSpPr/>
           <p:nvPr/>
         </p:nvSpPr>
@@ -24545,7 +24101,7 @@
       </p:sp>
       <p:sp>
         <p:nvSpPr>
-          <p:cNvPr id="589" name="TextBox 55"/>
+          <p:cNvPr id="594" name="TextBox 55"/>
           <p:cNvSpPr/>
           <p:nvPr/>
         </p:nvSpPr>
@@ -24598,7 +24154,7 @@
       </p:sp>
       <p:sp>
         <p:nvSpPr>
-          <p:cNvPr id="590" name="TextBox 56"/>
+          <p:cNvPr id="595" name="TextBox 56"/>
           <p:cNvSpPr/>
           <p:nvPr/>
         </p:nvSpPr>
@@ -24651,7 +24207,7 @@
       </p:sp>
       <p:sp>
         <p:nvSpPr>
-          <p:cNvPr id="591" name="TextBox 57"/>
+          <p:cNvPr id="596" name="TextBox 57"/>
           <p:cNvSpPr/>
           <p:nvPr/>
         </p:nvSpPr>
@@ -24704,7 +24260,7 @@
       </p:sp>
       <p:pic>
         <p:nvPicPr>
-          <p:cNvPr id="592" name="Picture 58" descr="qr_docs.png"/>
+          <p:cNvPr id="597" name="Picture 58" descr="qr_docs.png"/>
           <p:cNvPicPr/>
           <p:nvPr/>
         </p:nvPicPr>
@@ -24727,7 +24283,7 @@
       </p:pic>
       <p:sp>
         <p:nvSpPr>
-          <p:cNvPr id="593" name="TextBox 59"/>
+          <p:cNvPr id="598" name="TextBox 59"/>
           <p:cNvSpPr/>
           <p:nvPr/>
         </p:nvSpPr>
@@ -24780,7 +24336,7 @@
       </p:sp>
       <p:sp>
         <p:nvSpPr>
-          <p:cNvPr id="594" name="TextBox 60"/>
+          <p:cNvPr id="599" name="TextBox 60"/>
           <p:cNvSpPr/>
           <p:nvPr/>
         </p:nvSpPr>
@@ -24833,7 +24389,7 @@
       </p:sp>
       <p:sp>
         <p:nvSpPr>
-          <p:cNvPr id="595" name="TextBox 61"/>
+          <p:cNvPr id="600" name="TextBox 61"/>
           <p:cNvSpPr/>
           <p:nvPr/>
         </p:nvSpPr>
@@ -24916,7 +24472,7 @@
       </p:grpSpPr>
       <p:sp>
         <p:nvSpPr>
-          <p:cNvPr id="596" name="Rectangle 1"/>
+          <p:cNvPr id="601" name="Rectangle 1"/>
           <p:cNvSpPr/>
           <p:nvPr/>
         </p:nvSpPr>
@@ -24975,7 +24531,7 @@
       </p:sp>
       <p:sp>
         <p:nvSpPr>
-          <p:cNvPr id="597" name="Rectangle 2"/>
+          <p:cNvPr id="602" name="Rectangle 2"/>
           <p:cNvSpPr/>
           <p:nvPr/>
         </p:nvSpPr>
@@ -25034,7 +24590,7 @@
       </p:sp>
       <p:sp>
         <p:nvSpPr>
-          <p:cNvPr id="598" name="TextBox 3"/>
+          <p:cNvPr id="603" name="TextBox 3"/>
           <p:cNvSpPr/>
           <p:nvPr/>
         </p:nvSpPr>
@@ -25087,7 +24643,7 @@
       </p:sp>
       <p:sp>
         <p:nvSpPr>
-          <p:cNvPr id="599" name="Rectangle 4"/>
+          <p:cNvPr id="604" name="Rectangle 4"/>
           <p:cNvSpPr/>
           <p:nvPr/>
         </p:nvSpPr>
@@ -25146,7 +24702,7 @@
       </p:sp>
       <p:sp>
         <p:nvSpPr>
-          <p:cNvPr id="600" name="Rectangle 5"/>
+          <p:cNvPr id="605" name="Rectangle 5"/>
           <p:cNvSpPr/>
           <p:nvPr/>
         </p:nvSpPr>
@@ -25205,7 +24761,7 @@
       </p:sp>
       <p:sp>
         <p:nvSpPr>
-          <p:cNvPr id="601" name="TextBox 6"/>
+          <p:cNvPr id="606" name="TextBox 6"/>
           <p:cNvSpPr/>
           <p:nvPr/>
         </p:nvSpPr>
@@ -25249,7 +24805,7 @@
       </p:sp>
       <p:sp>
         <p:nvSpPr>
-          <p:cNvPr id="602" name="TextBox 7"/>
+          <p:cNvPr id="607" name="TextBox 7"/>
           <p:cNvSpPr/>
           <p:nvPr/>
         </p:nvSpPr>
@@ -25302,7 +24858,7 @@
       </p:sp>
       <p:sp>
         <p:nvSpPr>
-          <p:cNvPr id="603" name="TextBox 8"/>
+          <p:cNvPr id="608" name="TextBox 8"/>
           <p:cNvSpPr/>
           <p:nvPr/>
         </p:nvSpPr>
@@ -25355,7 +24911,7 @@
       </p:sp>
       <p:sp>
         <p:nvSpPr>
-          <p:cNvPr id="604" name="TextBox 9"/>
+          <p:cNvPr id="609" name="TextBox 9"/>
           <p:cNvSpPr/>
           <p:nvPr/>
         </p:nvSpPr>
@@ -25408,7 +24964,7 @@
       </p:sp>
       <p:sp>
         <p:nvSpPr>
-          <p:cNvPr id="605" name="Rectangle 10"/>
+          <p:cNvPr id="610" name="Rectangle 10"/>
           <p:cNvSpPr/>
           <p:nvPr/>
         </p:nvSpPr>
@@ -25467,7 +25023,7 @@
       </p:sp>
       <p:sp>
         <p:nvSpPr>
-          <p:cNvPr id="606" name="TextBox 11"/>
+          <p:cNvPr id="611" name="TextBox 11"/>
           <p:cNvSpPr/>
           <p:nvPr/>
         </p:nvSpPr>
@@ -25520,7 +25076,7 @@
       </p:sp>
       <p:sp>
         <p:nvSpPr>
-          <p:cNvPr id="607" name="TextBox 12"/>
+          <p:cNvPr id="612" name="TextBox 12"/>
           <p:cNvSpPr/>
           <p:nvPr/>
         </p:nvSpPr>
@@ -25573,7 +25129,7 @@
       </p:sp>
       <p:sp>
         <p:nvSpPr>
-          <p:cNvPr id="608" name="TextBox 13"/>
+          <p:cNvPr id="613" name="TextBox 13"/>
           <p:cNvSpPr/>
           <p:nvPr/>
         </p:nvSpPr>
@@ -25626,7 +25182,7 @@
       </p:sp>
       <p:sp>
         <p:nvSpPr>
-          <p:cNvPr id="609" name="TextBox 14"/>
+          <p:cNvPr id="614" name="TextBox 14"/>
           <p:cNvSpPr/>
           <p:nvPr/>
         </p:nvSpPr>
@@ -25679,7 +25235,7 @@
       </p:sp>
       <p:sp>
         <p:nvSpPr>
-          <p:cNvPr id="610" name="Rectangle 15"/>
+          <p:cNvPr id="615" name="Rectangle 15"/>
           <p:cNvSpPr/>
           <p:nvPr/>
         </p:nvSpPr>
@@ -25738,7 +25294,7 @@
       </p:sp>
       <p:sp>
         <p:nvSpPr>
-          <p:cNvPr id="611" name="TextBox 16"/>
+          <p:cNvPr id="616" name="TextBox 16"/>
           <p:cNvSpPr/>
           <p:nvPr/>
         </p:nvSpPr>
@@ -25791,7 +25347,7 @@
       </p:sp>
       <p:sp>
         <p:nvSpPr>
-          <p:cNvPr id="612" name="TextBox 17"/>
+          <p:cNvPr id="617" name="TextBox 17"/>
           <p:cNvSpPr/>
           <p:nvPr/>
         </p:nvSpPr>
@@ -25844,7 +25400,7 @@
       </p:sp>
       <p:sp>
         <p:nvSpPr>
-          <p:cNvPr id="613" name="TextBox 18"/>
+          <p:cNvPr id="618" name="TextBox 18"/>
           <p:cNvSpPr/>
           <p:nvPr/>
         </p:nvSpPr>
@@ -25897,7 +25453,7 @@
       </p:sp>
       <p:sp>
         <p:nvSpPr>
-          <p:cNvPr id="614" name="TextBox 19"/>
+          <p:cNvPr id="619" name="TextBox 19"/>
           <p:cNvSpPr/>
           <p:nvPr/>
         </p:nvSpPr>
@@ -25950,7 +25506,7 @@
       </p:sp>
       <p:sp>
         <p:nvSpPr>
-          <p:cNvPr id="615" name="Rectangle 20"/>
+          <p:cNvPr id="620" name="Rectangle 20"/>
           <p:cNvSpPr/>
           <p:nvPr/>
         </p:nvSpPr>
@@ -26009,7 +25565,7 @@
       </p:sp>
       <p:sp>
         <p:nvSpPr>
-          <p:cNvPr id="616" name="TextBox 21"/>
+          <p:cNvPr id="621" name="TextBox 21"/>
           <p:cNvSpPr/>
           <p:nvPr/>
         </p:nvSpPr>
@@ -26062,7 +25618,7 @@
       </p:sp>
       <p:sp>
         <p:nvSpPr>
-          <p:cNvPr id="617" name="TextBox 22"/>
+          <p:cNvPr id="622" name="TextBox 22"/>
           <p:cNvSpPr/>
           <p:nvPr/>
         </p:nvSpPr>
@@ -26115,7 +25671,7 @@
       </p:sp>
       <p:sp>
         <p:nvSpPr>
-          <p:cNvPr id="618" name="TextBox 23"/>
+          <p:cNvPr id="623" name="TextBox 23"/>
           <p:cNvSpPr/>
           <p:nvPr/>
         </p:nvSpPr>
@@ -26168,7 +25724,7 @@
       </p:sp>
       <p:sp>
         <p:nvSpPr>
-          <p:cNvPr id="619" name="TextBox 24"/>
+          <p:cNvPr id="624" name="TextBox 24"/>
           <p:cNvSpPr/>
           <p:nvPr/>
         </p:nvSpPr>
@@ -26221,7 +25777,7 @@
       </p:sp>
       <p:sp>
         <p:nvSpPr>
-          <p:cNvPr id="620" name="Rectangle 25"/>
+          <p:cNvPr id="625" name="Rectangle 25"/>
           <p:cNvSpPr/>
           <p:nvPr/>
         </p:nvSpPr>
@@ -26280,7 +25836,7 @@
       </p:sp>
       <p:sp>
         <p:nvSpPr>
-          <p:cNvPr id="621" name="TextBox 26"/>
+          <p:cNvPr id="626" name="TextBox 26"/>
           <p:cNvSpPr/>
           <p:nvPr/>
         </p:nvSpPr>
@@ -26333,7 +25889,7 @@
       </p:sp>
       <p:sp>
         <p:nvSpPr>
-          <p:cNvPr id="622" name="TextBox 27"/>
+          <p:cNvPr id="627" name="TextBox 27"/>
           <p:cNvSpPr/>
           <p:nvPr/>
         </p:nvSpPr>
@@ -26386,7 +25942,7 @@
       </p:sp>
       <p:sp>
         <p:nvSpPr>
-          <p:cNvPr id="623" name="TextBox 28"/>
+          <p:cNvPr id="628" name="TextBox 28"/>
           <p:cNvSpPr/>
           <p:nvPr/>
         </p:nvSpPr>
@@ -26439,7 +25995,7 @@
       </p:sp>
       <p:sp>
         <p:nvSpPr>
-          <p:cNvPr id="624" name="TextBox 29"/>
+          <p:cNvPr id="629" name="TextBox 29"/>
           <p:cNvSpPr/>
           <p:nvPr/>
         </p:nvSpPr>
@@ -26492,7 +26048,7 @@
       </p:sp>
       <p:sp>
         <p:nvSpPr>
-          <p:cNvPr id="625" name="Rectangle 30"/>
+          <p:cNvPr id="630" name="Rectangle 30"/>
           <p:cNvSpPr/>
           <p:nvPr/>
         </p:nvSpPr>
@@ -26551,7 +26107,7 @@
       </p:sp>
       <p:sp>
         <p:nvSpPr>
-          <p:cNvPr id="626" name="TextBox 31"/>
+          <p:cNvPr id="631" name="TextBox 31"/>
           <p:cNvSpPr/>
           <p:nvPr/>
         </p:nvSpPr>
@@ -26604,7 +26160,7 @@
       </p:sp>
       <p:sp>
         <p:nvSpPr>
-          <p:cNvPr id="627" name="TextBox 32"/>
+          <p:cNvPr id="632" name="TextBox 32"/>
           <p:cNvSpPr/>
           <p:nvPr/>
         </p:nvSpPr>
@@ -26657,7 +26213,7 @@
       </p:sp>
       <p:sp>
         <p:nvSpPr>
-          <p:cNvPr id="628" name="TextBox 33"/>
+          <p:cNvPr id="633" name="TextBox 33"/>
           <p:cNvSpPr/>
           <p:nvPr/>
         </p:nvSpPr>
@@ -26710,7 +26266,7 @@
       </p:sp>
       <p:sp>
         <p:nvSpPr>
-          <p:cNvPr id="629" name="TextBox 34"/>
+          <p:cNvPr id="634" name="TextBox 34"/>
           <p:cNvSpPr/>
           <p:nvPr/>
         </p:nvSpPr>
@@ -26763,7 +26319,7 @@
       </p:sp>
       <p:sp>
         <p:nvSpPr>
-          <p:cNvPr id="630" name="Rectangle 35"/>
+          <p:cNvPr id="635" name="Rectangle 35"/>
           <p:cNvSpPr/>
           <p:nvPr/>
         </p:nvSpPr>
@@ -26822,7 +26378,7 @@
       </p:sp>
       <p:sp>
         <p:nvSpPr>
-          <p:cNvPr id="631" name="TextBox 36"/>
+          <p:cNvPr id="636" name="TextBox 36"/>
           <p:cNvSpPr/>
           <p:nvPr/>
         </p:nvSpPr>
@@ -26875,7 +26431,7 @@
       </p:sp>
       <p:sp>
         <p:nvSpPr>
-          <p:cNvPr id="632" name="TextBox 37"/>
+          <p:cNvPr id="637" name="TextBox 37"/>
           <p:cNvSpPr/>
           <p:nvPr/>
         </p:nvSpPr>
@@ -26928,7 +26484,7 @@
       </p:sp>
       <p:sp>
         <p:nvSpPr>
-          <p:cNvPr id="633" name="TextBox 38"/>
+          <p:cNvPr id="638" name="TextBox 38"/>
           <p:cNvSpPr/>
           <p:nvPr/>
         </p:nvSpPr>
@@ -26981,7 +26537,7 @@
       </p:sp>
       <p:sp>
         <p:nvSpPr>
-          <p:cNvPr id="634" name="TextBox 39"/>
+          <p:cNvPr id="639" name="TextBox 39"/>
           <p:cNvSpPr/>
           <p:nvPr/>
         </p:nvSpPr>
@@ -27034,7 +26590,7 @@
       </p:sp>
       <p:sp>
         <p:nvSpPr>
-          <p:cNvPr id="635" name="Rectangle 40"/>
+          <p:cNvPr id="640" name="Rectangle 40"/>
           <p:cNvSpPr/>
           <p:nvPr/>
         </p:nvSpPr>
@@ -27093,7 +26649,7 @@
       </p:sp>
       <p:sp>
         <p:nvSpPr>
-          <p:cNvPr id="636" name="TextBox 41"/>
+          <p:cNvPr id="641" name="TextBox 41"/>
           <p:cNvSpPr/>
           <p:nvPr/>
         </p:nvSpPr>
@@ -27146,7 +26702,7 @@
       </p:sp>
       <p:sp>
         <p:nvSpPr>
-          <p:cNvPr id="637" name="TextBox 42"/>
+          <p:cNvPr id="642" name="TextBox 42"/>
           <p:cNvSpPr/>
           <p:nvPr/>
         </p:nvSpPr>
@@ -27199,7 +26755,7 @@
       </p:sp>
       <p:sp>
         <p:nvSpPr>
-          <p:cNvPr id="638" name="TextBox 43"/>
+          <p:cNvPr id="643" name="TextBox 43"/>
           <p:cNvSpPr/>
           <p:nvPr/>
         </p:nvSpPr>
@@ -27252,7 +26808,7 @@
       </p:sp>
       <p:sp>
         <p:nvSpPr>
-          <p:cNvPr id="639" name="TextBox 44"/>
+          <p:cNvPr id="644" name="TextBox 44"/>
           <p:cNvSpPr/>
           <p:nvPr/>
         </p:nvSpPr>
@@ -27305,7 +26861,7 @@
       </p:sp>
       <p:sp>
         <p:nvSpPr>
-          <p:cNvPr id="640" name="Rectangle 45"/>
+          <p:cNvPr id="645" name="Rectangle 45"/>
           <p:cNvSpPr/>
           <p:nvPr/>
         </p:nvSpPr>
@@ -27364,7 +26920,7 @@
       </p:sp>
       <p:sp>
         <p:nvSpPr>
-          <p:cNvPr id="641" name="TextBox 46"/>
+          <p:cNvPr id="646" name="TextBox 46"/>
           <p:cNvSpPr/>
           <p:nvPr/>
         </p:nvSpPr>
@@ -27417,7 +26973,7 @@
       </p:sp>
       <p:sp>
         <p:nvSpPr>
-          <p:cNvPr id="642" name="TextBox 47"/>
+          <p:cNvPr id="647" name="TextBox 47"/>
           <p:cNvSpPr/>
           <p:nvPr/>
         </p:nvSpPr>
@@ -27470,7 +27026,7 @@
       </p:sp>
       <p:sp>
         <p:nvSpPr>
-          <p:cNvPr id="643" name="TextBox 48"/>
+          <p:cNvPr id="648" name="TextBox 48"/>
           <p:cNvSpPr/>
           <p:nvPr/>
         </p:nvSpPr>
@@ -27523,7 +27079,7 @@
       </p:sp>
       <p:sp>
         <p:nvSpPr>
-          <p:cNvPr id="644" name="TextBox 49"/>
+          <p:cNvPr id="649" name="TextBox 49"/>
           <p:cNvSpPr/>
           <p:nvPr/>
         </p:nvSpPr>
@@ -27576,7 +27132,7 @@
       </p:sp>
       <p:sp>
         <p:nvSpPr>
-          <p:cNvPr id="645" name="TextBox 50"/>
+          <p:cNvPr id="650" name="TextBox 50"/>
           <p:cNvSpPr/>
           <p:nvPr/>
         </p:nvSpPr>
@@ -27659,7 +27215,7 @@
       </p:grpSpPr>
       <p:sp>
         <p:nvSpPr>
-          <p:cNvPr id="646" name="Rectangle 1"/>
+          <p:cNvPr id="651" name="Rectangle 1"/>
           <p:cNvSpPr/>
           <p:nvPr/>
         </p:nvSpPr>
@@ -27718,7 +27274,7 @@
       </p:sp>
       <p:sp>
         <p:nvSpPr>
-          <p:cNvPr id="647" name="Rectangle 2"/>
+          <p:cNvPr id="652" name="Rectangle 2"/>
           <p:cNvSpPr/>
           <p:nvPr/>
         </p:nvSpPr>
@@ -27777,7 +27333,7 @@
       </p:sp>
       <p:sp>
         <p:nvSpPr>
-          <p:cNvPr id="648" name="TextBox 3"/>
+          <p:cNvPr id="653" name="TextBox 3"/>
           <p:cNvSpPr/>
           <p:nvPr/>
         </p:nvSpPr>
@@ -27830,7 +27386,7 @@
       </p:sp>
       <p:sp>
         <p:nvSpPr>
-          <p:cNvPr id="649" name="TextBox 4"/>
+          <p:cNvPr id="654" name="TextBox 4"/>
           <p:cNvSpPr/>
           <p:nvPr/>
         </p:nvSpPr>
@@ -27883,7 +27439,7 @@
       </p:sp>
       <p:sp>
         <p:nvSpPr>
-          <p:cNvPr id="650" name="Rectangle 5"/>
+          <p:cNvPr id="655" name="Rectangle 5"/>
           <p:cNvSpPr/>
           <p:nvPr/>
         </p:nvSpPr>
@@ -27942,7 +27498,7 @@
       </p:sp>
       <p:sp>
         <p:nvSpPr>
-          <p:cNvPr id="651" name="Rectangle 6"/>
+          <p:cNvPr id="656" name="Rectangle 6"/>
           <p:cNvSpPr/>
           <p:nvPr/>
         </p:nvSpPr>
@@ -28001,7 +27557,7 @@
       </p:sp>
       <p:sp>
         <p:nvSpPr>
-          <p:cNvPr id="652" name="TextBox 7"/>
+          <p:cNvPr id="657" name="TextBox 7"/>
           <p:cNvSpPr/>
           <p:nvPr/>
         </p:nvSpPr>
@@ -28054,7 +27610,7 @@
       </p:sp>
       <p:sp>
         <p:nvSpPr>
-          <p:cNvPr id="653" name="TextBox 8"/>
+          <p:cNvPr id="658" name="TextBox 8"/>
           <p:cNvSpPr/>
           <p:nvPr/>
         </p:nvSpPr>
@@ -28107,7 +27663,7 @@
       </p:sp>
       <p:sp>
         <p:nvSpPr>
-          <p:cNvPr id="654" name="Rectangle 9"/>
+          <p:cNvPr id="659" name="Rectangle 9"/>
           <p:cNvSpPr/>
           <p:nvPr/>
         </p:nvSpPr>
@@ -28166,7 +27722,7 @@
       </p:sp>
       <p:sp>
         <p:nvSpPr>
-          <p:cNvPr id="655" name="TextBox 10"/>
+          <p:cNvPr id="660" name="TextBox 10"/>
           <p:cNvSpPr/>
           <p:nvPr/>
         </p:nvSpPr>
@@ -28219,7 +27775,7 @@
       </p:sp>
       <p:sp>
         <p:nvSpPr>
-          <p:cNvPr id="656" name="TextBox 11"/>
+          <p:cNvPr id="661" name="TextBox 11"/>
           <p:cNvSpPr/>
           <p:nvPr/>
         </p:nvSpPr>
@@ -28272,7 +27828,7 @@
       </p:sp>
       <p:sp>
         <p:nvSpPr>
-          <p:cNvPr id="657" name="Rectangle 12"/>
+          <p:cNvPr id="662" name="Rectangle 12"/>
           <p:cNvSpPr/>
           <p:nvPr/>
         </p:nvSpPr>
@@ -28331,7 +27887,7 @@
       </p:sp>
       <p:sp>
         <p:nvSpPr>
-          <p:cNvPr id="658" name="TextBox 13"/>
+          <p:cNvPr id="663" name="TextBox 13"/>
           <p:cNvSpPr/>
           <p:nvPr/>
         </p:nvSpPr>
@@ -28384,7 +27940,7 @@
       </p:sp>
       <p:sp>
         <p:nvSpPr>
-          <p:cNvPr id="659" name="TextBox 14"/>
+          <p:cNvPr id="664" name="TextBox 14"/>
           <p:cNvSpPr/>
           <p:nvPr/>
         </p:nvSpPr>
@@ -28437,7 +27993,7 @@
       </p:sp>
       <p:sp>
         <p:nvSpPr>
-          <p:cNvPr id="660" name="Rectangle 15"/>
+          <p:cNvPr id="665" name="Rectangle 15"/>
           <p:cNvSpPr/>
           <p:nvPr/>
         </p:nvSpPr>
@@ -28496,7 +28052,7 @@
       </p:sp>
       <p:sp>
         <p:nvSpPr>
-          <p:cNvPr id="661" name="TextBox 16"/>
+          <p:cNvPr id="666" name="TextBox 16"/>
           <p:cNvSpPr/>
           <p:nvPr/>
         </p:nvSpPr>
@@ -28549,7 +28105,7 @@
       </p:sp>
       <p:sp>
         <p:nvSpPr>
-          <p:cNvPr id="662" name="TextBox 17"/>
+          <p:cNvPr id="667" name="TextBox 17"/>
           <p:cNvSpPr/>
           <p:nvPr/>
         </p:nvSpPr>
@@ -28602,7 +28158,7 @@
       </p:sp>
       <p:sp>
         <p:nvSpPr>
-          <p:cNvPr id="663" name="Rectangle 18"/>
+          <p:cNvPr id="668" name="Rectangle 18"/>
           <p:cNvSpPr/>
           <p:nvPr/>
         </p:nvSpPr>
@@ -28661,7 +28217,7 @@
       </p:sp>
       <p:sp>
         <p:nvSpPr>
-          <p:cNvPr id="664" name="TextBox 19"/>
+          <p:cNvPr id="669" name="TextBox 19"/>
           <p:cNvSpPr/>
           <p:nvPr/>
         </p:nvSpPr>
@@ -28714,7 +28270,7 @@
       </p:sp>
       <p:sp>
         <p:nvSpPr>
-          <p:cNvPr id="665" name="TextBox 20"/>
+          <p:cNvPr id="670" name="TextBox 20"/>
           <p:cNvSpPr/>
           <p:nvPr/>
         </p:nvSpPr>
@@ -28767,7 +28323,7 @@
       </p:sp>
       <p:sp>
         <p:nvSpPr>
-          <p:cNvPr id="666" name="Rectangle 21"/>
+          <p:cNvPr id="671" name="Rectangle 21"/>
           <p:cNvSpPr/>
           <p:nvPr/>
         </p:nvSpPr>
@@ -28826,7 +28382,7 @@
       </p:sp>
       <p:sp>
         <p:nvSpPr>
-          <p:cNvPr id="667" name="TextBox 22"/>
+          <p:cNvPr id="672" name="TextBox 22"/>
           <p:cNvSpPr/>
           <p:nvPr/>
         </p:nvSpPr>
@@ -28879,7 +28435,7 @@
       </p:sp>
       <p:sp>
         <p:nvSpPr>
-          <p:cNvPr id="668" name="TextBox 23"/>
+          <p:cNvPr id="673" name="TextBox 23"/>
           <p:cNvSpPr/>
           <p:nvPr/>
         </p:nvSpPr>
@@ -28932,7 +28488,7 @@
       </p:sp>
       <p:sp>
         <p:nvSpPr>
-          <p:cNvPr id="669" name="Rectangle 24"/>
+          <p:cNvPr id="674" name="Rectangle 24"/>
           <p:cNvSpPr/>
           <p:nvPr/>
         </p:nvSpPr>
@@ -28991,7 +28547,7 @@
       </p:sp>
       <p:sp>
         <p:nvSpPr>
-          <p:cNvPr id="670" name="Rectangle 25"/>
+          <p:cNvPr id="675" name="Rectangle 25"/>
           <p:cNvSpPr/>
           <p:nvPr/>
         </p:nvSpPr>
@@ -29050,7 +28606,7 @@
       </p:sp>
       <p:sp>
         <p:nvSpPr>
-          <p:cNvPr id="671" name="TextBox 26"/>
+          <p:cNvPr id="676" name="TextBox 26"/>
           <p:cNvSpPr/>
           <p:nvPr/>
         </p:nvSpPr>
@@ -29112,7 +28668,7 @@
       </p:sp>
       <p:sp>
         <p:nvSpPr>
-          <p:cNvPr id="672" name="Rectangle 27"/>
+          <p:cNvPr id="677" name="Rectangle 27"/>
           <p:cNvSpPr/>
           <p:nvPr/>
         </p:nvSpPr>
@@ -29171,7 +28727,7 @@
       </p:sp>
       <p:sp>
         <p:nvSpPr>
-          <p:cNvPr id="673" name="TextBox 28"/>
+          <p:cNvPr id="678" name="TextBox 28"/>
           <p:cNvSpPr/>
           <p:nvPr/>
         </p:nvSpPr>
@@ -29224,7 +28780,7 @@
       </p:sp>
       <p:sp>
         <p:nvSpPr>
-          <p:cNvPr id="674" name="TextBox 29"/>
+          <p:cNvPr id="679" name="TextBox 29"/>
           <p:cNvSpPr/>
           <p:nvPr/>
         </p:nvSpPr>
@@ -29277,7 +28833,7 @@
       </p:sp>
       <p:sp>
         <p:nvSpPr>
-          <p:cNvPr id="675" name="Rectangle 30"/>
+          <p:cNvPr id="680" name="Rectangle 30"/>
           <p:cNvSpPr/>
           <p:nvPr/>
         </p:nvSpPr>
@@ -29336,7 +28892,7 @@
       </p:sp>
       <p:sp>
         <p:nvSpPr>
-          <p:cNvPr id="676" name="TextBox 31"/>
+          <p:cNvPr id="681" name="TextBox 31"/>
           <p:cNvSpPr/>
           <p:nvPr/>
         </p:nvSpPr>
@@ -29389,7 +28945,7 @@
       </p:sp>
       <p:sp>
         <p:nvSpPr>
-          <p:cNvPr id="677" name="TextBox 32"/>
+          <p:cNvPr id="682" name="TextBox 32"/>
           <p:cNvSpPr/>
           <p:nvPr/>
         </p:nvSpPr>
@@ -29442,7 +28998,7 @@
       </p:sp>
       <p:sp>
         <p:nvSpPr>
-          <p:cNvPr id="678" name="Rectangle 33"/>
+          <p:cNvPr id="683" name="Rectangle 33"/>
           <p:cNvSpPr/>
           <p:nvPr/>
         </p:nvSpPr>
@@ -29501,7 +29057,7 @@
       </p:sp>
       <p:sp>
         <p:nvSpPr>
-          <p:cNvPr id="679" name="TextBox 34"/>
+          <p:cNvPr id="684" name="TextBox 34"/>
           <p:cNvSpPr/>
           <p:nvPr/>
         </p:nvSpPr>
@@ -29554,7 +29110,7 @@
       </p:sp>
       <p:sp>
         <p:nvSpPr>
-          <p:cNvPr id="680" name="TextBox 35"/>
+          <p:cNvPr id="685" name="TextBox 35"/>
           <p:cNvSpPr/>
           <p:nvPr/>
         </p:nvSpPr>
@@ -29607,7 +29163,7 @@
       </p:sp>
       <p:sp>
         <p:nvSpPr>
-          <p:cNvPr id="681" name="Rectangle 36"/>
+          <p:cNvPr id="686" name="Rectangle 36"/>
           <p:cNvSpPr/>
           <p:nvPr/>
         </p:nvSpPr>
@@ -29666,7 +29222,7 @@
       </p:sp>
       <p:sp>
         <p:nvSpPr>
-          <p:cNvPr id="682" name="TextBox 37"/>
+          <p:cNvPr id="687" name="TextBox 37"/>
           <p:cNvSpPr/>
           <p:nvPr/>
         </p:nvSpPr>
@@ -29719,7 +29275,7 @@
       </p:sp>
       <p:sp>
         <p:nvSpPr>
-          <p:cNvPr id="683" name="TextBox 38"/>
+          <p:cNvPr id="688" name="TextBox 38"/>
           <p:cNvSpPr/>
           <p:nvPr/>
         </p:nvSpPr>
@@ -29772,7 +29328,7 @@
       </p:sp>
       <p:sp>
         <p:nvSpPr>
-          <p:cNvPr id="684" name="Rectangle 39"/>
+          <p:cNvPr id="689" name="Rectangle 39"/>
           <p:cNvSpPr/>
           <p:nvPr/>
         </p:nvSpPr>
@@ -29831,7 +29387,7 @@
       </p:sp>
       <p:sp>
         <p:nvSpPr>
-          <p:cNvPr id="685" name="TextBox 40"/>
+          <p:cNvPr id="690" name="TextBox 40"/>
           <p:cNvSpPr/>
           <p:nvPr/>
         </p:nvSpPr>
@@ -29884,7 +29440,7 @@
       </p:sp>
       <p:sp>
         <p:nvSpPr>
-          <p:cNvPr id="686" name="TextBox 41"/>
+          <p:cNvPr id="691" name="TextBox 41"/>
           <p:cNvSpPr/>
           <p:nvPr/>
         </p:nvSpPr>
@@ -29937,7 +29493,7 @@
       </p:sp>
       <p:sp>
         <p:nvSpPr>
-          <p:cNvPr id="687" name="Rectangle 42"/>
+          <p:cNvPr id="692" name="Rectangle 42"/>
           <p:cNvSpPr/>
           <p:nvPr/>
         </p:nvSpPr>
@@ -29996,7 +29552,7 @@
       </p:sp>
       <p:sp>
         <p:nvSpPr>
-          <p:cNvPr id="688" name="Rectangle 43"/>
+          <p:cNvPr id="693" name="Rectangle 43"/>
           <p:cNvSpPr/>
           <p:nvPr/>
         </p:nvSpPr>
@@ -30055,7 +29611,7 @@
       </p:sp>
       <p:sp>
         <p:nvSpPr>
-          <p:cNvPr id="689" name="TextBox 44"/>
+          <p:cNvPr id="694" name="TextBox 44"/>
           <p:cNvSpPr/>
           <p:nvPr/>
         </p:nvSpPr>
@@ -30117,7 +29673,7 @@
       </p:sp>
       <p:sp>
         <p:nvSpPr>
-          <p:cNvPr id="690" name="Rectangle 45"/>
+          <p:cNvPr id="695" name="Rectangle 45"/>
           <p:cNvSpPr/>
           <p:nvPr/>
         </p:nvSpPr>
@@ -30176,7 +29732,7 @@
       </p:sp>
       <p:sp>
         <p:nvSpPr>
-          <p:cNvPr id="691" name="TextBox 46"/>
+          <p:cNvPr id="696" name="TextBox 46"/>
           <p:cNvSpPr/>
           <p:nvPr/>
         </p:nvSpPr>
@@ -30229,7 +29785,7 @@
       </p:sp>
       <p:sp>
         <p:nvSpPr>
-          <p:cNvPr id="692" name="TextBox 47"/>
+          <p:cNvPr id="697" name="TextBox 47"/>
           <p:cNvSpPr/>
           <p:nvPr/>
         </p:nvSpPr>
@@ -30282,7 +29838,7 @@
       </p:sp>
       <p:sp>
         <p:nvSpPr>
-          <p:cNvPr id="693" name="Rectangle 48"/>
+          <p:cNvPr id="698" name="Rectangle 48"/>
           <p:cNvSpPr/>
           <p:nvPr/>
         </p:nvSpPr>
@@ -30341,7 +29897,7 @@
       </p:sp>
       <p:sp>
         <p:nvSpPr>
-          <p:cNvPr id="694" name="TextBox 49"/>
+          <p:cNvPr id="699" name="TextBox 49"/>
           <p:cNvSpPr/>
           <p:nvPr/>
         </p:nvSpPr>
@@ -30394,7 +29950,7 @@
       </p:sp>
       <p:sp>
         <p:nvSpPr>
-          <p:cNvPr id="695" name="TextBox 50"/>
+          <p:cNvPr id="700" name="TextBox 50"/>
           <p:cNvSpPr/>
           <p:nvPr/>
         </p:nvSpPr>
@@ -30447,7 +30003,7 @@
       </p:sp>
       <p:sp>
         <p:nvSpPr>
-          <p:cNvPr id="696" name="Rectangle 51"/>
+          <p:cNvPr id="701" name="Rectangle 51"/>
           <p:cNvSpPr/>
           <p:nvPr/>
         </p:nvSpPr>
@@ -30506,7 +30062,7 @@
       </p:sp>
       <p:sp>
         <p:nvSpPr>
-          <p:cNvPr id="697" name="TextBox 52"/>
+          <p:cNvPr id="702" name="TextBox 52"/>
           <p:cNvSpPr/>
           <p:nvPr/>
         </p:nvSpPr>
@@ -30559,7 +30115,7 @@
       </p:sp>
       <p:sp>
         <p:nvSpPr>
-          <p:cNvPr id="698" name="TextBox 53"/>
+          <p:cNvPr id="703" name="TextBox 53"/>
           <p:cNvSpPr/>
           <p:nvPr/>
         </p:nvSpPr>
@@ -30612,7 +30168,7 @@
       </p:sp>
       <p:sp>
         <p:nvSpPr>
-          <p:cNvPr id="699" name="Rectangle 54"/>
+          <p:cNvPr id="704" name="Rectangle 54"/>
           <p:cNvSpPr/>
           <p:nvPr/>
         </p:nvSpPr>
@@ -30671,7 +30227,7 @@
       </p:sp>
       <p:sp>
         <p:nvSpPr>
-          <p:cNvPr id="700" name="Rectangle 55"/>
+          <p:cNvPr id="705" name="Rectangle 55"/>
           <p:cNvSpPr/>
           <p:nvPr/>
         </p:nvSpPr>
@@ -30730,7 +30286,7 @@
       </p:sp>
       <p:sp>
         <p:nvSpPr>
-          <p:cNvPr id="701" name="TextBox 56"/>
+          <p:cNvPr id="706" name="TextBox 56"/>
           <p:cNvSpPr/>
           <p:nvPr/>
         </p:nvSpPr>
@@ -30792,7 +30348,7 @@
       </p:sp>
       <p:sp>
         <p:nvSpPr>
-          <p:cNvPr id="702" name="TextBox 57"/>
+          <p:cNvPr id="707" name="TextBox 57"/>
           <p:cNvSpPr/>
           <p:nvPr/>
         </p:nvSpPr>
@@ -30845,7 +30401,7 @@
       </p:sp>
       <p:sp>
         <p:nvSpPr>
-          <p:cNvPr id="703" name="TextBox 58"/>
+          <p:cNvPr id="708" name="TextBox 58"/>
           <p:cNvSpPr/>
           <p:nvPr/>
         </p:nvSpPr>
@@ -30928,7 +30484,7 @@
       </p:grpSpPr>
       <p:sp>
         <p:nvSpPr>
-          <p:cNvPr id="704" name="Rectangle 1"/>
+          <p:cNvPr id="709" name="Rectangle 1"/>
           <p:cNvSpPr/>
           <p:nvPr/>
         </p:nvSpPr>
@@ -30987,13 +30543,13 @@
       </p:sp>
       <p:sp>
         <p:nvSpPr>
-          <p:cNvPr id="705" name="Rectangle 2"/>
-          <p:cNvSpPr/>
-          <p:nvPr/>
-        </p:nvSpPr>
-        <p:spPr>
-          <a:xfrm>
-            <a:off x="0" y="6218280"/>
+          <p:cNvPr id="710" name="Rectangle 2"/>
+          <p:cNvSpPr/>
+          <p:nvPr/>
+        </p:nvSpPr>
+        <p:spPr>
+          <a:xfrm>
+            <a:off x="360" y="6218280"/>
             <a:ext cx="12188520" cy="182520"/>
           </a:xfrm>
           <a:prstGeom prst="rect">
@@ -31046,7 +30602,7 @@
       </p:sp>
       <p:sp>
         <p:nvSpPr>
-          <p:cNvPr id="706" name="Rectangle 3"/>
+          <p:cNvPr id="711" name="Rectangle 3"/>
           <p:cNvSpPr/>
           <p:nvPr/>
         </p:nvSpPr>
@@ -31105,7 +30661,7 @@
       </p:sp>
       <p:sp>
         <p:nvSpPr>
-          <p:cNvPr id="707" name="TextBox 4"/>
+          <p:cNvPr id="712" name="TextBox 4"/>
           <p:cNvSpPr/>
           <p:nvPr/>
         </p:nvSpPr>
@@ -31158,7 +30714,7 @@
       </p:sp>
       <p:sp>
         <p:nvSpPr>
-          <p:cNvPr id="708" name="TextBox 5"/>
+          <p:cNvPr id="713" name="TextBox 5"/>
           <p:cNvSpPr/>
           <p:nvPr/>
         </p:nvSpPr>
@@ -31211,7 +30767,7 @@
       </p:sp>
       <p:sp>
         <p:nvSpPr>
-          <p:cNvPr id="709" name="Rectangle 6"/>
+          <p:cNvPr id="714" name="Rectangle 6"/>
           <p:cNvSpPr/>
           <p:nvPr/>
         </p:nvSpPr>
@@ -31270,7 +30826,7 @@
       </p:sp>
       <p:sp>
         <p:nvSpPr>
-          <p:cNvPr id="710" name="Rectangle 7"/>
+          <p:cNvPr id="715" name="Rectangle 7"/>
           <p:cNvSpPr/>
           <p:nvPr/>
         </p:nvSpPr>
@@ -31329,7 +30885,7 @@
       </p:sp>
       <p:sp>
         <p:nvSpPr>
-          <p:cNvPr id="711" name="TextBox 8"/>
+          <p:cNvPr id="716" name="TextBox 8"/>
           <p:cNvSpPr/>
           <p:nvPr/>
         </p:nvSpPr>
@@ -31382,7 +30938,7 @@
       </p:sp>
       <p:sp>
         <p:nvSpPr>
-          <p:cNvPr id="712" name="TextBox 9"/>
+          <p:cNvPr id="717" name="TextBox 9"/>
           <p:cNvSpPr/>
           <p:nvPr/>
         </p:nvSpPr>
@@ -31435,7 +30991,7 @@
       </p:sp>
       <p:sp>
         <p:nvSpPr>
-          <p:cNvPr id="713" name="TextBox 10"/>
+          <p:cNvPr id="718" name="TextBox 10"/>
           <p:cNvSpPr/>
           <p:nvPr/>
         </p:nvSpPr>
@@ -31488,7 +31044,7 @@
       </p:sp>
       <p:sp>
         <p:nvSpPr>
-          <p:cNvPr id="714" name="Rectangle 11"/>
+          <p:cNvPr id="719" name="Rectangle 11"/>
           <p:cNvSpPr/>
           <p:nvPr/>
         </p:nvSpPr>
@@ -31547,7 +31103,7 @@
       </p:sp>
       <p:sp>
         <p:nvSpPr>
-          <p:cNvPr id="715" name="Rectangle 12"/>
+          <p:cNvPr id="720" name="Rectangle 12"/>
           <p:cNvSpPr/>
           <p:nvPr/>
         </p:nvSpPr>
@@ -31606,7 +31162,7 @@
       </p:sp>
       <p:sp>
         <p:nvSpPr>
-          <p:cNvPr id="716" name="TextBox 13"/>
+          <p:cNvPr id="721" name="TextBox 13"/>
           <p:cNvSpPr/>
           <p:nvPr/>
         </p:nvSpPr>
@@ -31659,7 +31215,7 @@
       </p:sp>
       <p:sp>
         <p:nvSpPr>
-          <p:cNvPr id="717" name="TextBox 14"/>
+          <p:cNvPr id="722" name="TextBox 14"/>
           <p:cNvSpPr/>
           <p:nvPr/>
         </p:nvSpPr>
@@ -31712,7 +31268,7 @@
       </p:sp>
       <p:sp>
         <p:nvSpPr>
-          <p:cNvPr id="718" name="TextBox 15"/>
+          <p:cNvPr id="723" name="TextBox 15"/>
           <p:cNvSpPr/>
           <p:nvPr/>
         </p:nvSpPr>
@@ -31765,7 +31321,7 @@
       </p:sp>
       <p:sp>
         <p:nvSpPr>
-          <p:cNvPr id="719" name="Rectangle 16"/>
+          <p:cNvPr id="724" name="Rectangle 16"/>
           <p:cNvSpPr/>
           <p:nvPr/>
         </p:nvSpPr>
@@ -31824,7 +31380,7 @@
       </p:sp>
       <p:sp>
         <p:nvSpPr>
-          <p:cNvPr id="720" name="Rectangle 17"/>
+          <p:cNvPr id="725" name="Rectangle 17"/>
           <p:cNvSpPr/>
           <p:nvPr/>
         </p:nvSpPr>
@@ -31883,7 +31439,7 @@
       </p:sp>
       <p:sp>
         <p:nvSpPr>
-          <p:cNvPr id="721" name="TextBox 18"/>
+          <p:cNvPr id="726" name="TextBox 18"/>
           <p:cNvSpPr/>
           <p:nvPr/>
         </p:nvSpPr>
@@ -31936,7 +31492,7 @@
       </p:sp>
       <p:sp>
         <p:nvSpPr>
-          <p:cNvPr id="722" name="TextBox 19"/>
+          <p:cNvPr id="727" name="TextBox 19"/>
           <p:cNvSpPr/>
           <p:nvPr/>
         </p:nvSpPr>
@@ -31989,7 +31545,7 @@
       </p:sp>
       <p:sp>
         <p:nvSpPr>
-          <p:cNvPr id="723" name="TextBox 20"/>
+          <p:cNvPr id="728" name="TextBox 20"/>
           <p:cNvSpPr/>
           <p:nvPr/>
         </p:nvSpPr>
@@ -32042,7 +31598,7 @@
       </p:sp>
       <p:sp>
         <p:nvSpPr>
-          <p:cNvPr id="724" name="TextBox 21"/>
+          <p:cNvPr id="729" name="TextBox 21"/>
           <p:cNvSpPr/>
           <p:nvPr/>
         </p:nvSpPr>
@@ -32095,7 +31651,7 @@
       </p:sp>
       <p:sp>
         <p:nvSpPr>
-          <p:cNvPr id="725" name="TextBox 22"/>
+          <p:cNvPr id="730" name="TextBox 22"/>
           <p:cNvSpPr/>
           <p:nvPr/>
         </p:nvSpPr>
@@ -32157,7 +31713,7 @@
       </p:sp>
       <p:sp>
         <p:nvSpPr>
-          <p:cNvPr id="726" name="TextBox 23"/>
+          <p:cNvPr id="731" name="TextBox 23"/>
           <p:cNvSpPr/>
           <p:nvPr/>
         </p:nvSpPr>
@@ -32210,7 +31766,7 @@
       </p:sp>
       <p:sp>
         <p:nvSpPr>
-          <p:cNvPr id="727" name="TextBox 24"/>
+          <p:cNvPr id="732" name="TextBox 24"/>
           <p:cNvSpPr/>
           <p:nvPr/>
         </p:nvSpPr>
@@ -32272,7 +31828,7 @@
       </p:sp>
       <p:sp>
         <p:nvSpPr>
-          <p:cNvPr id="728" name="TextBox 25"/>
+          <p:cNvPr id="733" name="TextBox 25"/>
           <p:cNvSpPr/>
           <p:nvPr/>
         </p:nvSpPr>
@@ -32325,7 +31881,7 @@
       </p:sp>
       <p:sp>
         <p:nvSpPr>
-          <p:cNvPr id="729" name="TextBox 26"/>
+          <p:cNvPr id="734" name="TextBox 26"/>
           <p:cNvSpPr/>
           <p:nvPr/>
         </p:nvSpPr>
@@ -32387,7 +31943,7 @@
       </p:sp>
       <p:sp>
         <p:nvSpPr>
-          <p:cNvPr id="730" name="TextBox 27"/>
+          <p:cNvPr id="735" name="TextBox 27"/>
           <p:cNvSpPr/>
           <p:nvPr/>
         </p:nvSpPr>
@@ -32440,7 +31996,7 @@
       </p:sp>
       <p:sp>
         <p:nvSpPr>
-          <p:cNvPr id="731" name="TextBox 28"/>
+          <p:cNvPr id="736" name="TextBox 28"/>
           <p:cNvSpPr/>
           <p:nvPr/>
         </p:nvSpPr>
@@ -32502,7 +32058,7 @@
       </p:sp>
       <p:sp>
         <p:nvSpPr>
-          <p:cNvPr id="732" name="TextBox 29"/>
+          <p:cNvPr id="737" name="TextBox 29"/>
           <p:cNvSpPr/>
           <p:nvPr/>
         </p:nvSpPr>
@@ -32555,7 +32111,7 @@
       </p:sp>
       <p:sp>
         <p:nvSpPr>
-          <p:cNvPr id="733" name="TextBox 30"/>
+          <p:cNvPr id="738" name="TextBox 30"/>
           <p:cNvSpPr/>
           <p:nvPr/>
         </p:nvSpPr>
@@ -33936,7 +33492,7 @@
       </p:grpSpPr>
       <p:sp>
         <p:nvSpPr>
-          <p:cNvPr id="734" name="Rectangle 1"/>
+          <p:cNvPr id="739" name="Rectangle 1"/>
           <p:cNvSpPr/>
           <p:nvPr/>
         </p:nvSpPr>
@@ -33995,7 +33551,7 @@
       </p:sp>
       <p:sp>
         <p:nvSpPr>
-          <p:cNvPr id="735" name="Rectangle 2"/>
+          <p:cNvPr id="740" name="Rectangle 2"/>
           <p:cNvSpPr/>
           <p:nvPr/>
         </p:nvSpPr>
@@ -34054,7 +33610,7 @@
       </p:sp>
       <p:sp>
         <p:nvSpPr>
-          <p:cNvPr id="736" name="TextBox 3"/>
+          <p:cNvPr id="741" name="TextBox 3"/>
           <p:cNvSpPr/>
           <p:nvPr/>
         </p:nvSpPr>
@@ -34107,7 +33663,7 @@
       </p:sp>
       <p:sp>
         <p:nvSpPr>
-          <p:cNvPr id="737" name="TextBox 4"/>
+          <p:cNvPr id="742" name="TextBox 4"/>
           <p:cNvSpPr/>
           <p:nvPr/>
         </p:nvSpPr>
@@ -34160,7 +33716,7 @@
       </p:sp>
       <p:sp>
         <p:nvSpPr>
-          <p:cNvPr id="738" name="Rectangle 5"/>
+          <p:cNvPr id="743" name="Rectangle 5"/>
           <p:cNvSpPr/>
           <p:nvPr/>
         </p:nvSpPr>
@@ -34219,7 +33775,7 @@
       </p:sp>
       <p:sp>
         <p:nvSpPr>
-          <p:cNvPr id="739" name="Rectangle 6"/>
+          <p:cNvPr id="744" name="Rectangle 6"/>
           <p:cNvSpPr/>
           <p:nvPr/>
         </p:nvSpPr>
@@ -34278,7 +33834,7 @@
       </p:sp>
       <p:sp>
         <p:nvSpPr>
-          <p:cNvPr id="740" name="Rectangle 7"/>
+          <p:cNvPr id="745" name="Rectangle 7"/>
           <p:cNvSpPr/>
           <p:nvPr/>
         </p:nvSpPr>
@@ -34337,7 +33893,7 @@
       </p:sp>
       <p:sp>
         <p:nvSpPr>
-          <p:cNvPr id="741" name="TextBox 8"/>
+          <p:cNvPr id="746" name="TextBox 8"/>
           <p:cNvSpPr/>
           <p:nvPr/>
         </p:nvSpPr>
@@ -34390,7 +33946,7 @@
       </p:sp>
       <p:sp>
         <p:nvSpPr>
-          <p:cNvPr id="742" name="TextBox 9"/>
+          <p:cNvPr id="747" name="TextBox 9"/>
           <p:cNvSpPr/>
           <p:nvPr/>
         </p:nvSpPr>
@@ -34443,7 +33999,7 @@
       </p:sp>
       <p:sp>
         <p:nvSpPr>
-          <p:cNvPr id="743" name="TextBox 10"/>
+          <p:cNvPr id="748" name="TextBox 10"/>
           <p:cNvSpPr/>
           <p:nvPr/>
         </p:nvSpPr>
@@ -34530,7 +34086,7 @@
       </p:sp>
       <p:sp>
         <p:nvSpPr>
-          <p:cNvPr id="744" name="Rectangle 11"/>
+          <p:cNvPr id="749" name="Rectangle 11"/>
           <p:cNvSpPr/>
           <p:nvPr/>
         </p:nvSpPr>
@@ -34589,7 +34145,7 @@
       </p:sp>
       <p:sp>
         <p:nvSpPr>
-          <p:cNvPr id="745" name="Rectangle 12"/>
+          <p:cNvPr id="750" name="Rectangle 12"/>
           <p:cNvSpPr/>
           <p:nvPr/>
         </p:nvSpPr>
@@ -34648,7 +34204,7 @@
       </p:sp>
       <p:sp>
         <p:nvSpPr>
-          <p:cNvPr id="746" name="TextBox 13"/>
+          <p:cNvPr id="751" name="TextBox 13"/>
           <p:cNvSpPr/>
           <p:nvPr/>
         </p:nvSpPr>
@@ -34701,7 +34257,7 @@
       </p:sp>
       <p:sp>
         <p:nvSpPr>
-          <p:cNvPr id="747" name="TextBox 14"/>
+          <p:cNvPr id="752" name="TextBox 14"/>
           <p:cNvSpPr/>
           <p:nvPr/>
         </p:nvSpPr>
@@ -34754,7 +34310,7 @@
       </p:sp>
       <p:sp>
         <p:nvSpPr>
-          <p:cNvPr id="748" name="TextBox 15"/>
+          <p:cNvPr id="753" name="TextBox 15"/>
           <p:cNvSpPr/>
           <p:nvPr/>
         </p:nvSpPr>
@@ -34841,7 +34397,7 @@
       </p:sp>
       <p:sp>
         <p:nvSpPr>
-          <p:cNvPr id="749" name="Rectangle 16"/>
+          <p:cNvPr id="754" name="Rectangle 16"/>
           <p:cNvSpPr/>
           <p:nvPr/>
         </p:nvSpPr>
@@ -34900,7 +34456,7 @@
       </p:sp>
       <p:sp>
         <p:nvSpPr>
-          <p:cNvPr id="750" name="Rectangle 17"/>
+          <p:cNvPr id="755" name="Rectangle 17"/>
           <p:cNvSpPr/>
           <p:nvPr/>
         </p:nvSpPr>
@@ -34959,7 +34515,7 @@
       </p:sp>
       <p:sp>
         <p:nvSpPr>
-          <p:cNvPr id="751" name="TextBox 18"/>
+          <p:cNvPr id="756" name="TextBox 18"/>
           <p:cNvSpPr/>
           <p:nvPr/>
         </p:nvSpPr>
@@ -35012,7 +34568,7 @@
       </p:sp>
       <p:sp>
         <p:nvSpPr>
-          <p:cNvPr id="752" name="TextBox 19"/>
+          <p:cNvPr id="757" name="TextBox 19"/>
           <p:cNvSpPr/>
           <p:nvPr/>
         </p:nvSpPr>
@@ -35065,7 +34621,7 @@
       </p:sp>
       <p:sp>
         <p:nvSpPr>
-          <p:cNvPr id="753" name="TextBox 20"/>
+          <p:cNvPr id="758" name="TextBox 20"/>
           <p:cNvSpPr/>
           <p:nvPr/>
         </p:nvSpPr>
@@ -35152,7 +34708,7 @@
       </p:sp>
       <p:sp>
         <p:nvSpPr>
-          <p:cNvPr id="754" name="Rectangle 21"/>
+          <p:cNvPr id="759" name="Rectangle 21"/>
           <p:cNvSpPr/>
           <p:nvPr/>
         </p:nvSpPr>
@@ -35211,7 +34767,7 @@
       </p:sp>
       <p:sp>
         <p:nvSpPr>
-          <p:cNvPr id="755" name="Rectangle 22"/>
+          <p:cNvPr id="760" name="Rectangle 22"/>
           <p:cNvSpPr/>
           <p:nvPr/>
         </p:nvSpPr>
@@ -35270,7 +34826,7 @@
       </p:sp>
       <p:sp>
         <p:nvSpPr>
-          <p:cNvPr id="756" name="TextBox 23"/>
+          <p:cNvPr id="761" name="TextBox 23"/>
           <p:cNvSpPr/>
           <p:nvPr/>
         </p:nvSpPr>
@@ -35323,7 +34879,7 @@
       </p:sp>
       <p:sp>
         <p:nvSpPr>
-          <p:cNvPr id="757" name="TextBox 24"/>
+          <p:cNvPr id="762" name="TextBox 24"/>
           <p:cNvSpPr/>
           <p:nvPr/>
         </p:nvSpPr>
@@ -35376,7 +34932,7 @@
       </p:sp>
       <p:sp>
         <p:nvSpPr>
-          <p:cNvPr id="758" name="TextBox 25"/>
+          <p:cNvPr id="763" name="TextBox 25"/>
           <p:cNvSpPr/>
           <p:nvPr/>
         </p:nvSpPr>
@@ -35463,7 +35019,7 @@
       </p:sp>
       <p:sp>
         <p:nvSpPr>
-          <p:cNvPr id="759" name="TextBox 26"/>
+          <p:cNvPr id="764" name="TextBox 26"/>
           <p:cNvSpPr/>
           <p:nvPr/>
         </p:nvSpPr>
@@ -35546,7 +35102,7 @@
       </p:grpSpPr>
       <p:sp>
         <p:nvSpPr>
-          <p:cNvPr id="760" name="Rectangle 1"/>
+          <p:cNvPr id="765" name="Rectangle 1"/>
           <p:cNvSpPr/>
           <p:nvPr/>
         </p:nvSpPr>
@@ -35605,13 +35161,13 @@
       </p:sp>
       <p:sp>
         <p:nvSpPr>
-          <p:cNvPr id="761" name="Rectangle 2"/>
-          <p:cNvSpPr/>
-          <p:nvPr/>
-        </p:nvSpPr>
-        <p:spPr>
-          <a:xfrm>
-            <a:off x="360" y="5486400"/>
+          <p:cNvPr id="766" name="Rectangle 2"/>
+          <p:cNvSpPr/>
+          <p:nvPr/>
+        </p:nvSpPr>
+        <p:spPr>
+          <a:xfrm>
+            <a:off x="155880" y="5486400"/>
             <a:ext cx="12188520" cy="109440"/>
           </a:xfrm>
           <a:prstGeom prst="rect">
@@ -35664,7 +35220,7 @@
       </p:sp>
       <p:sp>
         <p:nvSpPr>
-          <p:cNvPr id="762" name="Rectangle 3"/>
+          <p:cNvPr id="767" name="Rectangle 3"/>
           <p:cNvSpPr/>
           <p:nvPr/>
         </p:nvSpPr>
@@ -35723,7 +35279,7 @@
       </p:sp>
       <p:sp>
         <p:nvSpPr>
-          <p:cNvPr id="763" name="TextBox 4"/>
+          <p:cNvPr id="768" name="TextBox 4"/>
           <p:cNvSpPr/>
           <p:nvPr/>
         </p:nvSpPr>
@@ -35776,7 +35332,7 @@
       </p:sp>
       <p:sp>
         <p:nvSpPr>
-          <p:cNvPr id="764" name="Rectangle 5"/>
+          <p:cNvPr id="769" name="Rectangle 5"/>
           <p:cNvSpPr/>
           <p:nvPr/>
         </p:nvSpPr>
@@ -35835,7 +35391,7 @@
       </p:sp>
       <p:sp>
         <p:nvSpPr>
-          <p:cNvPr id="765" name="Rectangle 6"/>
+          <p:cNvPr id="770" name="Rectangle 6"/>
           <p:cNvSpPr/>
           <p:nvPr/>
         </p:nvSpPr>
@@ -35894,7 +35450,7 @@
       </p:sp>
       <p:sp>
         <p:nvSpPr>
-          <p:cNvPr id="766" name="TextBox 7"/>
+          <p:cNvPr id="771" name="TextBox 7"/>
           <p:cNvSpPr/>
           <p:nvPr/>
         </p:nvSpPr>
@@ -35956,7 +35512,7 @@
       </p:sp>
       <p:sp>
         <p:nvSpPr>
-          <p:cNvPr id="767" name="TextBox 8"/>
+          <p:cNvPr id="772" name="TextBox 8"/>
           <p:cNvSpPr/>
           <p:nvPr/>
         </p:nvSpPr>
@@ -36009,7 +35565,7 @@
       </p:sp>
       <p:sp>
         <p:nvSpPr>
-          <p:cNvPr id="768" name="TextBox 9"/>
+          <p:cNvPr id="773" name="TextBox 9"/>
           <p:cNvSpPr/>
           <p:nvPr/>
         </p:nvSpPr>
@@ -36062,7 +35618,7 @@
       </p:sp>
       <p:sp>
         <p:nvSpPr>
-          <p:cNvPr id="769" name="Rectangle 10"/>
+          <p:cNvPr id="774" name="Rectangle 10"/>
           <p:cNvSpPr/>
           <p:nvPr/>
         </p:nvSpPr>
@@ -36121,7 +35677,7 @@
       </p:sp>
       <p:sp>
         <p:nvSpPr>
-          <p:cNvPr id="770" name="Rectangle 11"/>
+          <p:cNvPr id="775" name="Rectangle 11"/>
           <p:cNvSpPr/>
           <p:nvPr/>
         </p:nvSpPr>
@@ -36180,7 +35736,7 @@
       </p:sp>
       <p:sp>
         <p:nvSpPr>
-          <p:cNvPr id="771" name="TextBox 12"/>
+          <p:cNvPr id="776" name="TextBox 12"/>
           <p:cNvSpPr/>
           <p:nvPr/>
         </p:nvSpPr>
@@ -36242,7 +35798,7 @@
       </p:sp>
       <p:sp>
         <p:nvSpPr>
-          <p:cNvPr id="772" name="TextBox 13"/>
+          <p:cNvPr id="777" name="TextBox 13"/>
           <p:cNvSpPr/>
           <p:nvPr/>
         </p:nvSpPr>
@@ -36295,7 +35851,7 @@
       </p:sp>
       <p:sp>
         <p:nvSpPr>
-          <p:cNvPr id="773" name="TextBox 14"/>
+          <p:cNvPr id="778" name="TextBox 14"/>
           <p:cNvSpPr/>
           <p:nvPr/>
         </p:nvSpPr>
@@ -36348,7 +35904,7 @@
       </p:sp>
       <p:sp>
         <p:nvSpPr>
-          <p:cNvPr id="774" name="Rectangle 15"/>
+          <p:cNvPr id="779" name="Rectangle 15"/>
           <p:cNvSpPr/>
           <p:nvPr/>
         </p:nvSpPr>
@@ -36407,7 +35963,7 @@
       </p:sp>
       <p:sp>
         <p:nvSpPr>
-          <p:cNvPr id="775" name="Rectangle 16"/>
+          <p:cNvPr id="780" name="Rectangle 16"/>
           <p:cNvSpPr/>
           <p:nvPr/>
         </p:nvSpPr>
@@ -36466,7 +36022,7 @@
       </p:sp>
       <p:sp>
         <p:nvSpPr>
-          <p:cNvPr id="776" name="TextBox 17"/>
+          <p:cNvPr id="781" name="TextBox 17"/>
           <p:cNvSpPr/>
           <p:nvPr/>
         </p:nvSpPr>
@@ -36528,7 +36084,7 @@
       </p:sp>
       <p:sp>
         <p:nvSpPr>
-          <p:cNvPr id="777" name="TextBox 18"/>
+          <p:cNvPr id="782" name="TextBox 18"/>
           <p:cNvSpPr/>
           <p:nvPr/>
         </p:nvSpPr>
@@ -36581,7 +36137,7 @@
       </p:sp>
       <p:sp>
         <p:nvSpPr>
-          <p:cNvPr id="778" name="TextBox 19"/>
+          <p:cNvPr id="783" name="TextBox 19"/>
           <p:cNvSpPr/>
           <p:nvPr/>
         </p:nvSpPr>
@@ -36634,7 +36190,7 @@
       </p:sp>
       <p:sp>
         <p:nvSpPr>
-          <p:cNvPr id="779" name="Rectangle 20"/>
+          <p:cNvPr id="784" name="Rectangle 20"/>
           <p:cNvSpPr/>
           <p:nvPr/>
         </p:nvSpPr>
@@ -36693,7 +36249,7 @@
       </p:sp>
       <p:sp>
         <p:nvSpPr>
-          <p:cNvPr id="780" name="Rectangle 21"/>
+          <p:cNvPr id="785" name="Rectangle 21"/>
           <p:cNvSpPr/>
           <p:nvPr/>
         </p:nvSpPr>
@@ -36752,7 +36308,7 @@
       </p:sp>
       <p:sp>
         <p:nvSpPr>
-          <p:cNvPr id="781" name="TextBox 22"/>
+          <p:cNvPr id="786" name="TextBox 22"/>
           <p:cNvSpPr/>
           <p:nvPr/>
         </p:nvSpPr>
@@ -36814,7 +36370,7 @@
       </p:sp>
       <p:sp>
         <p:nvSpPr>
-          <p:cNvPr id="782" name="TextBox 23"/>
+          <p:cNvPr id="787" name="TextBox 23"/>
           <p:cNvSpPr/>
           <p:nvPr/>
         </p:nvSpPr>
@@ -36867,7 +36423,7 @@
       </p:sp>
       <p:sp>
         <p:nvSpPr>
-          <p:cNvPr id="783" name="TextBox 24"/>
+          <p:cNvPr id="788" name="TextBox 24"/>
           <p:cNvSpPr/>
           <p:nvPr/>
         </p:nvSpPr>
@@ -36920,7 +36476,7 @@
       </p:sp>
       <p:sp>
         <p:nvSpPr>
-          <p:cNvPr id="784" name="Rectangle 25"/>
+          <p:cNvPr id="789" name="Rectangle 25"/>
           <p:cNvSpPr/>
           <p:nvPr/>
         </p:nvSpPr>
@@ -36979,7 +36535,7 @@
       </p:sp>
       <p:sp>
         <p:nvSpPr>
-          <p:cNvPr id="785" name="Rectangle 26"/>
+          <p:cNvPr id="790" name="Rectangle 26"/>
           <p:cNvSpPr/>
           <p:nvPr/>
         </p:nvSpPr>
@@ -37038,7 +36594,7 @@
       </p:sp>
       <p:sp>
         <p:nvSpPr>
-          <p:cNvPr id="786" name="TextBox 27"/>
+          <p:cNvPr id="791" name="TextBox 27"/>
           <p:cNvSpPr/>
           <p:nvPr/>
         </p:nvSpPr>
@@ -37100,7 +36656,7 @@
       </p:sp>
       <p:sp>
         <p:nvSpPr>
-          <p:cNvPr id="787" name="TextBox 28"/>
+          <p:cNvPr id="792" name="TextBox 28"/>
           <p:cNvSpPr/>
           <p:nvPr/>
         </p:nvSpPr>
@@ -37153,7 +36709,7 @@
       </p:sp>
       <p:sp>
         <p:nvSpPr>
-          <p:cNvPr id="788" name="TextBox 29"/>
+          <p:cNvPr id="793" name="TextBox 29"/>
           <p:cNvSpPr/>
           <p:nvPr/>
         </p:nvSpPr>
@@ -37206,7 +36762,7 @@
       </p:sp>
       <p:sp>
         <p:nvSpPr>
-          <p:cNvPr id="789" name="TextBox 30"/>
+          <p:cNvPr id="794" name="TextBox 30"/>
           <p:cNvSpPr/>
           <p:nvPr/>
         </p:nvSpPr>
@@ -37259,7 +36815,7 @@
       </p:sp>
       <p:sp>
         <p:nvSpPr>
-          <p:cNvPr id="790" name="TextBox 31"/>
+          <p:cNvPr id="795" name="TextBox 31"/>
           <p:cNvSpPr/>
           <p:nvPr/>
         </p:nvSpPr>
@@ -48675,7 +48231,7 @@
         <p:spPr>
           <a:xfrm>
             <a:off x="365760" y="91440"/>
-            <a:ext cx="9143640" cy="943560"/>
+            <a:ext cx="10149840" cy="517320"/>
           </a:xfrm>
           <a:prstGeom prst="rect">
             <a:avLst/>
